--- a/decks/code-switching-lesson-v2.pptx
+++ b/decks/code-switching-lesson-v2.pptx
@@ -15,6 +15,7 @@
     <p:sldId id="263" r:id="rId15"/>
     <p:sldId id="264" r:id="rId16"/>
     <p:sldId id="265" r:id="rId17"/>
+    <p:sldId id="266" r:id="rId18"/>
   </p:sldIdLst>
   <p:sldSz cx="12192000" cy="6858000" type="screen4x3"/>
   <p:notesSz cx="6858000" cy="9144000"/>
@@ -511,7 +512,7 @@
           <a:lstStyle/>
           <a:p>
             <a:r>
-              <a:t>This page and the next three are hidden. They stay in the deck for you and are skipped when you present.</a:t>
+              <a:t>This page is hidden and skipped when you present. The full plan, care notes and research are on the hidden pages at the end of the deck, if you want them.</a:t>
             </a:r>
           </a:p>
         </p:txBody>
@@ -932,6 +933,76 @@
           <a:p>
             <a:r>
               <a:t>3 MINUTES. Private writing; no sharing required. Share the student page link. Mention that if switching wears them out most days, or someone treats them differently because of who they are, a counselor is a good person to talk to, and the student page lists who.</a:t>
+            </a:r>
+          </a:p>
+        </p:txBody>
+      </p:sp>
+      <p:sp>
+        <p:nvSpPr>
+          <p:cNvPr id="4" name="Slide Number Placeholder 3"/>
+          <p:cNvSpPr>
+            <a:spLocks noGrp="1"/>
+          </p:cNvSpPr>
+          <p:nvPr>
+            <p:ph type="sldNum" idx="5" sz="quarter"/>
+          </p:nvPr>
+        </p:nvSpPr>
+        <p:spPr/>
+      </p:sp>
+    </p:spTree>
+  </p:cSld>
+  <p:clrMapOvr>
+    <a:masterClrMapping/>
+  </p:clrMapOvr>
+</p:notes>
+</file>
+
+<file path=ppt/notesSlides/notesSlide8.xml><?xml version="1.0" encoding="utf-8"?>
+<p:notes xmlns:a="http://schemas.openxmlformats.org/drawingml/2006/main" xmlns:p="http://schemas.openxmlformats.org/presentationml/2006/main" xmlns:r="http://schemas.openxmlformats.org/officeDocument/2006/relationships">
+  <p:cSld>
+    <p:spTree>
+      <p:nvGrpSpPr>
+        <p:cNvPr id="1" name=""/>
+        <p:cNvGrpSpPr/>
+        <p:nvPr/>
+      </p:nvGrpSpPr>
+      <p:grpSpPr>
+        <a:xfrm>
+          <a:off x="0" y="0"/>
+          <a:ext cx="0" cy="0"/>
+          <a:chOff x="0" y="0"/>
+          <a:chExt cx="0" cy="0"/>
+        </a:xfrm>
+      </p:grpSpPr>
+      <p:sp>
+        <p:nvSpPr>
+          <p:cNvPr id="2" name="Slide Image Placeholder 1"/>
+          <p:cNvSpPr>
+            <a:spLocks noGrp="1"/>
+          </p:cNvSpPr>
+          <p:nvPr>
+            <p:ph type="sldImg" idx="2"/>
+          </p:nvPr>
+        </p:nvSpPr>
+        <p:spPr/>
+      </p:sp>
+      <p:sp>
+        <p:nvSpPr>
+          <p:cNvPr id="3" name="Notes Placeholder 2"/>
+          <p:cNvSpPr>
+            <a:spLocks noGrp="1"/>
+          </p:cNvSpPr>
+          <p:nvPr>
+            <p:ph type="body" idx="3" sz="quarter"/>
+          </p:nvPr>
+        </p:nvSpPr>
+        <p:spPr/>
+        <p:txBody>
+          <a:bodyPr/>
+          <a:lstStyle/>
+          <a:p>
+            <a:r>
+              <a:t>If you want more: this page and the next three are hidden and skipped when you present.</a:t>
             </a:r>
           </a:p>
         </p:txBody>
@@ -4023,7 +4094,7 @@
                 </a:solidFill>
                 <a:latin typeface="Inter Tight"/>
               </a:rPr>
-              <a:t>TEACHER PAGE  ·  skipped when you present  ·  Lesson plan</a:t>
+              <a:t>TEACHER PAGE  ·  skipped when you present  ·  Before you start</a:t>
             </a:r>
           </a:p>
         </p:txBody>
@@ -4114,8 +4185,8 @@
         </p:nvSpPr>
         <p:spPr>
           <a:xfrm>
-            <a:off x="548640" y="1828800"/>
-            <a:ext cx="5120640" cy="4389120"/>
+            <a:off x="548640" y="2011680"/>
+            <a:ext cx="11064240" cy="4206240"/>
           </a:xfrm>
           <a:prstGeom prst="rect">
             <a:avLst/>
@@ -4130,43 +4201,43 @@
           <a:p>
             <a:pPr algn="l">
               <a:spcAft>
-                <a:spcPts val="675"/>
-              </a:spcAft>
-            </a:pPr>
-            <a:r>
-              <a:rPr sz="1100" b="1" i="0">
+                <a:spcPts val="900"/>
+              </a:spcAft>
+            </a:pPr>
+            <a:r>
+              <a:rPr sz="1200" b="1" i="0">
                 <a:solidFill>
                   <a:srgbClr val="0B2D5B"/>
                 </a:solidFill>
                 <a:latin typeface="Inter Tight"/>
               </a:rPr>
-              <a:t>GOAL</a:t>
-            </a:r>
-          </a:p>
-          <a:p>
-            <a:pPr algn="l">
-              <a:spcAft>
-                <a:spcPts val="675"/>
-              </a:spcAft>
-            </a:pPr>
-            <a:r>
-              <a:rPr sz="1500" b="0" i="0">
+              <a:t>BEFORE YOU START</a:t>
+            </a:r>
+          </a:p>
+          <a:p>
+            <a:pPr algn="l">
+              <a:spcAft>
+                <a:spcPts val="900"/>
+              </a:spcAft>
+            </a:pPr>
+            <a:r>
+              <a:rPr sz="2000" b="0" i="0">
                 <a:solidFill>
                   <a:srgbClr val="1C1B19"/>
                 </a:solidFill>
                 <a:latin typeface="Source Serif 4"/>
               </a:rPr>
-              <a:t>Students can describe code switching as a normal skill, name what it can protect and what it can cost, and identify one place where they get to be all the way themselves. Nobody is asked to name their race, culture, religion, gender, sexuality or disability, or to share what they switch.</a:t>
-            </a:r>
-          </a:p>
-          <a:p>
-            <a:pPr algn="l">
-              <a:spcAft>
-                <a:spcPts val="675"/>
-              </a:spcAft>
-            </a:pPr>
-            <a:r>
-              <a:rPr sz="1500" b="0" i="0">
+              <a:t>Students learn that code switching is a normal skill, what it can protect and what it can cost, and where they get to be all the way themselves. Bring index cards, go first with a light example of your own, and never ask a student to speak for a group.</a:t>
+            </a:r>
+          </a:p>
+          <a:p>
+            <a:pPr algn="l">
+              <a:spcAft>
+                <a:spcPts val="900"/>
+              </a:spcAft>
+            </a:pPr>
+            <a:r>
+              <a:rPr sz="2000" b="0" i="0">
                 <a:solidFill>
                   <a:srgbClr val="1C1B19"/>
                 </a:solidFill>
@@ -4178,277 +4249,33 @@
           <a:p>
             <a:pPr algn="l">
               <a:spcAft>
-                <a:spcPts val="675"/>
-              </a:spcAft>
-            </a:pPr>
-            <a:r>
-              <a:rPr sz="1100" b="1" i="0">
+                <a:spcPts val="900"/>
+              </a:spcAft>
+            </a:pPr>
+            <a:r>
+              <a:rPr sz="1200" b="1" i="0">
                 <a:solidFill>
                   <a:srgbClr val="0B2D5B"/>
                 </a:solidFill>
                 <a:latin typeface="Inter Tight"/>
               </a:rPr>
-              <a:t>MATERIALS</a:t>
-            </a:r>
-          </a:p>
-          <a:p>
-            <a:pPr algn="l">
-              <a:spcAft>
-                <a:spcPts val="675"/>
-              </a:spcAft>
-            </a:pPr>
-            <a:r>
-              <a:rPr sz="1500" b="0" i="0">
+              <a:t>EVERY STUDENT IN THE ROOM</a:t>
+            </a:r>
+          </a:p>
+          <a:p>
+            <a:pPr algn="l">
+              <a:spcAft>
+                <a:spcPts val="900"/>
+              </a:spcAft>
+            </a:pPr>
+            <a:r>
+              <a:rPr sz="2000" b="0" i="0">
                 <a:solidFill>
                   <a:srgbClr val="1C1B19"/>
                 </a:solidFill>
                 <a:latin typeface="Source Serif 4"/>
               </a:rPr>
-              <a:t>Index cards, one per student</a:t>
-            </a:r>
-          </a:p>
-          <a:p>
-            <a:pPr algn="l">
-              <a:spcAft>
-                <a:spcPts val="675"/>
-              </a:spcAft>
-            </a:pPr>
-            <a:r>
-              <a:rPr sz="1500" b="0" i="0">
-                <a:solidFill>
-                  <a:srgbClr val="1C1B19"/>
-                </a:solidFill>
-                <a:latin typeface="Source Serif 4"/>
-              </a:rPr>
-              <a:t>A board or chart paper</a:t>
-            </a:r>
-          </a:p>
-          <a:p>
-            <a:pPr algn="l">
-              <a:spcAft>
-                <a:spcPts val="675"/>
-              </a:spcAft>
-            </a:pPr>
-            <a:r>
-              <a:rPr sz="1500" b="0" i="0">
-                <a:solidFill>
-                  <a:srgbClr val="1C1B19"/>
-                </a:solidFill>
-                <a:latin typeface="Source Serif 4"/>
-              </a:rPr>
-              <a:t>The student page link (last slide) to share after advisory</a:t>
-            </a:r>
-          </a:p>
-        </p:txBody>
-      </p:sp>
-      <p:sp>
-        <p:nvSpPr>
-          <p:cNvPr id="7" name="TextBox 6"/>
-          <p:cNvSpPr txBox="1"/>
-          <p:nvPr/>
-        </p:nvSpPr>
-        <p:spPr>
-          <a:xfrm>
-            <a:off x="6126480" y="1828800"/>
-            <a:ext cx="5486400" cy="4389120"/>
-          </a:xfrm>
-          <a:prstGeom prst="rect">
-            <a:avLst/>
-          </a:prstGeom>
-          <a:noFill/>
-        </p:spPr>
-        <p:txBody>
-          <a:bodyPr wrap="square" anchor="t" lIns="0" rIns="0" tIns="0" bIns="0">
-            <a:spAutoFit/>
-          </a:bodyPr>
-          <a:lstStyle/>
-          <a:p>
-            <a:pPr algn="l">
-              <a:spcAft>
-                <a:spcPts val="630"/>
-              </a:spcAft>
-            </a:pPr>
-            <a:r>
-              <a:rPr sz="1100" b="1" i="0">
-                <a:solidFill>
-                  <a:srgbClr val="0B2D5B"/>
-                </a:solidFill>
-                <a:latin typeface="Inter Tight"/>
-              </a:rPr>
-              <a:t>FLOW</a:t>
-            </a:r>
-          </a:p>
-          <a:p>
-            <a:pPr algn="l">
-              <a:spcAft>
-                <a:spcPts val="630"/>
-              </a:spcAft>
-            </a:pPr>
-            <a:r>
-              <a:rPr sz="1300" b="1" i="0">
-                <a:solidFill>
-                  <a:srgbClr val="F47B20"/>
-                </a:solidFill>
-                <a:latin typeface="Inter Tight"/>
-              </a:rPr>
-              <a:t>3 min   </a:t>
-            </a:r>
-            <a:r>
-              <a:rPr sz="1400" b="0" i="0">
-                <a:solidFill>
-                  <a:srgbClr val="1C1B19"/>
-                </a:solidFill>
-                <a:latin typeface="Source Serif 4"/>
-              </a:rPr>
-              <a:t>Three rooms: how do you talk in each?</a:t>
-            </a:r>
-          </a:p>
-          <a:p>
-            <a:pPr algn="l">
-              <a:spcAft>
-                <a:spcPts val="630"/>
-              </a:spcAft>
-            </a:pPr>
-            <a:r>
-              <a:rPr sz="1300" b="1" i="0">
-                <a:solidFill>
-                  <a:srgbClr val="F47B20"/>
-                </a:solidFill>
-                <a:latin typeface="Inter Tight"/>
-              </a:rPr>
-              <a:t>4 min   </a:t>
-            </a:r>
-            <a:r>
-              <a:rPr sz="1400" b="0" i="0">
-                <a:solidFill>
-                  <a:srgbClr val="1C1B19"/>
-                </a:solidFill>
-                <a:latin typeface="Source Serif 4"/>
-              </a:rPr>
-              <a:t>What people switch (private tally)</a:t>
-            </a:r>
-          </a:p>
-          <a:p>
-            <a:pPr algn="l">
-              <a:spcAft>
-                <a:spcPts val="630"/>
-              </a:spcAft>
-            </a:pPr>
-            <a:r>
-              <a:rPr sz="1300" b="1" i="0">
-                <a:solidFill>
-                  <a:srgbClr val="F47B20"/>
-                </a:solidFill>
-                <a:latin typeface="Inter Tight"/>
-              </a:rPr>
-              <a:t>5 min   </a:t>
-            </a:r>
-            <a:r>
-              <a:rPr sz="1400" b="0" i="0">
-                <a:solidFill>
-                  <a:srgbClr val="1C1B19"/>
-                </a:solidFill>
-                <a:latin typeface="Source Serif 4"/>
-              </a:rPr>
-              <a:t>Home games and away games</a:t>
-            </a:r>
-          </a:p>
-          <a:p>
-            <a:pPr algn="l">
-              <a:spcAft>
-                <a:spcPts val="630"/>
-              </a:spcAft>
-            </a:pPr>
-            <a:r>
-              <a:rPr sz="1300" b="1" i="0">
-                <a:solidFill>
-                  <a:srgbClr val="F47B20"/>
-                </a:solidFill>
-                <a:latin typeface="Inter Tight"/>
-              </a:rPr>
-              <a:t>5 min   </a:t>
-            </a:r>
-            <a:r>
-              <a:rPr sz="1400" b="0" i="0">
-                <a:solidFill>
-                  <a:srgbClr val="1C1B19"/>
-                </a:solidFill>
-                <a:latin typeface="Source Serif 4"/>
-              </a:rPr>
-              <a:t>What it gives, what it costs</a:t>
-            </a:r>
-          </a:p>
-          <a:p>
-            <a:pPr algn="l">
-              <a:spcAft>
-                <a:spcPts val="630"/>
-              </a:spcAft>
-            </a:pPr>
-            <a:r>
-              <a:rPr sz="1300" b="1" i="0">
-                <a:solidFill>
-                  <a:srgbClr val="F47B20"/>
-                </a:solidFill>
-                <a:latin typeface="Inter Tight"/>
-              </a:rPr>
-              <a:t>3 min   </a:t>
-            </a:r>
-            <a:r>
-              <a:rPr sz="1400" b="0" i="0">
-                <a:solidFill>
-                  <a:srgbClr val="1C1B19"/>
-                </a:solidFill>
-                <a:latin typeface="Source Serif 4"/>
-              </a:rPr>
-              <a:t>Your home game, privately, and the student page link</a:t>
-            </a:r>
-          </a:p>
-          <a:p>
-            <a:pPr algn="l">
-              <a:spcAft>
-                <a:spcPts val="630"/>
-              </a:spcAft>
-            </a:pPr>
-            <a:r>
-              <a:rPr sz="1400" b="0" i="0">
-                <a:solidFill>
-                  <a:srgbClr val="1C1B19"/>
-                </a:solidFill>
-                <a:latin typeface="Source Serif 4"/>
-              </a:rPr>
-              <a:t/>
-            </a:r>
-          </a:p>
-          <a:p>
-            <a:pPr algn="l">
-              <a:spcAft>
-                <a:spcPts val="630"/>
-              </a:spcAft>
-            </a:pPr>
-            <a:r>
-              <a:rPr sz="1100" b="1" i="0">
-                <a:solidFill>
-                  <a:srgbClr val="0B2D5B"/>
-                </a:solidFill>
-                <a:latin typeface="Inter Tight"/>
-              </a:rPr>
-              <a:t>SHORT ON TIME (10-MINUTE CHECK-IN)</a:t>
-            </a:r>
-          </a:p>
-          <a:p>
-            <a:pPr algn="l">
-              <a:spcAft>
-                <a:spcPts val="630"/>
-              </a:spcAft>
-            </a:pPr>
-            <a:r>
-              <a:rPr sz="1400" b="0" i="0">
-                <a:solidFill>
-                  <a:srgbClr val="1C1B19"/>
-                </a:solidFill>
-                <a:latin typeface="Source Serif 4"/>
-              </a:rPr>
-              <a:t>Three rooms prompt (2), home games and away games (4), find one home game, privately (3), share the link (1).</a:t>
+              <a:t>Language, race, money, faith, neurodivergence and LGBTQ+ identity all come up here; let students choose what they share, and say plainly that switching to stay safe from bias is on the people doing the treating.</a:t>
             </a:r>
           </a:p>
         </p:txBody>
@@ -4462,6 +4289,1146 @@
 </file>
 
 <file path=ppt/slides/slide10.xml><?xml version="1.0" encoding="utf-8"?>
+<p:sld xmlns:a="http://schemas.openxmlformats.org/drawingml/2006/main" xmlns:p="http://schemas.openxmlformats.org/presentationml/2006/main" xmlns:r="http://schemas.openxmlformats.org/officeDocument/2006/relationships" show="0">
+  <p:cSld>
+    <p:bg>
+      <p:bgPr>
+        <a:solidFill>
+          <a:srgbClr val="EEEBE4"/>
+        </a:solidFill>
+        <a:effectLst/>
+      </p:bgPr>
+    </p:bg>
+    <p:spTree>
+      <p:nvGrpSpPr>
+        <p:cNvPr id="1" name=""/>
+        <p:cNvGrpSpPr/>
+        <p:nvPr/>
+      </p:nvGrpSpPr>
+      <p:grpSpPr/>
+      <p:sp>
+        <p:nvSpPr>
+          <p:cNvPr id="2" name="Rectangle 1"/>
+          <p:cNvSpPr/>
+          <p:nvPr/>
+        </p:nvSpPr>
+        <p:spPr>
+          <a:xfrm>
+            <a:off x="0" y="0"/>
+            <a:ext cx="12191695" cy="384048"/>
+          </a:xfrm>
+          <a:prstGeom prst="rect">
+            <a:avLst/>
+          </a:prstGeom>
+          <a:solidFill>
+            <a:srgbClr val="0B2D5B"/>
+          </a:solidFill>
+          <a:ln>
+            <a:noFill/>
+          </a:ln>
+          <a:effectLst/>
+        </p:spPr>
+        <p:style>
+          <a:lnRef idx="1">
+            <a:schemeClr val="accent1"/>
+          </a:lnRef>
+          <a:fillRef idx="3">
+            <a:schemeClr val="accent1"/>
+          </a:fillRef>
+          <a:effectRef idx="2">
+            <a:schemeClr val="accent1"/>
+          </a:effectRef>
+          <a:fontRef idx="minor">
+            <a:schemeClr val="lt1"/>
+          </a:fontRef>
+        </p:style>
+        <p:txBody>
+          <a:bodyPr rtlCol="0" anchor="ctr"/>
+          <a:lstStyle/>
+          <a:p>
+            <a:pPr algn="ctr"/>
+          </a:p>
+        </p:txBody>
+      </p:sp>
+      <p:sp>
+        <p:nvSpPr>
+          <p:cNvPr id="3" name="TextBox 2"/>
+          <p:cNvSpPr txBox="1"/>
+          <p:nvPr/>
+        </p:nvSpPr>
+        <p:spPr>
+          <a:xfrm>
+            <a:off x="548640" y="100584"/>
+            <a:ext cx="10972800" cy="274320"/>
+          </a:xfrm>
+          <a:prstGeom prst="rect">
+            <a:avLst/>
+          </a:prstGeom>
+          <a:noFill/>
+        </p:spPr>
+        <p:txBody>
+          <a:bodyPr wrap="square" anchor="t" lIns="0" rIns="0" tIns="0" bIns="0">
+            <a:spAutoFit/>
+          </a:bodyPr>
+          <a:lstStyle/>
+          <a:p>
+            <a:pPr algn="l">
+              <a:spcAft>
+                <a:spcPts val="495"/>
+              </a:spcAft>
+            </a:pPr>
+            <a:r>
+              <a:rPr sz="1100" b="1" i="0">
+                <a:solidFill>
+                  <a:srgbClr val="FFFFFF"/>
+                </a:solidFill>
+                <a:latin typeface="Inter Tight"/>
+              </a:rPr>
+              <a:t>TEACHER PAGE  ·  skipped when you present  ·  Every student in the room</a:t>
+            </a:r>
+          </a:p>
+        </p:txBody>
+      </p:sp>
+      <p:sp>
+        <p:nvSpPr>
+          <p:cNvPr id="4" name="TextBox 3"/>
+          <p:cNvSpPr txBox="1"/>
+          <p:nvPr/>
+        </p:nvSpPr>
+        <p:spPr>
+          <a:xfrm>
+            <a:off x="548640" y="685800"/>
+            <a:ext cx="10972800" cy="640080"/>
+          </a:xfrm>
+          <a:prstGeom prst="rect">
+            <a:avLst/>
+          </a:prstGeom>
+          <a:noFill/>
+        </p:spPr>
+        <p:txBody>
+          <a:bodyPr wrap="square" anchor="t" lIns="0" rIns="0" tIns="0" bIns="0">
+            <a:spAutoFit/>
+          </a:bodyPr>
+          <a:lstStyle/>
+          <a:p>
+            <a:pPr algn="l">
+              <a:spcAft>
+                <a:spcPts val="1350"/>
+              </a:spcAft>
+            </a:pPr>
+            <a:r>
+              <a:rPr sz="3000" b="1" i="0">
+                <a:solidFill>
+                  <a:srgbClr val="1C1B19"/>
+                </a:solidFill>
+                <a:latin typeface="Source Serif 4"/>
+              </a:rPr>
+              <a:t>Every student in the room</a:t>
+            </a:r>
+          </a:p>
+        </p:txBody>
+      </p:sp>
+      <p:sp>
+        <p:nvSpPr>
+          <p:cNvPr id="5" name="TextBox 4"/>
+          <p:cNvSpPr txBox="1"/>
+          <p:nvPr/>
+        </p:nvSpPr>
+        <p:spPr>
+          <a:xfrm>
+            <a:off x="548640" y="1325880"/>
+            <a:ext cx="10972800" cy="365760"/>
+          </a:xfrm>
+          <a:prstGeom prst="rect">
+            <a:avLst/>
+          </a:prstGeom>
+          <a:noFill/>
+        </p:spPr>
+        <p:txBody>
+          <a:bodyPr wrap="square" anchor="t" lIns="0" rIns="0" tIns="0" bIns="0">
+            <a:spAutoFit/>
+          </a:bodyPr>
+          <a:lstStyle/>
+          <a:p>
+            <a:pPr algn="l">
+              <a:spcAft>
+                <a:spcPts val="630"/>
+              </a:spcAft>
+            </a:pPr>
+            <a:r>
+              <a:rPr sz="1400" b="0" i="0">
+                <a:solidFill>
+                  <a:srgbClr val="5D5A54"/>
+                </a:solidFill>
+                <a:latin typeface="Inter Tight"/>
+              </a:rPr>
+              <a:t>Culture, family, identity, ability and money: what to keep in mind for this topic.</a:t>
+            </a:r>
+          </a:p>
+        </p:txBody>
+      </p:sp>
+      <p:sp>
+        <p:nvSpPr>
+          <p:cNvPr id="6" name="TextBox 5"/>
+          <p:cNvSpPr txBox="1"/>
+          <p:nvPr/>
+        </p:nvSpPr>
+        <p:spPr>
+          <a:xfrm>
+            <a:off x="548640" y="1828800"/>
+            <a:ext cx="5394960" cy="4572000"/>
+          </a:xfrm>
+          <a:prstGeom prst="rect">
+            <a:avLst/>
+          </a:prstGeom>
+          <a:noFill/>
+        </p:spPr>
+        <p:txBody>
+          <a:bodyPr wrap="square" anchor="t" lIns="0" rIns="0" tIns="0" bIns="0">
+            <a:spAutoFit/>
+          </a:bodyPr>
+          <a:lstStyle/>
+          <a:p>
+            <a:pPr algn="l">
+              <a:spcAft>
+                <a:spcPts val="585"/>
+              </a:spcAft>
+            </a:pPr>
+            <a:r>
+              <a:rPr sz="1500" b="1" i="0">
+                <a:solidFill>
+                  <a:srgbClr val="1C1B19"/>
+                </a:solidFill>
+                <a:latin typeface="Source Serif 4"/>
+              </a:rPr>
+              <a:t>Language at home.</a:t>
+            </a:r>
+          </a:p>
+          <a:p>
+            <a:pPr algn="l">
+              <a:spcAft>
+                <a:spcPts val="585"/>
+              </a:spcAft>
+            </a:pPr>
+            <a:r>
+              <a:rPr sz="1300" b="0" i="0">
+                <a:solidFill>
+                  <a:srgbClr val="1C1B19"/>
+                </a:solidFill>
+                <a:latin typeface="Source Serif 4"/>
+              </a:rPr>
+              <a:t>Some students speak another language at home, translate for parents, or are told they're losing their home language. Treat all of it as an asset, not a gap.</a:t>
+            </a:r>
+          </a:p>
+          <a:p>
+            <a:pPr algn="l">
+              <a:spcAft>
+                <a:spcPts val="585"/>
+              </a:spcAft>
+            </a:pPr>
+            <a:r>
+              <a:rPr sz="1300" b="0" i="0">
+                <a:solidFill>
+                  <a:srgbClr val="1C1B19"/>
+                </a:solidFill>
+                <a:latin typeface="Source Serif 4"/>
+              </a:rPr>
+              <a:t/>
+            </a:r>
+          </a:p>
+          <a:p>
+            <a:pPr algn="l">
+              <a:spcAft>
+                <a:spcPts val="585"/>
+              </a:spcAft>
+            </a:pPr>
+            <a:r>
+              <a:rPr sz="1500" b="1" i="0">
+                <a:solidFill>
+                  <a:srgbClr val="1C1B19"/>
+                </a:solidFill>
+                <a:latin typeface="Source Serif 4"/>
+              </a:rPr>
+              <a:t>Race and ethnicity.</a:t>
+            </a:r>
+          </a:p>
+          <a:p>
+            <a:pPr algn="l">
+              <a:spcAft>
+                <a:spcPts val="585"/>
+              </a:spcAft>
+            </a:pPr>
+            <a:r>
+              <a:rPr sz="1300" b="0" i="0">
+                <a:solidFill>
+                  <a:srgbClr val="1C1B19"/>
+                </a:solidFill>
+                <a:latin typeface="Source Serif 4"/>
+              </a:rPr>
+              <a:t>Research on racial code switching mostly involves Black students and adults, and it applies to many others too. Keep examples broad and let students connect them to their own lives if they want.</a:t>
+            </a:r>
+          </a:p>
+          <a:p>
+            <a:pPr algn="l">
+              <a:spcAft>
+                <a:spcPts val="585"/>
+              </a:spcAft>
+            </a:pPr>
+            <a:r>
+              <a:rPr sz="1300" b="0" i="0">
+                <a:solidFill>
+                  <a:srgbClr val="1C1B19"/>
+                </a:solidFill>
+                <a:latin typeface="Source Serif 4"/>
+              </a:rPr>
+              <a:t/>
+            </a:r>
+          </a:p>
+          <a:p>
+            <a:pPr algn="l">
+              <a:spcAft>
+                <a:spcPts val="585"/>
+              </a:spcAft>
+            </a:pPr>
+            <a:r>
+              <a:rPr sz="1500" b="1" i="0">
+                <a:solidFill>
+                  <a:srgbClr val="1C1B19"/>
+                </a:solidFill>
+                <a:latin typeface="Source Serif 4"/>
+              </a:rPr>
+              <a:t>Neurodivergence.</a:t>
+            </a:r>
+          </a:p>
+          <a:p>
+            <a:pPr algn="l">
+              <a:spcAft>
+                <a:spcPts val="585"/>
+              </a:spcAft>
+            </a:pPr>
+            <a:r>
+              <a:rPr sz="1300" b="0" i="0">
+                <a:solidFill>
+                  <a:srgbClr val="1C1B19"/>
+                </a:solidFill>
+                <a:latin typeface="Source Serif 4"/>
+              </a:rPr>
+              <a:t>Autistic students and students with ADHD often describe "masking": hiding traits to fit in, which can be exhausting. The home games idea fits them too.</a:t>
+            </a:r>
+          </a:p>
+          <a:p>
+            <a:pPr algn="l">
+              <a:spcAft>
+                <a:spcPts val="585"/>
+              </a:spcAft>
+            </a:pPr>
+            <a:r>
+              <a:rPr sz="1300" b="0" i="0">
+                <a:solidFill>
+                  <a:srgbClr val="1C1B19"/>
+                </a:solidFill>
+                <a:latin typeface="Source Serif 4"/>
+              </a:rPr>
+              <a:t/>
+            </a:r>
+          </a:p>
+        </p:txBody>
+      </p:sp>
+      <p:sp>
+        <p:nvSpPr>
+          <p:cNvPr id="7" name="TextBox 6"/>
+          <p:cNvSpPr txBox="1"/>
+          <p:nvPr/>
+        </p:nvSpPr>
+        <p:spPr>
+          <a:xfrm>
+            <a:off x="6217920" y="1828800"/>
+            <a:ext cx="5394960" cy="4572000"/>
+          </a:xfrm>
+          <a:prstGeom prst="rect">
+            <a:avLst/>
+          </a:prstGeom>
+          <a:noFill/>
+        </p:spPr>
+        <p:txBody>
+          <a:bodyPr wrap="square" anchor="t" lIns="0" rIns="0" tIns="0" bIns="0">
+            <a:spAutoFit/>
+          </a:bodyPr>
+          <a:lstStyle/>
+          <a:p>
+            <a:pPr algn="l">
+              <a:spcAft>
+                <a:spcPts val="585"/>
+              </a:spcAft>
+            </a:pPr>
+            <a:r>
+              <a:rPr sz="1500" b="1" i="0">
+                <a:solidFill>
+                  <a:srgbClr val="1C1B19"/>
+                </a:solidFill>
+                <a:latin typeface="Source Serif 4"/>
+              </a:rPr>
+              <a:t>LGBTQ+ students.</a:t>
+            </a:r>
+          </a:p>
+          <a:p>
+            <a:pPr algn="l">
+              <a:spcAft>
+                <a:spcPts val="585"/>
+              </a:spcAft>
+            </a:pPr>
+            <a:r>
+              <a:rPr sz="1300" b="0" i="0">
+                <a:solidFill>
+                  <a:srgbClr val="1C1B19"/>
+                </a:solidFill>
+                <a:latin typeface="Source Serif 4"/>
+              </a:rPr>
+              <a:t>Some students switch how they show their gender or who they like, depending on who's around. Safety comes first; the lesson never asks anyone to be more out than they choose.</a:t>
+            </a:r>
+          </a:p>
+          <a:p>
+            <a:pPr algn="l">
+              <a:spcAft>
+                <a:spcPts val="585"/>
+              </a:spcAft>
+            </a:pPr>
+            <a:r>
+              <a:rPr sz="1300" b="0" i="0">
+                <a:solidFill>
+                  <a:srgbClr val="1C1B19"/>
+                </a:solidFill>
+                <a:latin typeface="Source Serif 4"/>
+              </a:rPr>
+              <a:t/>
+            </a:r>
+          </a:p>
+          <a:p>
+            <a:pPr algn="l">
+              <a:spcAft>
+                <a:spcPts val="585"/>
+              </a:spcAft>
+            </a:pPr>
+            <a:r>
+              <a:rPr sz="1500" b="1" i="0">
+                <a:solidFill>
+                  <a:srgbClr val="1C1B19"/>
+                </a:solidFill>
+                <a:latin typeface="Source Serif 4"/>
+              </a:rPr>
+              <a:t>Money and class.</a:t>
+            </a:r>
+          </a:p>
+          <a:p>
+            <a:pPr algn="l">
+              <a:spcAft>
+                <a:spcPts val="585"/>
+              </a:spcAft>
+            </a:pPr>
+            <a:r>
+              <a:rPr sz="1300" b="0" i="0">
+                <a:solidFill>
+                  <a:srgbClr val="1C1B19"/>
+                </a:solidFill>
+                <a:latin typeface="Source Serif 4"/>
+              </a:rPr>
+              <a:t>Students switch around money: what they say they did over break, where they live, what they can afford, whether they're on financial aid. Some students spend breaks working or caring for siblings. Keep examples free of brand names and trips, and treat family responsibilities as strengths.</a:t>
+            </a:r>
+          </a:p>
+          <a:p>
+            <a:pPr algn="l">
+              <a:spcAft>
+                <a:spcPts val="585"/>
+              </a:spcAft>
+            </a:pPr>
+            <a:r>
+              <a:rPr sz="1300" b="0" i="0">
+                <a:solidFill>
+                  <a:srgbClr val="1C1B19"/>
+                </a:solidFill>
+                <a:latin typeface="Source Serif 4"/>
+              </a:rPr>
+              <a:t/>
+            </a:r>
+          </a:p>
+          <a:p>
+            <a:pPr algn="l">
+              <a:spcAft>
+                <a:spcPts val="585"/>
+              </a:spcAft>
+            </a:pPr>
+            <a:r>
+              <a:rPr sz="1500" b="1" i="0">
+                <a:solidFill>
+                  <a:srgbClr val="1C1B19"/>
+                </a:solidFill>
+                <a:latin typeface="Source Serif 4"/>
+              </a:rPr>
+              <a:t>Faith.</a:t>
+            </a:r>
+          </a:p>
+          <a:p>
+            <a:pPr algn="l">
+              <a:spcAft>
+                <a:spcPts val="585"/>
+              </a:spcAft>
+            </a:pPr>
+            <a:r>
+              <a:rPr sz="1300" b="0" i="0">
+                <a:solidFill>
+                  <a:srgbClr val="1C1B19"/>
+                </a:solidFill>
+                <a:latin typeface="Source Serif 4"/>
+              </a:rPr>
+              <a:t>Some students tone down their faith at school, or tone down school at home. Both are worth respecting.</a:t>
+            </a:r>
+          </a:p>
+          <a:p>
+            <a:pPr algn="l">
+              <a:spcAft>
+                <a:spcPts val="585"/>
+              </a:spcAft>
+            </a:pPr>
+            <a:r>
+              <a:rPr sz="1300" b="0" i="0">
+                <a:solidFill>
+                  <a:srgbClr val="1C1B19"/>
+                </a:solidFill>
+                <a:latin typeface="Source Serif 4"/>
+              </a:rPr>
+              <a:t/>
+            </a:r>
+          </a:p>
+        </p:txBody>
+      </p:sp>
+    </p:spTree>
+  </p:cSld>
+  <p:clrMapOvr>
+    <a:masterClrMapping/>
+  </p:clrMapOvr>
+</p:sld>
+</file>
+
+<file path=ppt/slides/slide11.xml><?xml version="1.0" encoding="utf-8"?>
+<p:sld xmlns:a="http://schemas.openxmlformats.org/drawingml/2006/main" xmlns:p="http://schemas.openxmlformats.org/presentationml/2006/main" xmlns:r="http://schemas.openxmlformats.org/officeDocument/2006/relationships" show="0">
+  <p:cSld>
+    <p:bg>
+      <p:bgPr>
+        <a:solidFill>
+          <a:srgbClr val="EEEBE4"/>
+        </a:solidFill>
+        <a:effectLst/>
+      </p:bgPr>
+    </p:bg>
+    <p:spTree>
+      <p:nvGrpSpPr>
+        <p:cNvPr id="1" name=""/>
+        <p:cNvGrpSpPr/>
+        <p:nvPr/>
+      </p:nvGrpSpPr>
+      <p:grpSpPr/>
+      <p:sp>
+        <p:nvSpPr>
+          <p:cNvPr id="2" name="Rectangle 1"/>
+          <p:cNvSpPr/>
+          <p:nvPr/>
+        </p:nvSpPr>
+        <p:spPr>
+          <a:xfrm>
+            <a:off x="0" y="0"/>
+            <a:ext cx="12191695" cy="384048"/>
+          </a:xfrm>
+          <a:prstGeom prst="rect">
+            <a:avLst/>
+          </a:prstGeom>
+          <a:solidFill>
+            <a:srgbClr val="0B2D5B"/>
+          </a:solidFill>
+          <a:ln>
+            <a:noFill/>
+          </a:ln>
+          <a:effectLst/>
+        </p:spPr>
+        <p:style>
+          <a:lnRef idx="1">
+            <a:schemeClr val="accent1"/>
+          </a:lnRef>
+          <a:fillRef idx="3">
+            <a:schemeClr val="accent1"/>
+          </a:fillRef>
+          <a:effectRef idx="2">
+            <a:schemeClr val="accent1"/>
+          </a:effectRef>
+          <a:fontRef idx="minor">
+            <a:schemeClr val="lt1"/>
+          </a:fontRef>
+        </p:style>
+        <p:txBody>
+          <a:bodyPr rtlCol="0" anchor="ctr"/>
+          <a:lstStyle/>
+          <a:p>
+            <a:pPr algn="ctr"/>
+          </a:p>
+        </p:txBody>
+      </p:sp>
+      <p:sp>
+        <p:nvSpPr>
+          <p:cNvPr id="3" name="TextBox 2"/>
+          <p:cNvSpPr txBox="1"/>
+          <p:nvPr/>
+        </p:nvSpPr>
+        <p:spPr>
+          <a:xfrm>
+            <a:off x="548640" y="100584"/>
+            <a:ext cx="10972800" cy="274320"/>
+          </a:xfrm>
+          <a:prstGeom prst="rect">
+            <a:avLst/>
+          </a:prstGeom>
+          <a:noFill/>
+        </p:spPr>
+        <p:txBody>
+          <a:bodyPr wrap="square" anchor="t" lIns="0" rIns="0" tIns="0" bIns="0">
+            <a:spAutoFit/>
+          </a:bodyPr>
+          <a:lstStyle/>
+          <a:p>
+            <a:pPr algn="l">
+              <a:spcAft>
+                <a:spcPts val="495"/>
+              </a:spcAft>
+            </a:pPr>
+            <a:r>
+              <a:rPr sz="1100" b="1" i="0">
+                <a:solidFill>
+                  <a:srgbClr val="FFFFFF"/>
+                </a:solidFill>
+                <a:latin typeface="Inter Tight"/>
+              </a:rPr>
+              <a:t>TEACHER PAGE  ·  skipped when you present  ·  Background</a:t>
+            </a:r>
+          </a:p>
+        </p:txBody>
+      </p:sp>
+      <p:sp>
+        <p:nvSpPr>
+          <p:cNvPr id="4" name="TextBox 3"/>
+          <p:cNvSpPr txBox="1"/>
+          <p:nvPr/>
+        </p:nvSpPr>
+        <p:spPr>
+          <a:xfrm>
+            <a:off x="548640" y="685800"/>
+            <a:ext cx="10972800" cy="640080"/>
+          </a:xfrm>
+          <a:prstGeom prst="rect">
+            <a:avLst/>
+          </a:prstGeom>
+          <a:noFill/>
+        </p:spPr>
+        <p:txBody>
+          <a:bodyPr wrap="square" anchor="t" lIns="0" rIns="0" tIns="0" bIns="0">
+            <a:spAutoFit/>
+          </a:bodyPr>
+          <a:lstStyle/>
+          <a:p>
+            <a:pPr algn="l">
+              <a:spcAft>
+                <a:spcPts val="1350"/>
+              </a:spcAft>
+            </a:pPr>
+            <a:r>
+              <a:rPr sz="3000" b="1" i="0">
+                <a:solidFill>
+                  <a:srgbClr val="1C1B19"/>
+                </a:solidFill>
+                <a:latin typeface="Source Serif 4"/>
+              </a:rPr>
+              <a:t>What the research says</a:t>
+            </a:r>
+          </a:p>
+        </p:txBody>
+      </p:sp>
+      <p:sp>
+        <p:nvSpPr>
+          <p:cNvPr id="5" name="TextBox 4"/>
+          <p:cNvSpPr txBox="1"/>
+          <p:nvPr/>
+        </p:nvSpPr>
+        <p:spPr>
+          <a:xfrm>
+            <a:off x="548640" y="1463040"/>
+            <a:ext cx="5394960" cy="4937760"/>
+          </a:xfrm>
+          <a:prstGeom prst="rect">
+            <a:avLst/>
+          </a:prstGeom>
+          <a:noFill/>
+        </p:spPr>
+        <p:txBody>
+          <a:bodyPr wrap="square" anchor="t" lIns="0" rIns="0" tIns="0" bIns="0">
+            <a:spAutoFit/>
+          </a:bodyPr>
+          <a:lstStyle/>
+          <a:p>
+            <a:pPr algn="l">
+              <a:spcAft>
+                <a:spcPts val="585"/>
+              </a:spcAft>
+            </a:pPr>
+            <a:r>
+              <a:rPr sz="1300" b="0" i="0">
+                <a:solidFill>
+                  <a:srgbClr val="1C1B19"/>
+                </a:solidFill>
+                <a:latin typeface="Source Serif 4"/>
+              </a:rPr>
+              <a:t>Linguists have studied code switching for decades and describe it as a skilled, rule-governed way people use language to signal identity and fit a setting.</a:t>
+            </a:r>
+          </a:p>
+          <a:p>
+            <a:pPr algn="l">
+              <a:spcAft>
+                <a:spcPts val="585"/>
+              </a:spcAft>
+            </a:pPr>
+            <a:r>
+              <a:rPr sz="1050" b="0" i="0">
+                <a:solidFill>
+                  <a:srgbClr val="5D5A54"/>
+                </a:solidFill>
+                <a:latin typeface="Inter Tight"/>
+              </a:rPr>
+              <a:t>Gumperz, Discourse Strategies, 1982</a:t>
+            </a:r>
+          </a:p>
+          <a:p>
+            <a:pPr algn="l">
+              <a:spcAft>
+                <a:spcPts val="585"/>
+              </a:spcAft>
+            </a:pPr>
+            <a:r>
+              <a:rPr sz="1300" b="0" i="0">
+                <a:solidFill>
+                  <a:srgbClr val="1C1B19"/>
+                </a:solidFill>
+                <a:latin typeface="Source Serif 4"/>
+              </a:rPr>
+              <a:t>A meta-analysis of 83 studies (more than 23,000 people) found that being bicultural, holding two cultures rather than choosing one, was linked to better psychological and social adjustment.</a:t>
+            </a:r>
+          </a:p>
+          <a:p>
+            <a:pPr algn="l">
+              <a:spcAft>
+                <a:spcPts val="585"/>
+              </a:spcAft>
+            </a:pPr>
+            <a:r>
+              <a:rPr sz="1050" b="0" i="0">
+                <a:solidFill>
+                  <a:srgbClr val="5D5A54"/>
+                </a:solidFill>
+                <a:latin typeface="Inter Tight"/>
+              </a:rPr>
+              <a:t>Nguyen &amp; Benet-Martínez, Journal of Cross-Cultural Psychology, 2013</a:t>
+            </a:r>
+          </a:p>
+          <a:p>
+            <a:pPr algn="l">
+              <a:spcAft>
+                <a:spcPts val="585"/>
+              </a:spcAft>
+            </a:pPr>
+            <a:r>
+              <a:rPr sz="1300" b="0" i="0">
+                <a:solidFill>
+                  <a:srgbClr val="1C1B19"/>
+                </a:solidFill>
+                <a:latin typeface="Source Serif 4"/>
+              </a:rPr>
+              <a:t>Black professionals who code switched were seen as more professional by others, which shows why people switch, and the researchers also describe its costs in effort and authenticity.</a:t>
+            </a:r>
+          </a:p>
+          <a:p>
+            <a:pPr algn="l">
+              <a:spcAft>
+                <a:spcPts val="585"/>
+              </a:spcAft>
+            </a:pPr>
+            <a:r>
+              <a:rPr sz="1050" b="0" i="0">
+                <a:solidFill>
+                  <a:srgbClr val="5D5A54"/>
+                </a:solidFill>
+                <a:latin typeface="Inter Tight"/>
+              </a:rPr>
+              <a:t>McCluney et al., Journal of Experimental Social Psychology, 2021</a:t>
+            </a:r>
+          </a:p>
+        </p:txBody>
+      </p:sp>
+      <p:sp>
+        <p:nvSpPr>
+          <p:cNvPr id="6" name="TextBox 5"/>
+          <p:cNvSpPr txBox="1"/>
+          <p:nvPr/>
+        </p:nvSpPr>
+        <p:spPr>
+          <a:xfrm>
+            <a:off x="6217920" y="1463040"/>
+            <a:ext cx="5394960" cy="4937760"/>
+          </a:xfrm>
+          <a:prstGeom prst="rect">
+            <a:avLst/>
+          </a:prstGeom>
+          <a:noFill/>
+        </p:spPr>
+        <p:txBody>
+          <a:bodyPr wrap="square" anchor="t" lIns="0" rIns="0" tIns="0" bIns="0">
+            <a:spAutoFit/>
+          </a:bodyPr>
+          <a:lstStyle/>
+          <a:p>
+            <a:pPr algn="l">
+              <a:spcAft>
+                <a:spcPts val="585"/>
+              </a:spcAft>
+            </a:pPr>
+            <a:r>
+              <a:rPr sz="1300" b="0" i="0">
+                <a:solidFill>
+                  <a:srgbClr val="1C1B19"/>
+                </a:solidFill>
+                <a:latin typeface="Source Serif 4"/>
+              </a:rPr>
+              <a:t>Among Black college students, being accused of "acting White" was linked to their mental health, and the link depended on how they felt about their own racial identity.</a:t>
+            </a:r>
+          </a:p>
+          <a:p>
+            <a:pPr algn="l">
+              <a:spcAft>
+                <a:spcPts val="585"/>
+              </a:spcAft>
+            </a:pPr>
+            <a:r>
+              <a:rPr sz="1050" b="0" i="0">
+                <a:solidFill>
+                  <a:srgbClr val="5D5A54"/>
+                </a:solidFill>
+                <a:latin typeface="Inter Tight"/>
+              </a:rPr>
+              <a:t>Durkee &amp; Williams, Journal of Black Psychology, 2015</a:t>
+            </a:r>
+          </a:p>
+          <a:p>
+            <a:pPr algn="l">
+              <a:spcAft>
+                <a:spcPts val="585"/>
+              </a:spcAft>
+            </a:pPr>
+            <a:r>
+              <a:rPr sz="1300" b="0" i="0">
+                <a:solidFill>
+                  <a:srgbClr val="1C1B19"/>
+                </a:solidFill>
+                <a:latin typeface="Source Serif 4"/>
+              </a:rPr>
+              <a:t>In a national survey, 61% of employees said they hide or downplay some part of their identity at work, a pattern called covering.</a:t>
+            </a:r>
+          </a:p>
+          <a:p>
+            <a:pPr algn="l">
+              <a:spcAft>
+                <a:spcPts val="585"/>
+              </a:spcAft>
+            </a:pPr>
+            <a:r>
+              <a:rPr sz="1050" b="0" i="0">
+                <a:solidFill>
+                  <a:srgbClr val="5D5A54"/>
+                </a:solidFill>
+                <a:latin typeface="Inter Tight"/>
+              </a:rPr>
+              <a:t>Yoshino &amp; Smith, Deloitte, 2013</a:t>
+            </a:r>
+          </a:p>
+        </p:txBody>
+      </p:sp>
+    </p:spTree>
+  </p:cSld>
+  <p:clrMapOvr>
+    <a:masterClrMapping/>
+  </p:clrMapOvr>
+</p:sld>
+</file>
+
+<file path=ppt/slides/slide2.xml><?xml version="1.0" encoding="utf-8"?>
+<p:sld xmlns:a="http://schemas.openxmlformats.org/drawingml/2006/main" xmlns:p="http://schemas.openxmlformats.org/presentationml/2006/main" xmlns:r="http://schemas.openxmlformats.org/officeDocument/2006/relationships">
+  <p:cSld>
+    <p:bg>
+      <p:bgPr>
+        <a:solidFill>
+          <a:srgbClr val="0B2D5B"/>
+        </a:solidFill>
+        <a:effectLst/>
+      </p:bgPr>
+    </p:bg>
+    <p:spTree>
+      <p:nvGrpSpPr>
+        <p:cNvPr id="1" name=""/>
+        <p:cNvGrpSpPr/>
+        <p:nvPr/>
+      </p:nvGrpSpPr>
+      <p:grpSpPr/>
+      <p:sp>
+        <p:nvSpPr>
+          <p:cNvPr id="2" name="Rectangle 1"/>
+          <p:cNvSpPr/>
+          <p:nvPr/>
+        </p:nvSpPr>
+        <p:spPr>
+          <a:xfrm>
+            <a:off x="548640" y="502920"/>
+            <a:ext cx="457200" cy="54864"/>
+          </a:xfrm>
+          <a:prstGeom prst="rect">
+            <a:avLst/>
+          </a:prstGeom>
+          <a:solidFill>
+            <a:srgbClr val="F47B20"/>
+          </a:solidFill>
+          <a:ln>
+            <a:noFill/>
+          </a:ln>
+          <a:effectLst/>
+        </p:spPr>
+        <p:style>
+          <a:lnRef idx="1">
+            <a:schemeClr val="accent1"/>
+          </a:lnRef>
+          <a:fillRef idx="3">
+            <a:schemeClr val="accent1"/>
+          </a:fillRef>
+          <a:effectRef idx="2">
+            <a:schemeClr val="accent1"/>
+          </a:effectRef>
+          <a:fontRef idx="minor">
+            <a:schemeClr val="lt1"/>
+          </a:fontRef>
+        </p:style>
+        <p:txBody>
+          <a:bodyPr rtlCol="0" anchor="ctr"/>
+          <a:lstStyle/>
+          <a:p>
+            <a:pPr algn="ctr"/>
+          </a:p>
+        </p:txBody>
+      </p:sp>
+      <p:sp>
+        <p:nvSpPr>
+          <p:cNvPr id="3" name="TextBox 2"/>
+          <p:cNvSpPr txBox="1"/>
+          <p:nvPr/>
+        </p:nvSpPr>
+        <p:spPr>
+          <a:xfrm>
+            <a:off x="1143000" y="393192"/>
+            <a:ext cx="8229600" cy="274320"/>
+          </a:xfrm>
+          <a:prstGeom prst="rect">
+            <a:avLst/>
+          </a:prstGeom>
+          <a:noFill/>
+        </p:spPr>
+        <p:txBody>
+          <a:bodyPr wrap="square" anchor="t" lIns="0" rIns="0" tIns="0" bIns="0">
+            <a:spAutoFit/>
+          </a:bodyPr>
+          <a:lstStyle/>
+          <a:p>
+            <a:pPr algn="l">
+              <a:spcAft>
+                <a:spcPts val="540"/>
+              </a:spcAft>
+            </a:pPr>
+            <a:r>
+              <a:rPr sz="1200" b="1" i="0">
+                <a:solidFill>
+                  <a:srgbClr val="5D5A54"/>
+                </a:solidFill>
+                <a:latin typeface="Inter Tight"/>
+              </a:rPr>
+              <a:t>CODE SWITCHING</a:t>
+            </a:r>
+          </a:p>
+        </p:txBody>
+      </p:sp>
+      <p:sp>
+        <p:nvSpPr>
+          <p:cNvPr id="4" name="TextBox 3"/>
+          <p:cNvSpPr txBox="1"/>
+          <p:nvPr/>
+        </p:nvSpPr>
+        <p:spPr>
+          <a:xfrm>
+            <a:off x="8229600" y="6400800"/>
+            <a:ext cx="3410712" cy="274320"/>
+          </a:xfrm>
+          <a:prstGeom prst="rect">
+            <a:avLst/>
+          </a:prstGeom>
+          <a:noFill/>
+        </p:spPr>
+        <p:txBody>
+          <a:bodyPr wrap="square" anchor="t" lIns="0" rIns="0" tIns="0" bIns="0">
+            <a:spAutoFit/>
+          </a:bodyPr>
+          <a:lstStyle/>
+          <a:p>
+            <a:pPr algn="r">
+              <a:spcAft>
+                <a:spcPts val="450"/>
+              </a:spcAft>
+            </a:pPr>
+            <a:r>
+              <a:rPr sz="1000" b="0" i="0">
+                <a:solidFill>
+                  <a:srgbClr val="5D5A54"/>
+                </a:solidFill>
+                <a:latin typeface="Inter Tight"/>
+              </a:rPr>
+              <a:t>Beaver Counseling</a:t>
+            </a:r>
+          </a:p>
+        </p:txBody>
+      </p:sp>
+      <p:sp>
+        <p:nvSpPr>
+          <p:cNvPr id="5" name="TextBox 4"/>
+          <p:cNvSpPr txBox="1"/>
+          <p:nvPr/>
+        </p:nvSpPr>
+        <p:spPr>
+          <a:xfrm>
+            <a:off x="822960" y="2011680"/>
+            <a:ext cx="10515600" cy="1463040"/>
+          </a:xfrm>
+          <a:prstGeom prst="rect">
+            <a:avLst/>
+          </a:prstGeom>
+          <a:noFill/>
+        </p:spPr>
+        <p:txBody>
+          <a:bodyPr wrap="square" anchor="b" lIns="0" rIns="0" tIns="0" bIns="0">
+            <a:spAutoFit/>
+          </a:bodyPr>
+          <a:lstStyle/>
+          <a:p>
+            <a:pPr algn="l">
+              <a:spcAft>
+                <a:spcPts val="2700"/>
+              </a:spcAft>
+            </a:pPr>
+            <a:r>
+              <a:rPr sz="6000" b="1" i="0">
+                <a:solidFill>
+                  <a:srgbClr val="FFFFFF"/>
+                </a:solidFill>
+                <a:latin typeface="Source Serif 4"/>
+              </a:rPr>
+              <a:t>Code Switching</a:t>
+            </a:r>
+          </a:p>
+        </p:txBody>
+      </p:sp>
+      <p:sp>
+        <p:nvSpPr>
+          <p:cNvPr id="6" name="TextBox 5"/>
+          <p:cNvSpPr txBox="1"/>
+          <p:nvPr/>
+        </p:nvSpPr>
+        <p:spPr>
+          <a:xfrm>
+            <a:off x="822960" y="3611880"/>
+            <a:ext cx="10515600" cy="914400"/>
+          </a:xfrm>
+          <a:prstGeom prst="rect">
+            <a:avLst/>
+          </a:prstGeom>
+          <a:noFill/>
+        </p:spPr>
+        <p:txBody>
+          <a:bodyPr wrap="square" anchor="t" lIns="0" rIns="0" tIns="0" bIns="0">
+            <a:spAutoFit/>
+          </a:bodyPr>
+          <a:lstStyle/>
+          <a:p>
+            <a:pPr algn="l">
+              <a:spcAft>
+                <a:spcPts val="1080"/>
+              </a:spcAft>
+            </a:pPr>
+            <a:r>
+              <a:rPr sz="2400" b="0" i="1">
+                <a:solidFill>
+                  <a:srgbClr val="E8E4DA"/>
+                </a:solidFill>
+                <a:latin typeface="Source Serif 4"/>
+              </a:rPr>
+              <a:t>Being a little different in every room, and finding the rooms where you don't have to be.</a:t>
+            </a:r>
+          </a:p>
+        </p:txBody>
+      </p:sp>
+      <p:sp>
+        <p:nvSpPr>
+          <p:cNvPr id="7" name="TextBox 6"/>
+          <p:cNvSpPr txBox="1"/>
+          <p:nvPr/>
+        </p:nvSpPr>
+        <p:spPr>
+          <a:xfrm>
+            <a:off x="822960" y="6035040"/>
+            <a:ext cx="7315200" cy="365760"/>
+          </a:xfrm>
+          <a:prstGeom prst="rect">
+            <a:avLst/>
+          </a:prstGeom>
+          <a:noFill/>
+        </p:spPr>
+        <p:txBody>
+          <a:bodyPr wrap="square" anchor="t" lIns="0" rIns="0" tIns="0" bIns="0">
+            <a:spAutoFit/>
+          </a:bodyPr>
+          <a:lstStyle/>
+          <a:p>
+            <a:pPr algn="l">
+              <a:spcAft>
+                <a:spcPts val="585"/>
+              </a:spcAft>
+            </a:pPr>
+            <a:r>
+              <a:rPr sz="1300" b="0" i="0">
+                <a:solidFill>
+                  <a:srgbClr val="E8E4DA"/>
+                </a:solidFill>
+                <a:latin typeface="Inter Tight"/>
+              </a:rPr>
+              <a:t>Beaver Upper School · Counseling</a:t>
+            </a:r>
+          </a:p>
+        </p:txBody>
+      </p:sp>
+    </p:spTree>
+  </p:cSld>
+  <p:clrMapOvr>
+    <a:masterClrMapping/>
+  </p:clrMapOvr>
+</p:sld>
+</file>
+
+<file path=ppt/slides/slide3.xml><?xml version="1.0" encoding="utf-8"?>
 <p:sld xmlns:a="http://schemas.openxmlformats.org/drawingml/2006/main" xmlns:p="http://schemas.openxmlformats.org/presentationml/2006/main" xmlns:r="http://schemas.openxmlformats.org/officeDocument/2006/relationships">
   <p:cSld>
     <p:bg>
@@ -4557,7 +5524,7 @@
                 </a:solidFill>
                 <a:latin typeface="Inter Tight"/>
               </a:rPr>
-              <a:t>BEFORE YOU GO</a:t>
+              <a:t>THREE ROOMS</a:t>
             </a:r>
           </a:p>
         </p:txBody>
@@ -4603,103 +5570,23 @@
       </p:sp>
       <p:sp>
         <p:nvSpPr>
-          <p:cNvPr id="5" name="TextBox 4"/>
-          <p:cNvSpPr txBox="1"/>
-          <p:nvPr/>
-        </p:nvSpPr>
-        <p:spPr>
-          <a:xfrm>
-            <a:off x="822960" y="1188720"/>
-            <a:ext cx="10515600" cy="914400"/>
-          </a:xfrm>
-          <a:prstGeom prst="rect">
-            <a:avLst/>
-          </a:prstGeom>
-          <a:noFill/>
-        </p:spPr>
-        <p:txBody>
-          <a:bodyPr wrap="square" anchor="t" lIns="0" rIns="0" tIns="0" bIns="0">
-            <a:spAutoFit/>
-          </a:bodyPr>
-          <a:lstStyle/>
-          <a:p>
-            <a:pPr algn="l">
-              <a:spcAft>
-                <a:spcPts val="1620"/>
-              </a:spcAft>
-            </a:pPr>
-            <a:r>
-              <a:rPr sz="3600" b="1" i="0">
-                <a:solidFill>
-                  <a:srgbClr val="1C1B19"/>
-                </a:solidFill>
-                <a:latin typeface="Source Serif 4"/>
-              </a:rPr>
-              <a:t>Name one home game.</a:t>
-            </a:r>
-          </a:p>
-        </p:txBody>
-      </p:sp>
-      <p:sp>
-        <p:nvSpPr>
-          <p:cNvPr id="6" name="TextBox 5"/>
-          <p:cNvSpPr txBox="1"/>
-          <p:nvPr/>
-        </p:nvSpPr>
-        <p:spPr>
-          <a:xfrm>
-            <a:off x="822960" y="2286000"/>
-            <a:ext cx="10515600" cy="1463040"/>
-          </a:xfrm>
-          <a:prstGeom prst="rect">
-            <a:avLst/>
-          </a:prstGeom>
-          <a:noFill/>
-        </p:spPr>
-        <p:txBody>
-          <a:bodyPr wrap="square" anchor="t" lIns="0" rIns="0" tIns="0" bIns="0">
-            <a:spAutoFit/>
-          </a:bodyPr>
-          <a:lstStyle/>
-          <a:p>
-            <a:pPr algn="l">
-              <a:spcAft>
-                <a:spcPts val="1080"/>
-              </a:spcAft>
-            </a:pPr>
-            <a:r>
-              <a:rPr sz="2400" b="0" i="0">
-                <a:solidFill>
-                  <a:srgbClr val="1C1B19"/>
-                </a:solidFill>
-                <a:latin typeface="Source Serif 4"/>
-              </a:rPr>
-              <a:t>A person, a place, a group, a song. Write it on your card and keep it.</a:t>
-            </a:r>
-          </a:p>
-        </p:txBody>
-      </p:sp>
-      <p:sp>
-        <p:nvSpPr>
-          <p:cNvPr id="7" name="Rectangle 6"/>
+          <p:cNvPr id="5" name="Rectangle 4"/>
           <p:cNvSpPr/>
           <p:nvPr/>
         </p:nvSpPr>
         <p:spPr>
           <a:xfrm>
-            <a:off x="822960" y="4023360"/>
-            <a:ext cx="10515600" cy="1371600"/>
+            <a:off x="822960" y="1371600"/>
+            <a:ext cx="73152" cy="3566160"/>
           </a:xfrm>
           <a:prstGeom prst="rect">
             <a:avLst/>
           </a:prstGeom>
           <a:solidFill>
-            <a:srgbClr val="FFFFFF"/>
+            <a:srgbClr val="F47B20"/>
           </a:solidFill>
-          <a:ln w="15875">
-            <a:solidFill>
-              <a:srgbClr val="1C1B19"/>
-            </a:solidFill>
+          <a:ln>
+            <a:noFill/>
           </a:ln>
           <a:effectLst/>
         </p:spPr>
@@ -4727,14 +5614,14 @@
       </p:sp>
       <p:sp>
         <p:nvSpPr>
-          <p:cNvPr id="8" name="TextBox 7"/>
+          <p:cNvPr id="6" name="TextBox 5"/>
           <p:cNvSpPr txBox="1"/>
           <p:nvPr/>
         </p:nvSpPr>
         <p:spPr>
           <a:xfrm>
-            <a:off x="1097280" y="4206240"/>
-            <a:ext cx="10058400" cy="365760"/>
+            <a:off x="1188720" y="1371600"/>
+            <a:ext cx="10058400" cy="3566160"/>
           </a:xfrm>
           <a:prstGeom prst="rect">
             <a:avLst/>
@@ -4742,38 +5629,38 @@
           <a:noFill/>
         </p:spPr>
         <p:txBody>
-          <a:bodyPr wrap="square" anchor="t" lIns="0" rIns="0" tIns="0" bIns="0">
+          <a:bodyPr wrap="square" anchor="ctr" lIns="0" rIns="0" tIns="0" bIns="0">
             <a:spAutoFit/>
           </a:bodyPr>
           <a:lstStyle/>
           <a:p>
             <a:pPr algn="l">
               <a:spcAft>
-                <a:spcPts val="540"/>
-              </a:spcAft>
-            </a:pPr>
-            <a:r>
-              <a:rPr sz="1200" b="1" i="0">
-                <a:solidFill>
-                  <a:srgbClr val="0B2D5B"/>
-                </a:solidFill>
-                <a:latin typeface="Inter Tight"/>
-              </a:rPr>
-              <a:t>STUDENT PAGE</a:t>
-            </a:r>
-          </a:p>
-        </p:txBody>
-      </p:sp>
-      <p:sp>
-        <p:nvSpPr>
-          <p:cNvPr id="9" name="TextBox 8"/>
+                <a:spcPts val="1800"/>
+              </a:spcAft>
+            </a:pPr>
+            <a:r>
+              <a:rPr sz="4000" b="0" i="1">
+                <a:solidFill>
+                  <a:srgbClr val="1C1B19"/>
+                </a:solidFill>
+                <a:latin typeface="Source Serif 4"/>
+              </a:rPr>
+              <a:t>How do you talk with your friends, with a teacher, and at home?</a:t>
+            </a:r>
+          </a:p>
+        </p:txBody>
+      </p:sp>
+      <p:sp>
+        <p:nvSpPr>
+          <p:cNvPr id="7" name="TextBox 6"/>
           <p:cNvSpPr txBox="1"/>
           <p:nvPr/>
         </p:nvSpPr>
         <p:spPr>
           <a:xfrm>
-            <a:off x="1097280" y="4617720"/>
-            <a:ext cx="10058400" cy="640080"/>
+            <a:off x="1188720" y="5120640"/>
+            <a:ext cx="10058400" cy="914400"/>
           </a:xfrm>
           <a:prstGeom prst="rect">
             <a:avLst/>
@@ -4788,17 +5675,17 @@
           <a:p>
             <a:pPr algn="l">
               <a:spcAft>
-                <a:spcPts val="900"/>
-              </a:spcAft>
-            </a:pPr>
-            <a:r>
-              <a:rPr sz="2000" b="0" i="0">
-                <a:solidFill>
-                  <a:srgbClr val="1C1B19"/>
+                <a:spcPts val="810"/>
+              </a:spcAft>
+            </a:pPr>
+            <a:r>
+              <a:rPr sz="1800" b="0" i="0">
+                <a:solidFill>
+                  <a:srgbClr val="5D5A54"/>
                 </a:solidFill>
                 <a:latin typeface="Inter Tight"/>
               </a:rPr>
-              <a:t>https://rmwtoolkit.github.io/bcds-toolkit/code-switching-high-school.html</a:t>
+              <a:t>Think of one word or phrase you'd only use in one of them. Keep it or share it.</a:t>
             </a:r>
           </a:p>
         </p:txBody>
@@ -4811,13 +5698,13 @@
 </p:sld>
 </file>
 
-<file path=ppt/slides/slide2.xml><?xml version="1.0" encoding="utf-8"?>
-<p:sld xmlns:a="http://schemas.openxmlformats.org/drawingml/2006/main" xmlns:p="http://schemas.openxmlformats.org/presentationml/2006/main" xmlns:r="http://schemas.openxmlformats.org/officeDocument/2006/relationships" show="0">
+<file path=ppt/slides/slide4.xml><?xml version="1.0" encoding="utf-8"?>
+<p:sld xmlns:a="http://schemas.openxmlformats.org/drawingml/2006/main" xmlns:p="http://schemas.openxmlformats.org/presentationml/2006/main" xmlns:r="http://schemas.openxmlformats.org/officeDocument/2006/relationships">
   <p:cSld>
     <p:bg>
       <p:bgPr>
         <a:solidFill>
-          <a:srgbClr val="EEEBE4"/>
+          <a:srgbClr val="F7F4EE"/>
         </a:solidFill>
         <a:effectLst/>
       </p:bgPr>
@@ -4837,14 +5724,14 @@
         </p:nvSpPr>
         <p:spPr>
           <a:xfrm>
-            <a:off x="0" y="0"/>
-            <a:ext cx="12191695" cy="384048"/>
+            <a:off x="548640" y="502920"/>
+            <a:ext cx="457200" cy="54864"/>
           </a:xfrm>
           <a:prstGeom prst="rect">
             <a:avLst/>
           </a:prstGeom>
           <a:solidFill>
-            <a:srgbClr val="0B2D5B"/>
+            <a:srgbClr val="F47B20"/>
           </a:solidFill>
           <a:ln>
             <a:noFill/>
@@ -4881,8 +5768,8 @@
         </p:nvSpPr>
         <p:spPr>
           <a:xfrm>
-            <a:off x="548640" y="100584"/>
-            <a:ext cx="10972800" cy="274320"/>
+            <a:off x="1143000" y="393192"/>
+            <a:ext cx="8229600" cy="274320"/>
           </a:xfrm>
           <a:prstGeom prst="rect">
             <a:avLst/>
@@ -4897,17 +5784,17 @@
           <a:p>
             <a:pPr algn="l">
               <a:spcAft>
-                <a:spcPts val="495"/>
-              </a:spcAft>
-            </a:pPr>
-            <a:r>
-              <a:rPr sz="1100" b="1" i="0">
-                <a:solidFill>
-                  <a:srgbClr val="FFFFFF"/>
+                <a:spcPts val="540"/>
+              </a:spcAft>
+            </a:pPr>
+            <a:r>
+              <a:rPr sz="1200" b="1" i="0">
+                <a:solidFill>
+                  <a:srgbClr val="5D5A54"/>
                 </a:solidFill>
                 <a:latin typeface="Inter Tight"/>
               </a:rPr>
-              <a:t>TEACHER PAGE  ·  skipped when you present  ·  Before you teach</a:t>
+              <a:t>WHAT PEOPLE SWITCH</a:t>
             </a:r>
           </a:p>
         </p:txBody>
@@ -4920,8 +5807,8 @@
         </p:nvSpPr>
         <p:spPr>
           <a:xfrm>
-            <a:off x="548640" y="685800"/>
-            <a:ext cx="10972800" cy="640080"/>
+            <a:off x="8229600" y="6400800"/>
+            <a:ext cx="3410712" cy="274320"/>
           </a:xfrm>
           <a:prstGeom prst="rect">
             <a:avLst/>
@@ -4934,19 +5821,19 @@
           </a:bodyPr>
           <a:lstStyle/>
           <a:p>
-            <a:pPr algn="l">
-              <a:spcAft>
-                <a:spcPts val="1350"/>
-              </a:spcAft>
-            </a:pPr>
-            <a:r>
-              <a:rPr sz="3000" b="1" i="0">
-                <a:solidFill>
-                  <a:srgbClr val="1C1B19"/>
-                </a:solidFill>
-                <a:latin typeface="Source Serif 4"/>
-              </a:rPr>
-              <a:t>Before you teach</a:t>
+            <a:pPr algn="r">
+              <a:spcAft>
+                <a:spcPts val="450"/>
+              </a:spcAft>
+            </a:pPr>
+            <a:r>
+              <a:rPr sz="1000" b="0" i="0">
+                <a:solidFill>
+                  <a:srgbClr val="5D5A54"/>
+                </a:solidFill>
+                <a:latin typeface="Inter Tight"/>
+              </a:rPr>
+              <a:t>Beaver Counseling</a:t>
             </a:r>
           </a:p>
         </p:txBody>
@@ -4959,8 +5846,8 @@
         </p:nvSpPr>
         <p:spPr>
           <a:xfrm>
-            <a:off x="548640" y="1463040"/>
-            <a:ext cx="5394960" cy="4937760"/>
+            <a:off x="822960" y="1005840"/>
+            <a:ext cx="10515600" cy="1097280"/>
           </a:xfrm>
           <a:prstGeom prst="rect">
             <a:avLst/>
@@ -4975,145 +5862,17 @@
           <a:p>
             <a:pPr algn="l">
               <a:spcAft>
-                <a:spcPts val="585"/>
-              </a:spcAft>
-            </a:pPr>
-            <a:r>
-              <a:rPr sz="1500" b="1" i="0">
+                <a:spcPts val="1620"/>
+              </a:spcAft>
+            </a:pPr>
+            <a:r>
+              <a:rPr sz="3600" b="1" i="0">
                 <a:solidFill>
                   <a:srgbClr val="1C1B19"/>
                 </a:solidFill>
                 <a:latin typeface="Source Serif 4"/>
               </a:rPr>
-              <a:t>Go first, lightly.</a:t>
-            </a:r>
-          </a:p>
-          <a:p>
-            <a:pPr algn="l">
-              <a:spcAft>
-                <a:spcPts val="585"/>
-              </a:spcAft>
-            </a:pPr>
-            <a:r>
-              <a:rPr sz="1300" b="0" i="0">
-                <a:solidFill>
-                  <a:srgbClr val="1C1B19"/>
-                </a:solidFill>
-                <a:latin typeface="Source Serif 4"/>
-              </a:rPr>
-              <a:t>Share a low-stakes example of your own: how you talk on the phone with your grandmother versus a parent-teacher conference, or the voice you use with a coach. It shows everyone switches, including adults, and keeps the room from turning toward any one student.</a:t>
-            </a:r>
-          </a:p>
-          <a:p>
-            <a:pPr algn="l">
-              <a:spcAft>
-                <a:spcPts val="585"/>
-              </a:spcAft>
-            </a:pPr>
-            <a:r>
-              <a:rPr sz="1300" b="0" i="0">
-                <a:solidFill>
-                  <a:srgbClr val="1C1B19"/>
-                </a:solidFill>
-                <a:latin typeface="Source Serif 4"/>
-              </a:rPr>
-              <a:t/>
-            </a:r>
-          </a:p>
-          <a:p>
-            <a:pPr algn="l">
-              <a:spcAft>
-                <a:spcPts val="585"/>
-              </a:spcAft>
-            </a:pPr>
-            <a:r>
-              <a:rPr sz="1500" b="1" i="0">
-                <a:solidFill>
-                  <a:srgbClr val="1C1B19"/>
-                </a:solidFill>
-                <a:latin typeface="Source Serif 4"/>
-              </a:rPr>
-              <a:t>Never ask a student to speak for a group.</a:t>
-            </a:r>
-          </a:p>
-          <a:p>
-            <a:pPr algn="l">
-              <a:spcAft>
-                <a:spcPts val="585"/>
-              </a:spcAft>
-            </a:pPr>
-            <a:r>
-              <a:rPr sz="1300" b="0" i="0">
-                <a:solidFill>
-                  <a:srgbClr val="1C1B19"/>
-                </a:solidFill>
-                <a:latin typeface="Source Serif 4"/>
-              </a:rPr>
-              <a:t>Don't call on the one student of a background to explain what switching is like for "their" community. Students choose what they share, and passing is always fine.</a:t>
-            </a:r>
-          </a:p>
-          <a:p>
-            <a:pPr algn="l">
-              <a:spcAft>
-                <a:spcPts val="585"/>
-              </a:spcAft>
-            </a:pPr>
-            <a:r>
-              <a:rPr sz="1300" b="0" i="0">
-                <a:solidFill>
-                  <a:srgbClr val="1C1B19"/>
-                </a:solidFill>
-                <a:latin typeface="Source Serif 4"/>
-              </a:rPr>
-              <a:t/>
-            </a:r>
-          </a:p>
-          <a:p>
-            <a:pPr algn="l">
-              <a:spcAft>
-                <a:spcPts val="585"/>
-              </a:spcAft>
-            </a:pPr>
-            <a:r>
-              <a:rPr sz="1500" b="1" i="0">
-                <a:solidFill>
-                  <a:srgbClr val="1C1B19"/>
-                </a:solidFill>
-                <a:latin typeface="Source Serif 4"/>
-              </a:rPr>
-              <a:t>Switching isn't fake, and it isn't wrong.</a:t>
-            </a:r>
-          </a:p>
-          <a:p>
-            <a:pPr algn="l">
-              <a:spcAft>
-                <a:spcPts val="585"/>
-              </a:spcAft>
-            </a:pPr>
-            <a:r>
-              <a:rPr sz="1300" b="0" i="0">
-                <a:solidFill>
-                  <a:srgbClr val="1C1B19"/>
-                </a:solidFill>
-                <a:latin typeface="Source Serif 4"/>
-              </a:rPr>
-              <a:t>Avoid framing one way of talking as "proper" and another as "slang." Every dialect and home language has its own rules. Linguists call Black English, for example, a full language variety with consistent grammar.</a:t>
-            </a:r>
-          </a:p>
-          <a:p>
-            <a:pPr algn="l">
-              <a:spcAft>
-                <a:spcPts val="585"/>
-              </a:spcAft>
-            </a:pPr>
-            <a:r>
-              <a:rPr sz="1300" b="0" i="0">
-                <a:solidFill>
-                  <a:srgbClr val="1C1B19"/>
-                </a:solidFill>
-                <a:latin typeface="Source Serif 4"/>
-              </a:rPr>
-              <a:t/>
+              <a:t>Which of these do you change, depending on the room?</a:t>
             </a:r>
           </a:p>
         </p:txBody>
@@ -5126,8 +5885,8 @@
         </p:nvSpPr>
         <p:spPr>
           <a:xfrm>
-            <a:off x="6217920" y="1463040"/>
-            <a:ext cx="5394960" cy="4937760"/>
+            <a:off x="822960" y="2057400"/>
+            <a:ext cx="548640" cy="670560"/>
           </a:xfrm>
           <a:prstGeom prst="rect">
             <a:avLst/>
@@ -5142,193 +5901,446 @@
           <a:p>
             <a:pPr algn="l">
               <a:spcAft>
-                <a:spcPts val="585"/>
-              </a:spcAft>
-            </a:pPr>
-            <a:r>
-              <a:rPr sz="1500" b="1" i="0">
+                <a:spcPts val="1170"/>
+              </a:spcAft>
+            </a:pPr>
+            <a:r>
+              <a:rPr sz="2600" b="1" i="0">
+                <a:solidFill>
+                  <a:srgbClr val="F47B20"/>
+                </a:solidFill>
+                <a:latin typeface="Source Serif 4"/>
+              </a:rPr>
+              <a:t>•</a:t>
+            </a:r>
+          </a:p>
+        </p:txBody>
+      </p:sp>
+      <p:sp>
+        <p:nvSpPr>
+          <p:cNvPr id="7" name="TextBox 6"/>
+          <p:cNvSpPr txBox="1"/>
+          <p:nvPr/>
+        </p:nvSpPr>
+        <p:spPr>
+          <a:xfrm>
+            <a:off x="1463040" y="2093976"/>
+            <a:ext cx="9875520" cy="670560"/>
+          </a:xfrm>
+          <a:prstGeom prst="rect">
+            <a:avLst/>
+          </a:prstGeom>
+          <a:noFill/>
+        </p:spPr>
+        <p:txBody>
+          <a:bodyPr wrap="square" anchor="t" lIns="0" rIns="0" tIns="0" bIns="0">
+            <a:spAutoFit/>
+          </a:bodyPr>
+          <a:lstStyle/>
+          <a:p>
+            <a:pPr algn="l">
+              <a:spcAft>
+                <a:spcPts val="945"/>
+              </a:spcAft>
+            </a:pPr>
+            <a:r>
+              <a:rPr sz="2100" b="1" i="0">
                 <a:solidFill>
                   <a:srgbClr val="1C1B19"/>
                 </a:solidFill>
                 <a:latin typeface="Source Serif 4"/>
               </a:rPr>
-              <a:t>Unfairness is real. Name it without a lecture.</a:t>
-            </a:r>
-          </a:p>
-          <a:p>
-            <a:pPr algn="l">
-              <a:spcAft>
-                <a:spcPts val="585"/>
-              </a:spcAft>
-            </a:pPr>
-            <a:r>
-              <a:rPr sz="1300" b="0" i="0">
+              <a:t>How you talk, your accent, or which language</a:t>
+            </a:r>
+          </a:p>
+        </p:txBody>
+      </p:sp>
+      <p:sp>
+        <p:nvSpPr>
+          <p:cNvPr id="8" name="TextBox 7"/>
+          <p:cNvSpPr txBox="1"/>
+          <p:nvPr/>
+        </p:nvSpPr>
+        <p:spPr>
+          <a:xfrm>
+            <a:off x="822960" y="2727960"/>
+            <a:ext cx="548640" cy="670560"/>
+          </a:xfrm>
+          <a:prstGeom prst="rect">
+            <a:avLst/>
+          </a:prstGeom>
+          <a:noFill/>
+        </p:spPr>
+        <p:txBody>
+          <a:bodyPr wrap="square" anchor="t" lIns="0" rIns="0" tIns="0" bIns="0">
+            <a:spAutoFit/>
+          </a:bodyPr>
+          <a:lstStyle/>
+          <a:p>
+            <a:pPr algn="l">
+              <a:spcAft>
+                <a:spcPts val="1170"/>
+              </a:spcAft>
+            </a:pPr>
+            <a:r>
+              <a:rPr sz="2600" b="1" i="0">
+                <a:solidFill>
+                  <a:srgbClr val="F47B20"/>
+                </a:solidFill>
+                <a:latin typeface="Source Serif 4"/>
+              </a:rPr>
+              <a:t>•</a:t>
+            </a:r>
+          </a:p>
+        </p:txBody>
+      </p:sp>
+      <p:sp>
+        <p:nvSpPr>
+          <p:cNvPr id="9" name="TextBox 8"/>
+          <p:cNvSpPr txBox="1"/>
+          <p:nvPr/>
+        </p:nvSpPr>
+        <p:spPr>
+          <a:xfrm>
+            <a:off x="1463040" y="2764536"/>
+            <a:ext cx="9875520" cy="670560"/>
+          </a:xfrm>
+          <a:prstGeom prst="rect">
+            <a:avLst/>
+          </a:prstGeom>
+          <a:noFill/>
+        </p:spPr>
+        <p:txBody>
+          <a:bodyPr wrap="square" anchor="t" lIns="0" rIns="0" tIns="0" bIns="0">
+            <a:spAutoFit/>
+          </a:bodyPr>
+          <a:lstStyle/>
+          <a:p>
+            <a:pPr algn="l">
+              <a:spcAft>
+                <a:spcPts val="945"/>
+              </a:spcAft>
+            </a:pPr>
+            <a:r>
+              <a:rPr sz="2100" b="1" i="0">
                 <a:solidFill>
                   <a:srgbClr val="1C1B19"/>
                 </a:solidFill>
                 <a:latin typeface="Source Serif 4"/>
               </a:rPr>
-              <a:t>Some students switch to stay safe from bias. Say plainly that's on the people treating them differently, not on them. You don't need to resolve it in 20 minutes.</a:t>
-            </a:r>
-          </a:p>
-          <a:p>
-            <a:pPr algn="l">
-              <a:spcAft>
-                <a:spcPts val="585"/>
-              </a:spcAft>
-            </a:pPr>
-            <a:r>
-              <a:rPr sz="1300" b="0" i="0">
+              <a:t>Your clothes, your hair, your name</a:t>
+            </a:r>
+          </a:p>
+        </p:txBody>
+      </p:sp>
+      <p:sp>
+        <p:nvSpPr>
+          <p:cNvPr id="10" name="TextBox 9"/>
+          <p:cNvSpPr txBox="1"/>
+          <p:nvPr/>
+        </p:nvSpPr>
+        <p:spPr>
+          <a:xfrm>
+            <a:off x="822960" y="3398520"/>
+            <a:ext cx="548640" cy="670560"/>
+          </a:xfrm>
+          <a:prstGeom prst="rect">
+            <a:avLst/>
+          </a:prstGeom>
+          <a:noFill/>
+        </p:spPr>
+        <p:txBody>
+          <a:bodyPr wrap="square" anchor="t" lIns="0" rIns="0" tIns="0" bIns="0">
+            <a:spAutoFit/>
+          </a:bodyPr>
+          <a:lstStyle/>
+          <a:p>
+            <a:pPr algn="l">
+              <a:spcAft>
+                <a:spcPts val="1170"/>
+              </a:spcAft>
+            </a:pPr>
+            <a:r>
+              <a:rPr sz="2600" b="1" i="0">
+                <a:solidFill>
+                  <a:srgbClr val="F47B20"/>
+                </a:solidFill>
+                <a:latin typeface="Source Serif 4"/>
+              </a:rPr>
+              <a:t>•</a:t>
+            </a:r>
+          </a:p>
+        </p:txBody>
+      </p:sp>
+      <p:sp>
+        <p:nvSpPr>
+          <p:cNvPr id="11" name="TextBox 10"/>
+          <p:cNvSpPr txBox="1"/>
+          <p:nvPr/>
+        </p:nvSpPr>
+        <p:spPr>
+          <a:xfrm>
+            <a:off x="1463040" y="3435096"/>
+            <a:ext cx="9875520" cy="670560"/>
+          </a:xfrm>
+          <a:prstGeom prst="rect">
+            <a:avLst/>
+          </a:prstGeom>
+          <a:noFill/>
+        </p:spPr>
+        <p:txBody>
+          <a:bodyPr wrap="square" anchor="t" lIns="0" rIns="0" tIns="0" bIns="0">
+            <a:spAutoFit/>
+          </a:bodyPr>
+          <a:lstStyle/>
+          <a:p>
+            <a:pPr algn="l">
+              <a:spcAft>
+                <a:spcPts val="945"/>
+              </a:spcAft>
+            </a:pPr>
+            <a:r>
+              <a:rPr sz="2100" b="1" i="0">
                 <a:solidFill>
                   <a:srgbClr val="1C1B19"/>
                 </a:solidFill>
                 <a:latin typeface="Source Serif 4"/>
               </a:rPr>
-              <a:t/>
-            </a:r>
-          </a:p>
-          <a:p>
-            <a:pPr algn="l">
-              <a:spcAft>
-                <a:spcPts val="585"/>
-              </a:spcAft>
-            </a:pPr>
-            <a:r>
-              <a:rPr sz="1500" b="1" i="0">
+              <a:t>How loud you are, what music you say you like</a:t>
+            </a:r>
+          </a:p>
+        </p:txBody>
+      </p:sp>
+      <p:sp>
+        <p:nvSpPr>
+          <p:cNvPr id="12" name="TextBox 11"/>
+          <p:cNvSpPr txBox="1"/>
+          <p:nvPr/>
+        </p:nvSpPr>
+        <p:spPr>
+          <a:xfrm>
+            <a:off x="822960" y="4069080"/>
+            <a:ext cx="548640" cy="670560"/>
+          </a:xfrm>
+          <a:prstGeom prst="rect">
+            <a:avLst/>
+          </a:prstGeom>
+          <a:noFill/>
+        </p:spPr>
+        <p:txBody>
+          <a:bodyPr wrap="square" anchor="t" lIns="0" rIns="0" tIns="0" bIns="0">
+            <a:spAutoFit/>
+          </a:bodyPr>
+          <a:lstStyle/>
+          <a:p>
+            <a:pPr algn="l">
+              <a:spcAft>
+                <a:spcPts val="1170"/>
+              </a:spcAft>
+            </a:pPr>
+            <a:r>
+              <a:rPr sz="2600" b="1" i="0">
+                <a:solidFill>
+                  <a:srgbClr val="F47B20"/>
+                </a:solidFill>
+                <a:latin typeface="Source Serif 4"/>
+              </a:rPr>
+              <a:t>•</a:t>
+            </a:r>
+          </a:p>
+        </p:txBody>
+      </p:sp>
+      <p:sp>
+        <p:nvSpPr>
+          <p:cNvPr id="13" name="TextBox 12"/>
+          <p:cNvSpPr txBox="1"/>
+          <p:nvPr/>
+        </p:nvSpPr>
+        <p:spPr>
+          <a:xfrm>
+            <a:off x="1463040" y="4105656"/>
+            <a:ext cx="9875520" cy="670560"/>
+          </a:xfrm>
+          <a:prstGeom prst="rect">
+            <a:avLst/>
+          </a:prstGeom>
+          <a:noFill/>
+        </p:spPr>
+        <p:txBody>
+          <a:bodyPr wrap="square" anchor="t" lIns="0" rIns="0" tIns="0" bIns="0">
+            <a:spAutoFit/>
+          </a:bodyPr>
+          <a:lstStyle/>
+          <a:p>
+            <a:pPr algn="l">
+              <a:spcAft>
+                <a:spcPts val="945"/>
+              </a:spcAft>
+            </a:pPr>
+            <a:r>
+              <a:rPr sz="2100" b="1" i="0">
                 <a:solidFill>
                   <a:srgbClr val="1C1B19"/>
                 </a:solidFill>
                 <a:latin typeface="Source Serif 4"/>
               </a:rPr>
-              <a:t>Coming out is the student's call.</a:t>
-            </a:r>
-          </a:p>
-          <a:p>
-            <a:pPr algn="l">
-              <a:spcAft>
-                <a:spcPts val="585"/>
-              </a:spcAft>
-            </a:pPr>
-            <a:r>
-              <a:rPr sz="1300" b="0" i="0">
+              <a:t>Your faith, how you show your gender, who you like</a:t>
+            </a:r>
+          </a:p>
+        </p:txBody>
+      </p:sp>
+      <p:sp>
+        <p:nvSpPr>
+          <p:cNvPr id="14" name="TextBox 13"/>
+          <p:cNvSpPr txBox="1"/>
+          <p:nvPr/>
+        </p:nvSpPr>
+        <p:spPr>
+          <a:xfrm>
+            <a:off x="822960" y="4739640"/>
+            <a:ext cx="548640" cy="670560"/>
+          </a:xfrm>
+          <a:prstGeom prst="rect">
+            <a:avLst/>
+          </a:prstGeom>
+          <a:noFill/>
+        </p:spPr>
+        <p:txBody>
+          <a:bodyPr wrap="square" anchor="t" lIns="0" rIns="0" tIns="0" bIns="0">
+            <a:spAutoFit/>
+          </a:bodyPr>
+          <a:lstStyle/>
+          <a:p>
+            <a:pPr algn="l">
+              <a:spcAft>
+                <a:spcPts val="1170"/>
+              </a:spcAft>
+            </a:pPr>
+            <a:r>
+              <a:rPr sz="2600" b="1" i="0">
+                <a:solidFill>
+                  <a:srgbClr val="F47B20"/>
+                </a:solidFill>
+                <a:latin typeface="Source Serif 4"/>
+              </a:rPr>
+              <a:t>•</a:t>
+            </a:r>
+          </a:p>
+        </p:txBody>
+      </p:sp>
+      <p:sp>
+        <p:nvSpPr>
+          <p:cNvPr id="15" name="TextBox 14"/>
+          <p:cNvSpPr txBox="1"/>
+          <p:nvPr/>
+        </p:nvSpPr>
+        <p:spPr>
+          <a:xfrm>
+            <a:off x="1463040" y="4776216"/>
+            <a:ext cx="9875520" cy="670560"/>
+          </a:xfrm>
+          <a:prstGeom prst="rect">
+            <a:avLst/>
+          </a:prstGeom>
+          <a:noFill/>
+        </p:spPr>
+        <p:txBody>
+          <a:bodyPr wrap="square" anchor="t" lIns="0" rIns="0" tIns="0" bIns="0">
+            <a:spAutoFit/>
+          </a:bodyPr>
+          <a:lstStyle/>
+          <a:p>
+            <a:pPr algn="l">
+              <a:spcAft>
+                <a:spcPts val="945"/>
+              </a:spcAft>
+            </a:pPr>
+            <a:r>
+              <a:rPr sz="2100" b="1" i="0">
                 <a:solidFill>
                   <a:srgbClr val="1C1B19"/>
                 </a:solidFill>
                 <a:latin typeface="Source Serif 4"/>
               </a:rPr>
-              <a:t>Gender and sexuality come up on the student page as things people sometimes hide. Never guess, never out anyone, and don't ask students to say whether this applies to them.</a:t>
-            </a:r>
-          </a:p>
-          <a:p>
-            <a:pPr algn="l">
-              <a:spcAft>
-                <a:spcPts val="585"/>
-              </a:spcAft>
-            </a:pPr>
-            <a:r>
-              <a:rPr sz="1300" b="0" i="0">
+              <a:t>Hiding ADHD, autism or a disability</a:t>
+            </a:r>
+          </a:p>
+        </p:txBody>
+      </p:sp>
+      <p:sp>
+        <p:nvSpPr>
+          <p:cNvPr id="16" name="TextBox 15"/>
+          <p:cNvSpPr txBox="1"/>
+          <p:nvPr/>
+        </p:nvSpPr>
+        <p:spPr>
+          <a:xfrm>
+            <a:off x="822960" y="5410200"/>
+            <a:ext cx="548640" cy="670560"/>
+          </a:xfrm>
+          <a:prstGeom prst="rect">
+            <a:avLst/>
+          </a:prstGeom>
+          <a:noFill/>
+        </p:spPr>
+        <p:txBody>
+          <a:bodyPr wrap="square" anchor="t" lIns="0" rIns="0" tIns="0" bIns="0">
+            <a:spAutoFit/>
+          </a:bodyPr>
+          <a:lstStyle/>
+          <a:p>
+            <a:pPr algn="l">
+              <a:spcAft>
+                <a:spcPts val="1170"/>
+              </a:spcAft>
+            </a:pPr>
+            <a:r>
+              <a:rPr sz="2600" b="1" i="0">
+                <a:solidFill>
+                  <a:srgbClr val="F47B20"/>
+                </a:solidFill>
+                <a:latin typeface="Source Serif 4"/>
+              </a:rPr>
+              <a:t>•</a:t>
+            </a:r>
+          </a:p>
+        </p:txBody>
+      </p:sp>
+      <p:sp>
+        <p:nvSpPr>
+          <p:cNvPr id="17" name="TextBox 16"/>
+          <p:cNvSpPr txBox="1"/>
+          <p:nvPr/>
+        </p:nvSpPr>
+        <p:spPr>
+          <a:xfrm>
+            <a:off x="1463040" y="5446776"/>
+            <a:ext cx="9875520" cy="670560"/>
+          </a:xfrm>
+          <a:prstGeom prst="rect">
+            <a:avLst/>
+          </a:prstGeom>
+          <a:noFill/>
+        </p:spPr>
+        <p:txBody>
+          <a:bodyPr wrap="square" anchor="t" lIns="0" rIns="0" tIns="0" bIns="0">
+            <a:spAutoFit/>
+          </a:bodyPr>
+          <a:lstStyle/>
+          <a:p>
+            <a:pPr algn="l">
+              <a:spcAft>
+                <a:spcPts val="945"/>
+              </a:spcAft>
+            </a:pPr>
+            <a:r>
+              <a:rPr sz="2100" b="1" i="0">
                 <a:solidFill>
                   <a:srgbClr val="1C1B19"/>
                 </a:solidFill>
                 <a:latin typeface="Source Serif 4"/>
               </a:rPr>
-              <a:t/>
-            </a:r>
-          </a:p>
-          <a:p>
-            <a:pPr algn="l">
-              <a:spcAft>
-                <a:spcPts val="585"/>
-              </a:spcAft>
-            </a:pPr>
-            <a:r>
-              <a:rPr sz="1500" b="1" i="0">
-                <a:solidFill>
-                  <a:srgbClr val="1C1B19"/>
-                </a:solidFill>
-                <a:latin typeface="Source Serif 4"/>
-              </a:rPr>
-              <a:t>Money switches too, in a lot of ways.</a:t>
-            </a:r>
-          </a:p>
-          <a:p>
-            <a:pPr algn="l">
-              <a:spcAft>
-                <a:spcPts val="585"/>
-              </a:spcAft>
-            </a:pPr>
-            <a:r>
-              <a:rPr sz="1300" b="0" i="0">
-                <a:solidFill>
-                  <a:srgbClr val="1C1B19"/>
-                </a:solidFill>
-                <a:latin typeface="Source Serif 4"/>
-              </a:rPr>
-              <a:t>At an independent school, money comes up constantly: trips over break, phones and clothes, eating out, camps, birthday plans, who drives and who takes the bus, who works after school or cares for siblings, who's on financial aid. In your own check-ins, ask "What was one good part of your break?" rather than "Where did you go?", keep plans that cost money optional, and never ask students to compare.</a:t>
-            </a:r>
-          </a:p>
-          <a:p>
-            <a:pPr algn="l">
-              <a:spcAft>
-                <a:spcPts val="585"/>
-              </a:spcAft>
-            </a:pPr>
-            <a:r>
-              <a:rPr sz="1300" b="0" i="0">
-                <a:solidFill>
-                  <a:srgbClr val="1C1B19"/>
-                </a:solidFill>
-                <a:latin typeface="Source Serif 4"/>
-              </a:rPr>
-              <a:t/>
-            </a:r>
-          </a:p>
-          <a:p>
-            <a:pPr algn="l">
-              <a:spcAft>
-                <a:spcPts val="585"/>
-              </a:spcAft>
-            </a:pPr>
-            <a:r>
-              <a:rPr sz="1500" b="1" i="0">
-                <a:solidFill>
-                  <a:srgbClr val="1C1B19"/>
-                </a:solidFill>
-                <a:latin typeface="Source Serif 4"/>
-              </a:rPr>
-              <a:t>Watch for students carrying a lot.</a:t>
-            </a:r>
-          </a:p>
-          <a:p>
-            <a:pPr algn="l">
-              <a:spcAft>
-                <a:spcPts val="585"/>
-              </a:spcAft>
-            </a:pPr>
-            <a:r>
-              <a:rPr sz="1300" b="0" i="0">
-                <a:solidFill>
-                  <a:srgbClr val="1C1B19"/>
-                </a:solidFill>
-                <a:latin typeface="Source Serif 4"/>
-              </a:rPr>
-              <a:t>A student who says they can't be themselves anywhere, or who describes being targeted for who they are, is worth a quiet check-in after advisory and a same-day note to a counselor.</a:t>
-            </a:r>
-          </a:p>
-          <a:p>
-            <a:pPr algn="l">
-              <a:spcAft>
-                <a:spcPts val="585"/>
-              </a:spcAft>
-            </a:pPr>
-            <a:r>
-              <a:rPr sz="1300" b="0" i="0">
-                <a:solidFill>
-                  <a:srgbClr val="1C1B19"/>
-                </a:solidFill>
-                <a:latin typeface="Source Serif 4"/>
-              </a:rPr>
-              <a:t/>
+              <a:t>Money: break plans, phones, clothes, where you live, rides, jobs</a:t>
             </a:r>
           </a:p>
         </p:txBody>
@@ -5341,13 +6353,13 @@
 </p:sld>
 </file>
 
-<file path=ppt/slides/slide3.xml><?xml version="1.0" encoding="utf-8"?>
-<p:sld xmlns:a="http://schemas.openxmlformats.org/drawingml/2006/main" xmlns:p="http://schemas.openxmlformats.org/presentationml/2006/main" xmlns:r="http://schemas.openxmlformats.org/officeDocument/2006/relationships" show="0">
+<file path=ppt/slides/slide5.xml><?xml version="1.0" encoding="utf-8"?>
+<p:sld xmlns:a="http://schemas.openxmlformats.org/drawingml/2006/main" xmlns:p="http://schemas.openxmlformats.org/presentationml/2006/main" xmlns:r="http://schemas.openxmlformats.org/officeDocument/2006/relationships">
   <p:cSld>
     <p:bg>
       <p:bgPr>
         <a:solidFill>
-          <a:srgbClr val="EEEBE4"/>
+          <a:srgbClr val="F7F4EE"/>
         </a:solidFill>
         <a:effectLst/>
       </p:bgPr>
@@ -5367,14 +6379,14 @@
         </p:nvSpPr>
         <p:spPr>
           <a:xfrm>
-            <a:off x="0" y="0"/>
-            <a:ext cx="12191695" cy="384048"/>
+            <a:off x="548640" y="502920"/>
+            <a:ext cx="457200" cy="54864"/>
           </a:xfrm>
           <a:prstGeom prst="rect">
             <a:avLst/>
           </a:prstGeom>
           <a:solidFill>
-            <a:srgbClr val="0B2D5B"/>
+            <a:srgbClr val="F47B20"/>
           </a:solidFill>
           <a:ln>
             <a:noFill/>
@@ -5411,8 +6423,8 @@
         </p:nvSpPr>
         <p:spPr>
           <a:xfrm>
-            <a:off x="548640" y="100584"/>
-            <a:ext cx="10972800" cy="274320"/>
+            <a:off x="1143000" y="393192"/>
+            <a:ext cx="8229600" cy="274320"/>
           </a:xfrm>
           <a:prstGeom prst="rect">
             <a:avLst/>
@@ -5427,17 +6439,17 @@
           <a:p>
             <a:pPr algn="l">
               <a:spcAft>
-                <a:spcPts val="495"/>
-              </a:spcAft>
-            </a:pPr>
-            <a:r>
-              <a:rPr sz="1100" b="1" i="0">
-                <a:solidFill>
-                  <a:srgbClr val="FFFFFF"/>
+                <a:spcPts val="540"/>
+              </a:spcAft>
+            </a:pPr>
+            <a:r>
+              <a:rPr sz="1200" b="1" i="0">
+                <a:solidFill>
+                  <a:srgbClr val="5D5A54"/>
                 </a:solidFill>
                 <a:latin typeface="Inter Tight"/>
               </a:rPr>
-              <a:t>TEACHER PAGE  ·  skipped when you present  ·  Every student in the room</a:t>
+              <a:t>HOME GAMES AND AWAY GAMES</a:t>
             </a:r>
           </a:p>
         </p:txBody>
@@ -5450,8 +6462,8 @@
         </p:nvSpPr>
         <p:spPr>
           <a:xfrm>
-            <a:off x="548640" y="685800"/>
-            <a:ext cx="10972800" cy="640080"/>
+            <a:off x="8229600" y="6400800"/>
+            <a:ext cx="3410712" cy="274320"/>
           </a:xfrm>
           <a:prstGeom prst="rect">
             <a:avLst/>
@@ -5464,19 +6476,19 @@
           </a:bodyPr>
           <a:lstStyle/>
           <a:p>
-            <a:pPr algn="l">
-              <a:spcAft>
-                <a:spcPts val="1350"/>
-              </a:spcAft>
-            </a:pPr>
-            <a:r>
-              <a:rPr sz="3000" b="1" i="0">
-                <a:solidFill>
-                  <a:srgbClr val="1C1B19"/>
-                </a:solidFill>
-                <a:latin typeface="Source Serif 4"/>
-              </a:rPr>
-              <a:t>Every student in the room</a:t>
+            <a:pPr algn="r">
+              <a:spcAft>
+                <a:spcPts val="450"/>
+              </a:spcAft>
+            </a:pPr>
+            <a:r>
+              <a:rPr sz="1000" b="0" i="0">
+                <a:solidFill>
+                  <a:srgbClr val="5D5A54"/>
+                </a:solidFill>
+                <a:latin typeface="Inter Tight"/>
+              </a:rPr>
+              <a:t>Beaver Counseling</a:t>
             </a:r>
           </a:p>
         </p:txBody>
@@ -5489,8 +6501,8 @@
         </p:nvSpPr>
         <p:spPr>
           <a:xfrm>
-            <a:off x="548640" y="1325880"/>
-            <a:ext cx="10972800" cy="365760"/>
+            <a:off x="822960" y="1005840"/>
+            <a:ext cx="10515600" cy="914400"/>
           </a:xfrm>
           <a:prstGeom prst="rect">
             <a:avLst/>
@@ -5505,400 +6517,42 @@
           <a:p>
             <a:pPr algn="l">
               <a:spcAft>
-                <a:spcPts val="630"/>
-              </a:spcAft>
-            </a:pPr>
-            <a:r>
-              <a:rPr sz="1400" b="0" i="0">
-                <a:solidFill>
-                  <a:srgbClr val="5D5A54"/>
-                </a:solidFill>
-                <a:latin typeface="Inter Tight"/>
-              </a:rPr>
-              <a:t>Culture, family, identity, ability and money: what to keep in mind for this topic.</a:t>
-            </a:r>
-          </a:p>
-        </p:txBody>
-      </p:sp>
-      <p:sp>
-        <p:nvSpPr>
-          <p:cNvPr id="6" name="TextBox 5"/>
-          <p:cNvSpPr txBox="1"/>
-          <p:nvPr/>
-        </p:nvSpPr>
-        <p:spPr>
-          <a:xfrm>
-            <a:off x="548640" y="1828800"/>
-            <a:ext cx="5394960" cy="4572000"/>
-          </a:xfrm>
-          <a:prstGeom prst="rect">
-            <a:avLst/>
-          </a:prstGeom>
-          <a:noFill/>
-        </p:spPr>
-        <p:txBody>
-          <a:bodyPr wrap="square" anchor="t" lIns="0" rIns="0" tIns="0" bIns="0">
-            <a:spAutoFit/>
-          </a:bodyPr>
-          <a:lstStyle/>
-          <a:p>
-            <a:pPr algn="l">
-              <a:spcAft>
-                <a:spcPts val="585"/>
-              </a:spcAft>
-            </a:pPr>
-            <a:r>
-              <a:rPr sz="1500" b="1" i="0">
+                <a:spcPts val="1530"/>
+              </a:spcAft>
+            </a:pPr>
+            <a:r>
+              <a:rPr sz="3400" b="1" i="0">
                 <a:solidFill>
                   <a:srgbClr val="1C1B19"/>
                 </a:solidFill>
                 <a:latin typeface="Source Serif 4"/>
               </a:rPr>
-              <a:t>Language at home.</a:t>
-            </a:r>
-          </a:p>
-          <a:p>
-            <a:pPr algn="l">
-              <a:spcAft>
-                <a:spcPts val="585"/>
-              </a:spcAft>
-            </a:pPr>
-            <a:r>
-              <a:rPr sz="1300" b="0" i="0">
-                <a:solidFill>
-                  <a:srgbClr val="1C1B19"/>
-                </a:solidFill>
-                <a:latin typeface="Source Serif 4"/>
-              </a:rPr>
-              <a:t>Some students speak another language at home, translate for parents, or are told they're losing their home language. Treat all of it as an asset, not a gap.</a:t>
-            </a:r>
-          </a:p>
-          <a:p>
-            <a:pPr algn="l">
-              <a:spcAft>
-                <a:spcPts val="585"/>
-              </a:spcAft>
-            </a:pPr>
-            <a:r>
-              <a:rPr sz="1300" b="0" i="0">
-                <a:solidFill>
-                  <a:srgbClr val="1C1B19"/>
-                </a:solidFill>
-                <a:latin typeface="Source Serif 4"/>
-              </a:rPr>
-              <a:t/>
-            </a:r>
-          </a:p>
-          <a:p>
-            <a:pPr algn="l">
-              <a:spcAft>
-                <a:spcPts val="585"/>
-              </a:spcAft>
-            </a:pPr>
-            <a:r>
-              <a:rPr sz="1500" b="1" i="0">
-                <a:solidFill>
-                  <a:srgbClr val="1C1B19"/>
-                </a:solidFill>
-                <a:latin typeface="Source Serif 4"/>
-              </a:rPr>
-              <a:t>Race and ethnicity.</a:t>
-            </a:r>
-          </a:p>
-          <a:p>
-            <a:pPr algn="l">
-              <a:spcAft>
-                <a:spcPts val="585"/>
-              </a:spcAft>
-            </a:pPr>
-            <a:r>
-              <a:rPr sz="1300" b="0" i="0">
-                <a:solidFill>
-                  <a:srgbClr val="1C1B19"/>
-                </a:solidFill>
-                <a:latin typeface="Source Serif 4"/>
-              </a:rPr>
-              <a:t>Research on racial code switching mostly involves Black students and adults, and it applies to many others too. Keep examples broad and let students connect them to their own lives if they want.</a:t>
-            </a:r>
-          </a:p>
-          <a:p>
-            <a:pPr algn="l">
-              <a:spcAft>
-                <a:spcPts val="585"/>
-              </a:spcAft>
-            </a:pPr>
-            <a:r>
-              <a:rPr sz="1300" b="0" i="0">
-                <a:solidFill>
-                  <a:srgbClr val="1C1B19"/>
-                </a:solidFill>
-                <a:latin typeface="Source Serif 4"/>
-              </a:rPr>
-              <a:t/>
-            </a:r>
-          </a:p>
-          <a:p>
-            <a:pPr algn="l">
-              <a:spcAft>
-                <a:spcPts val="585"/>
-              </a:spcAft>
-            </a:pPr>
-            <a:r>
-              <a:rPr sz="1500" b="1" i="0">
-                <a:solidFill>
-                  <a:srgbClr val="1C1B19"/>
-                </a:solidFill>
-                <a:latin typeface="Source Serif 4"/>
-              </a:rPr>
-              <a:t>Neurodivergence.</a:t>
-            </a:r>
-          </a:p>
-          <a:p>
-            <a:pPr algn="l">
-              <a:spcAft>
-                <a:spcPts val="585"/>
-              </a:spcAft>
-            </a:pPr>
-            <a:r>
-              <a:rPr sz="1300" b="0" i="0">
-                <a:solidFill>
-                  <a:srgbClr val="1C1B19"/>
-                </a:solidFill>
-                <a:latin typeface="Source Serif 4"/>
-              </a:rPr>
-              <a:t>Autistic students and students with ADHD often describe "masking": hiding traits to fit in, which can be exhausting. The home games idea fits them too.</a:t>
-            </a:r>
-          </a:p>
-          <a:p>
-            <a:pPr algn="l">
-              <a:spcAft>
-                <a:spcPts val="585"/>
-              </a:spcAft>
-            </a:pPr>
-            <a:r>
-              <a:rPr sz="1300" b="0" i="0">
-                <a:solidFill>
-                  <a:srgbClr val="1C1B19"/>
-                </a:solidFill>
-                <a:latin typeface="Source Serif 4"/>
-              </a:rPr>
-              <a:t/>
-            </a:r>
-          </a:p>
-        </p:txBody>
-      </p:sp>
-      <p:sp>
-        <p:nvSpPr>
-          <p:cNvPr id="7" name="TextBox 6"/>
-          <p:cNvSpPr txBox="1"/>
-          <p:nvPr/>
-        </p:nvSpPr>
-        <p:spPr>
-          <a:xfrm>
-            <a:off x="6217920" y="1828800"/>
-            <a:ext cx="5394960" cy="4572000"/>
-          </a:xfrm>
-          <a:prstGeom prst="rect">
-            <a:avLst/>
-          </a:prstGeom>
-          <a:noFill/>
-        </p:spPr>
-        <p:txBody>
-          <a:bodyPr wrap="square" anchor="t" lIns="0" rIns="0" tIns="0" bIns="0">
-            <a:spAutoFit/>
-          </a:bodyPr>
-          <a:lstStyle/>
-          <a:p>
-            <a:pPr algn="l">
-              <a:spcAft>
-                <a:spcPts val="585"/>
-              </a:spcAft>
-            </a:pPr>
-            <a:r>
-              <a:rPr sz="1500" b="1" i="0">
-                <a:solidFill>
-                  <a:srgbClr val="1C1B19"/>
-                </a:solidFill>
-                <a:latin typeface="Source Serif 4"/>
-              </a:rPr>
-              <a:t>LGBTQ+ students.</a:t>
-            </a:r>
-          </a:p>
-          <a:p>
-            <a:pPr algn="l">
-              <a:spcAft>
-                <a:spcPts val="585"/>
-              </a:spcAft>
-            </a:pPr>
-            <a:r>
-              <a:rPr sz="1300" b="0" i="0">
-                <a:solidFill>
-                  <a:srgbClr val="1C1B19"/>
-                </a:solidFill>
-                <a:latin typeface="Source Serif 4"/>
-              </a:rPr>
-              <a:t>Some students switch how they show their gender or who they like, depending on who's around. Safety comes first; the lesson never asks anyone to be more out than they choose.</a:t>
-            </a:r>
-          </a:p>
-          <a:p>
-            <a:pPr algn="l">
-              <a:spcAft>
-                <a:spcPts val="585"/>
-              </a:spcAft>
-            </a:pPr>
-            <a:r>
-              <a:rPr sz="1300" b="0" i="0">
-                <a:solidFill>
-                  <a:srgbClr val="1C1B19"/>
-                </a:solidFill>
-                <a:latin typeface="Source Serif 4"/>
-              </a:rPr>
-              <a:t/>
-            </a:r>
-          </a:p>
-          <a:p>
-            <a:pPr algn="l">
-              <a:spcAft>
-                <a:spcPts val="585"/>
-              </a:spcAft>
-            </a:pPr>
-            <a:r>
-              <a:rPr sz="1500" b="1" i="0">
-                <a:solidFill>
-                  <a:srgbClr val="1C1B19"/>
-                </a:solidFill>
-                <a:latin typeface="Source Serif 4"/>
-              </a:rPr>
-              <a:t>Money and class.</a:t>
-            </a:r>
-          </a:p>
-          <a:p>
-            <a:pPr algn="l">
-              <a:spcAft>
-                <a:spcPts val="585"/>
-              </a:spcAft>
-            </a:pPr>
-            <a:r>
-              <a:rPr sz="1300" b="0" i="0">
-                <a:solidFill>
-                  <a:srgbClr val="1C1B19"/>
-                </a:solidFill>
-                <a:latin typeface="Source Serif 4"/>
-              </a:rPr>
-              <a:t>Students switch around money: what they say they did over break, where they live, what they can afford, whether they're on financial aid. Some students spend breaks working or caring for siblings. Keep examples free of brand names and trips, and treat family responsibilities as strengths.</a:t>
-            </a:r>
-          </a:p>
-          <a:p>
-            <a:pPr algn="l">
-              <a:spcAft>
-                <a:spcPts val="585"/>
-              </a:spcAft>
-            </a:pPr>
-            <a:r>
-              <a:rPr sz="1300" b="0" i="0">
-                <a:solidFill>
-                  <a:srgbClr val="1C1B19"/>
-                </a:solidFill>
-                <a:latin typeface="Source Serif 4"/>
-              </a:rPr>
-              <a:t/>
-            </a:r>
-          </a:p>
-          <a:p>
-            <a:pPr algn="l">
-              <a:spcAft>
-                <a:spcPts val="585"/>
-              </a:spcAft>
-            </a:pPr>
-            <a:r>
-              <a:rPr sz="1500" b="1" i="0">
-                <a:solidFill>
-                  <a:srgbClr val="1C1B19"/>
-                </a:solidFill>
-                <a:latin typeface="Source Serif 4"/>
-              </a:rPr>
-              <a:t>Faith.</a:t>
-            </a:r>
-          </a:p>
-          <a:p>
-            <a:pPr algn="l">
-              <a:spcAft>
-                <a:spcPts val="585"/>
-              </a:spcAft>
-            </a:pPr>
-            <a:r>
-              <a:rPr sz="1300" b="0" i="0">
-                <a:solidFill>
-                  <a:srgbClr val="1C1B19"/>
-                </a:solidFill>
-                <a:latin typeface="Source Serif 4"/>
-              </a:rPr>
-              <a:t>Some students tone down their faith at school, or tone down school at home. Both are worth respecting.</a:t>
-            </a:r>
-          </a:p>
-          <a:p>
-            <a:pPr algn="l">
-              <a:spcAft>
-                <a:spcPts val="585"/>
-              </a:spcAft>
-            </a:pPr>
-            <a:r>
-              <a:rPr sz="1300" b="0" i="0">
-                <a:solidFill>
-                  <a:srgbClr val="1C1B19"/>
-                </a:solidFill>
-                <a:latin typeface="Source Serif 4"/>
-              </a:rPr>
-              <a:t/>
-            </a:r>
-          </a:p>
-        </p:txBody>
-      </p:sp>
-    </p:spTree>
-  </p:cSld>
-  <p:clrMapOvr>
-    <a:masterClrMapping/>
-  </p:clrMapOvr>
-</p:sld>
-</file>
-
-<file path=ppt/slides/slide4.xml><?xml version="1.0" encoding="utf-8"?>
-<p:sld xmlns:a="http://schemas.openxmlformats.org/drawingml/2006/main" xmlns:p="http://schemas.openxmlformats.org/presentationml/2006/main" xmlns:r="http://schemas.openxmlformats.org/officeDocument/2006/relationships" show="0">
-  <p:cSld>
-    <p:bg>
-      <p:bgPr>
-        <a:solidFill>
-          <a:srgbClr val="EEEBE4"/>
-        </a:solidFill>
-        <a:effectLst/>
-      </p:bgPr>
-    </p:bg>
-    <p:spTree>
-      <p:nvGrpSpPr>
-        <p:cNvPr id="1" name=""/>
-        <p:cNvGrpSpPr/>
-        <p:nvPr/>
-      </p:nvGrpSpPr>
-      <p:grpSpPr/>
-      <p:sp>
-        <p:nvSpPr>
-          <p:cNvPr id="2" name="Rectangle 1"/>
+              <a:t>Teams play differently on the road.</a:t>
+            </a:r>
+          </a:p>
+        </p:txBody>
+      </p:sp>
+      <p:sp>
+        <p:nvSpPr>
+          <p:cNvPr id="6" name="Rectangle 5"/>
           <p:cNvSpPr/>
           <p:nvPr/>
         </p:nvSpPr>
         <p:spPr>
           <a:xfrm>
-            <a:off x="0" y="0"/>
-            <a:ext cx="12191695" cy="384048"/>
+            <a:off x="822960" y="2103120"/>
+            <a:ext cx="5120640" cy="3931920"/>
           </a:xfrm>
           <a:prstGeom prst="rect">
             <a:avLst/>
           </a:prstGeom>
           <a:solidFill>
-            <a:srgbClr val="0B2D5B"/>
+            <a:srgbClr val="FFFFFF"/>
           </a:solidFill>
-          <a:ln>
-            <a:noFill/>
+          <a:ln w="15875">
+            <a:solidFill>
+              <a:srgbClr val="D8D2C6"/>
+            </a:solidFill>
           </a:ln>
           <a:effectLst/>
         </p:spPr>
@@ -5926,14 +6580,14 @@
       </p:sp>
       <p:sp>
         <p:nvSpPr>
-          <p:cNvPr id="3" name="TextBox 2"/>
+          <p:cNvPr id="7" name="TextBox 6"/>
           <p:cNvSpPr txBox="1"/>
           <p:nvPr/>
         </p:nvSpPr>
         <p:spPr>
           <a:xfrm>
-            <a:off x="548640" y="100584"/>
-            <a:ext cx="10972800" cy="274320"/>
+            <a:off x="1097280" y="2286000"/>
+            <a:ext cx="4572000" cy="457200"/>
           </a:xfrm>
           <a:prstGeom prst="rect">
             <a:avLst/>
@@ -5948,31 +6602,31 @@
           <a:p>
             <a:pPr algn="l">
               <a:spcAft>
-                <a:spcPts val="495"/>
-              </a:spcAft>
-            </a:pPr>
-            <a:r>
-              <a:rPr sz="1100" b="1" i="0">
-                <a:solidFill>
-                  <a:srgbClr val="FFFFFF"/>
+                <a:spcPts val="585"/>
+              </a:spcAft>
+            </a:pPr>
+            <a:r>
+              <a:rPr sz="1300" b="1" i="0">
+                <a:solidFill>
+                  <a:srgbClr val="0B2D5B"/>
                 </a:solidFill>
                 <a:latin typeface="Inter Tight"/>
               </a:rPr>
-              <a:t>TEACHER PAGE  ·  skipped when you present  ·  Background</a:t>
-            </a:r>
-          </a:p>
-        </p:txBody>
-      </p:sp>
-      <p:sp>
-        <p:nvSpPr>
-          <p:cNvPr id="4" name="TextBox 3"/>
+              <a:t>AWAY GAMES</a:t>
+            </a:r>
+          </a:p>
+        </p:txBody>
+      </p:sp>
+      <p:sp>
+        <p:nvSpPr>
+          <p:cNvPr id="8" name="TextBox 7"/>
           <p:cNvSpPr txBox="1"/>
           <p:nvPr/>
         </p:nvSpPr>
         <p:spPr>
           <a:xfrm>
-            <a:off x="548640" y="685800"/>
-            <a:ext cx="10972800" cy="640080"/>
+            <a:off x="1097280" y="2788920"/>
+            <a:ext cx="4572000" cy="3108960"/>
           </a:xfrm>
           <a:prstGeom prst="rect">
             <a:avLst/>
@@ -5987,272 +6641,90 @@
           <a:p>
             <a:pPr algn="l">
               <a:spcAft>
-                <a:spcPts val="1350"/>
-              </a:spcAft>
-            </a:pPr>
-            <a:r>
-              <a:rPr sz="3000" b="1" i="0">
+                <a:spcPts val="855"/>
+              </a:spcAft>
+            </a:pPr>
+            <a:r>
+              <a:rPr sz="1900" b="0" i="0">
                 <a:solidFill>
                   <a:srgbClr val="1C1B19"/>
                 </a:solidFill>
                 <a:latin typeface="Source Serif 4"/>
               </a:rPr>
-              <a:t>What the research says</a:t>
-            </a:r>
-          </a:p>
-        </p:txBody>
-      </p:sp>
-      <p:sp>
-        <p:nvSpPr>
-          <p:cNvPr id="5" name="TextBox 4"/>
-          <p:cNvSpPr txBox="1"/>
-          <p:nvPr/>
-        </p:nvSpPr>
-        <p:spPr>
-          <a:xfrm>
-            <a:off x="548640" y="1463040"/>
-            <a:ext cx="5394960" cy="4937760"/>
-          </a:xfrm>
-          <a:prstGeom prst="rect">
-            <a:avLst/>
-          </a:prstGeom>
-          <a:noFill/>
-        </p:spPr>
-        <p:txBody>
-          <a:bodyPr wrap="square" anchor="t" lIns="0" rIns="0" tIns="0" bIns="0">
-            <a:spAutoFit/>
-          </a:bodyPr>
-          <a:lstStyle/>
-          <a:p>
-            <a:pPr algn="l">
-              <a:spcAft>
-                <a:spcPts val="585"/>
-              </a:spcAft>
-            </a:pPr>
-            <a:r>
-              <a:rPr sz="1300" b="0" i="0">
+              <a:t>Their crowd, their rules</a:t>
+            </a:r>
+          </a:p>
+          <a:p>
+            <a:pPr algn="l">
+              <a:spcAft>
+                <a:spcPts val="855"/>
+              </a:spcAft>
+            </a:pPr>
+            <a:r>
+              <a:rPr sz="1900" b="0" i="0">
                 <a:solidFill>
                   <a:srgbClr val="1C1B19"/>
                 </a:solidFill>
                 <a:latin typeface="Source Serif 4"/>
               </a:rPr>
-              <a:t>Linguists have studied code switching for decades and describe it as a skilled, rule-governed way people use language to signal identity and fit a setting.</a:t>
-            </a:r>
-          </a:p>
-          <a:p>
-            <a:pPr algn="l">
-              <a:spcAft>
-                <a:spcPts val="585"/>
-              </a:spcAft>
-            </a:pPr>
-            <a:r>
-              <a:rPr sz="1050" b="0" i="0">
-                <a:solidFill>
-                  <a:srgbClr val="5D5A54"/>
-                </a:solidFill>
-                <a:latin typeface="Inter Tight"/>
-              </a:rPr>
-              <a:t>Gumperz, Discourse Strategies, 1982</a:t>
-            </a:r>
-          </a:p>
-          <a:p>
-            <a:pPr algn="l">
-              <a:spcAft>
-                <a:spcPts val="585"/>
-              </a:spcAft>
-            </a:pPr>
-            <a:r>
-              <a:rPr sz="1300" b="0" i="0">
+              <a:t>You adjust, and that's a skill</a:t>
+            </a:r>
+          </a:p>
+          <a:p>
+            <a:pPr algn="l">
+              <a:spcAft>
+                <a:spcPts val="855"/>
+              </a:spcAft>
+            </a:pPr>
+            <a:r>
+              <a:rPr sz="1900" b="0" i="0">
                 <a:solidFill>
                   <a:srgbClr val="1C1B19"/>
                 </a:solidFill>
                 <a:latin typeface="Source Serif 4"/>
               </a:rPr>
-              <a:t>A meta-analysis of 83 studies (more than 23,000 people) found that being bicultural, holding two cultures rather than choosing one, was linked to better psychological and social adjustment.</a:t>
-            </a:r>
-          </a:p>
-          <a:p>
-            <a:pPr algn="l">
-              <a:spcAft>
-                <a:spcPts val="585"/>
-              </a:spcAft>
-            </a:pPr>
-            <a:r>
-              <a:rPr sz="1050" b="0" i="0">
-                <a:solidFill>
-                  <a:srgbClr val="5D5A54"/>
-                </a:solidFill>
-                <a:latin typeface="Inter Tight"/>
-              </a:rPr>
-              <a:t>Nguyen &amp; Benet-Martínez, Journal of Cross-Cultural Psychology, 2013</a:t>
-            </a:r>
-          </a:p>
-          <a:p>
-            <a:pPr algn="l">
-              <a:spcAft>
-                <a:spcPts val="585"/>
-              </a:spcAft>
-            </a:pPr>
-            <a:r>
-              <a:rPr sz="1300" b="0" i="0">
+              <a:t>Class, a new team, a job</a:t>
+            </a:r>
+          </a:p>
+          <a:p>
+            <a:pPr algn="l">
+              <a:spcAft>
+                <a:spcPts val="855"/>
+              </a:spcAft>
+            </a:pPr>
+            <a:r>
+              <a:rPr sz="1900" b="0" i="0">
                 <a:solidFill>
                   <a:srgbClr val="1C1B19"/>
                 </a:solidFill>
                 <a:latin typeface="Source Serif 4"/>
               </a:rPr>
-              <a:t>Black professionals who code switched were seen as more professional by others, which shows why people switch, and the researchers also describe its costs in effort and authenticity.</a:t>
-            </a:r>
-          </a:p>
-          <a:p>
-            <a:pPr algn="l">
-              <a:spcAft>
-                <a:spcPts val="585"/>
-              </a:spcAft>
-            </a:pPr>
-            <a:r>
-              <a:rPr sz="1050" b="0" i="0">
-                <a:solidFill>
-                  <a:srgbClr val="5D5A54"/>
-                </a:solidFill>
-                <a:latin typeface="Inter Tight"/>
-              </a:rPr>
-              <a:t>McCluney et al., Journal of Experimental Social Psychology, 2021</a:t>
-            </a:r>
-          </a:p>
-        </p:txBody>
-      </p:sp>
-      <p:sp>
-        <p:nvSpPr>
-          <p:cNvPr id="6" name="TextBox 5"/>
-          <p:cNvSpPr txBox="1"/>
-          <p:nvPr/>
-        </p:nvSpPr>
-        <p:spPr>
-          <a:xfrm>
-            <a:off x="6217920" y="1463040"/>
-            <a:ext cx="5394960" cy="4937760"/>
-          </a:xfrm>
-          <a:prstGeom prst="rect">
-            <a:avLst/>
-          </a:prstGeom>
-          <a:noFill/>
-        </p:spPr>
-        <p:txBody>
-          <a:bodyPr wrap="square" anchor="t" lIns="0" rIns="0" tIns="0" bIns="0">
-            <a:spAutoFit/>
-          </a:bodyPr>
-          <a:lstStyle/>
-          <a:p>
-            <a:pPr algn="l">
-              <a:spcAft>
-                <a:spcPts val="585"/>
-              </a:spcAft>
-            </a:pPr>
-            <a:r>
-              <a:rPr sz="1300" b="0" i="0">
-                <a:solidFill>
-                  <a:srgbClr val="1C1B19"/>
-                </a:solidFill>
-                <a:latin typeface="Source Serif 4"/>
-              </a:rPr>
-              <a:t>Among Black college students, being accused of "acting White" was linked to their mental health, and the link depended on how they felt about their own racial identity.</a:t>
-            </a:r>
-          </a:p>
-          <a:p>
-            <a:pPr algn="l">
-              <a:spcAft>
-                <a:spcPts val="585"/>
-              </a:spcAft>
-            </a:pPr>
-            <a:r>
-              <a:rPr sz="1050" b="0" i="0">
-                <a:solidFill>
-                  <a:srgbClr val="5D5A54"/>
-                </a:solidFill>
-                <a:latin typeface="Inter Tight"/>
-              </a:rPr>
-              <a:t>Durkee &amp; Williams, Journal of Black Psychology, 2015</a:t>
-            </a:r>
-          </a:p>
-          <a:p>
-            <a:pPr algn="l">
-              <a:spcAft>
-                <a:spcPts val="585"/>
-              </a:spcAft>
-            </a:pPr>
-            <a:r>
-              <a:rPr sz="1300" b="0" i="0">
-                <a:solidFill>
-                  <a:srgbClr val="1C1B19"/>
-                </a:solidFill>
-                <a:latin typeface="Source Serif 4"/>
-              </a:rPr>
-              <a:t>In a national survey, 61% of employees said they hide or downplay some part of their identity at work, a pattern called covering.</a:t>
-            </a:r>
-          </a:p>
-          <a:p>
-            <a:pPr algn="l">
-              <a:spcAft>
-                <a:spcPts val="585"/>
-              </a:spcAft>
-            </a:pPr>
-            <a:r>
-              <a:rPr sz="1050" b="0" i="0">
-                <a:solidFill>
-                  <a:srgbClr val="5D5A54"/>
-                </a:solidFill>
-                <a:latin typeface="Inter Tight"/>
-              </a:rPr>
-              <a:t>Yoshino &amp; Smith, Deloitte, 2013</a:t>
-            </a:r>
-          </a:p>
-        </p:txBody>
-      </p:sp>
-    </p:spTree>
-  </p:cSld>
-  <p:clrMapOvr>
-    <a:masterClrMapping/>
-  </p:clrMapOvr>
-</p:sld>
-</file>
-
-<file path=ppt/slides/slide5.xml><?xml version="1.0" encoding="utf-8"?>
-<p:sld xmlns:a="http://schemas.openxmlformats.org/drawingml/2006/main" xmlns:p="http://schemas.openxmlformats.org/presentationml/2006/main" xmlns:r="http://schemas.openxmlformats.org/officeDocument/2006/relationships">
-  <p:cSld>
-    <p:bg>
-      <p:bgPr>
-        <a:solidFill>
-          <a:srgbClr val="0B2D5B"/>
-        </a:solidFill>
-        <a:effectLst/>
-      </p:bgPr>
-    </p:bg>
-    <p:spTree>
-      <p:nvGrpSpPr>
-        <p:cNvPr id="1" name=""/>
-        <p:cNvGrpSpPr/>
-        <p:nvPr/>
-      </p:nvGrpSpPr>
-      <p:grpSpPr/>
-      <p:sp>
-        <p:nvSpPr>
-          <p:cNvPr id="2" name="Rectangle 1"/>
+              <a:t>Can wear you out</a:t>
+            </a:r>
+          </a:p>
+        </p:txBody>
+      </p:sp>
+      <p:sp>
+        <p:nvSpPr>
+          <p:cNvPr id="9" name="Rectangle 8"/>
           <p:cNvSpPr/>
           <p:nvPr/>
         </p:nvSpPr>
         <p:spPr>
           <a:xfrm>
-            <a:off x="548640" y="502920"/>
-            <a:ext cx="457200" cy="54864"/>
+            <a:off x="6309360" y="2103120"/>
+            <a:ext cx="5120640" cy="3931920"/>
           </a:xfrm>
           <a:prstGeom prst="rect">
             <a:avLst/>
           </a:prstGeom>
           <a:solidFill>
-            <a:srgbClr val="F47B20"/>
+            <a:srgbClr val="FFFFFF"/>
           </a:solidFill>
-          <a:ln>
-            <a:noFill/>
+          <a:ln w="15875">
+            <a:solidFill>
+              <a:srgbClr val="D8D2C6"/>
+            </a:solidFill>
           </a:ln>
           <a:effectLst/>
         </p:spPr>
@@ -6280,14 +6752,14 @@
       </p:sp>
       <p:sp>
         <p:nvSpPr>
-          <p:cNvPr id="3" name="TextBox 2"/>
+          <p:cNvPr id="10" name="TextBox 9"/>
           <p:cNvSpPr txBox="1"/>
           <p:nvPr/>
         </p:nvSpPr>
         <p:spPr>
           <a:xfrm>
-            <a:off x="1143000" y="393192"/>
-            <a:ext cx="8229600" cy="274320"/>
+            <a:off x="6583680" y="2286000"/>
+            <a:ext cx="4572000" cy="457200"/>
           </a:xfrm>
           <a:prstGeom prst="rect">
             <a:avLst/>
@@ -6302,31 +6774,31 @@
           <a:p>
             <a:pPr algn="l">
               <a:spcAft>
-                <a:spcPts val="540"/>
-              </a:spcAft>
-            </a:pPr>
-            <a:r>
-              <a:rPr sz="1200" b="1" i="0">
-                <a:solidFill>
-                  <a:srgbClr val="5D5A54"/>
+                <a:spcPts val="585"/>
+              </a:spcAft>
+            </a:pPr>
+            <a:r>
+              <a:rPr sz="1300" b="1" i="0">
+                <a:solidFill>
+                  <a:srgbClr val="0B2D5B"/>
                 </a:solidFill>
                 <a:latin typeface="Inter Tight"/>
               </a:rPr>
-              <a:t>CODE SWITCHING</a:t>
-            </a:r>
-          </a:p>
-        </p:txBody>
-      </p:sp>
-      <p:sp>
-        <p:nvSpPr>
-          <p:cNvPr id="4" name="TextBox 3"/>
+              <a:t>HOME GAMES</a:t>
+            </a:r>
+          </a:p>
+        </p:txBody>
+      </p:sp>
+      <p:sp>
+        <p:nvSpPr>
+          <p:cNvPr id="11" name="TextBox 10"/>
           <p:cNvSpPr txBox="1"/>
           <p:nvPr/>
         </p:nvSpPr>
         <p:spPr>
           <a:xfrm>
-            <a:off x="8229600" y="6400800"/>
-            <a:ext cx="3410712" cy="274320"/>
+            <a:off x="6583680" y="2788920"/>
+            <a:ext cx="4572000" cy="3108960"/>
           </a:xfrm>
           <a:prstGeom prst="rect">
             <a:avLst/>
@@ -6339,136 +6811,67 @@
           </a:bodyPr>
           <a:lstStyle/>
           <a:p>
-            <a:pPr algn="r">
-              <a:spcAft>
-                <a:spcPts val="450"/>
-              </a:spcAft>
-            </a:pPr>
-            <a:r>
-              <a:rPr sz="1000" b="0" i="0">
-                <a:solidFill>
-                  <a:srgbClr val="5D5A54"/>
-                </a:solidFill>
-                <a:latin typeface="Inter Tight"/>
-              </a:rPr>
-              <a:t>Beaver Counseling</a:t>
-            </a:r>
-          </a:p>
-        </p:txBody>
-      </p:sp>
-      <p:sp>
-        <p:nvSpPr>
-          <p:cNvPr id="5" name="TextBox 4"/>
-          <p:cNvSpPr txBox="1"/>
-          <p:nvPr/>
-        </p:nvSpPr>
-        <p:spPr>
-          <a:xfrm>
-            <a:off x="822960" y="2011680"/>
-            <a:ext cx="10515600" cy="1463040"/>
-          </a:xfrm>
-          <a:prstGeom prst="rect">
-            <a:avLst/>
-          </a:prstGeom>
-          <a:noFill/>
-        </p:spPr>
-        <p:txBody>
-          <a:bodyPr wrap="square" anchor="b" lIns="0" rIns="0" tIns="0" bIns="0">
-            <a:spAutoFit/>
-          </a:bodyPr>
-          <a:lstStyle/>
-          <a:p>
-            <a:pPr algn="l">
-              <a:spcAft>
-                <a:spcPts val="2700"/>
-              </a:spcAft>
-            </a:pPr>
-            <a:r>
-              <a:rPr sz="6000" b="1" i="0">
-                <a:solidFill>
-                  <a:srgbClr val="FFFFFF"/>
-                </a:solidFill>
-                <a:latin typeface="Source Serif 4"/>
-              </a:rPr>
-              <a:t>Code Switching</a:t>
-            </a:r>
-          </a:p>
-        </p:txBody>
-      </p:sp>
-      <p:sp>
-        <p:nvSpPr>
-          <p:cNvPr id="6" name="TextBox 5"/>
-          <p:cNvSpPr txBox="1"/>
-          <p:nvPr/>
-        </p:nvSpPr>
-        <p:spPr>
-          <a:xfrm>
-            <a:off x="822960" y="3611880"/>
-            <a:ext cx="10515600" cy="914400"/>
-          </a:xfrm>
-          <a:prstGeom prst="rect">
-            <a:avLst/>
-          </a:prstGeom>
-          <a:noFill/>
-        </p:spPr>
-        <p:txBody>
-          <a:bodyPr wrap="square" anchor="t" lIns="0" rIns="0" tIns="0" bIns="0">
-            <a:spAutoFit/>
-          </a:bodyPr>
-          <a:lstStyle/>
-          <a:p>
-            <a:pPr algn="l">
-              <a:spcAft>
-                <a:spcPts val="1080"/>
-              </a:spcAft>
-            </a:pPr>
-            <a:r>
-              <a:rPr sz="2400" b="0" i="1">
-                <a:solidFill>
-                  <a:srgbClr val="E8E4DA"/>
-                </a:solidFill>
-                <a:latin typeface="Source Serif 4"/>
-              </a:rPr>
-              <a:t>Being a little different in every room, and finding the rooms where you don't have to be.</a:t>
-            </a:r>
-          </a:p>
-        </p:txBody>
-      </p:sp>
-      <p:sp>
-        <p:nvSpPr>
-          <p:cNvPr id="7" name="TextBox 6"/>
-          <p:cNvSpPr txBox="1"/>
-          <p:nvPr/>
-        </p:nvSpPr>
-        <p:spPr>
-          <a:xfrm>
-            <a:off x="822960" y="6035040"/>
-            <a:ext cx="7315200" cy="365760"/>
-          </a:xfrm>
-          <a:prstGeom prst="rect">
-            <a:avLst/>
-          </a:prstGeom>
-          <a:noFill/>
-        </p:spPr>
-        <p:txBody>
-          <a:bodyPr wrap="square" anchor="t" lIns="0" rIns="0" tIns="0" bIns="0">
-            <a:spAutoFit/>
-          </a:bodyPr>
-          <a:lstStyle/>
-          <a:p>
-            <a:pPr algn="l">
-              <a:spcAft>
-                <a:spcPts val="585"/>
-              </a:spcAft>
-            </a:pPr>
-            <a:r>
-              <a:rPr sz="1300" b="0" i="0">
-                <a:solidFill>
-                  <a:srgbClr val="E8E4DA"/>
-                </a:solidFill>
-                <a:latin typeface="Inter Tight"/>
-              </a:rPr>
-              <a:t>Beaver Upper School · Counseling</a:t>
+            <a:pPr algn="l">
+              <a:spcAft>
+                <a:spcPts val="855"/>
+              </a:spcAft>
+            </a:pPr>
+            <a:r>
+              <a:rPr sz="1900" b="0" i="0">
+                <a:solidFill>
+                  <a:srgbClr val="1C1B19"/>
+                </a:solidFill>
+                <a:latin typeface="Source Serif 4"/>
+              </a:rPr>
+              <a:t>Places you get to be all the way you</a:t>
+            </a:r>
+          </a:p>
+          <a:p>
+            <a:pPr algn="l">
+              <a:spcAft>
+                <a:spcPts val="855"/>
+              </a:spcAft>
+            </a:pPr>
+            <a:r>
+              <a:rPr sz="1900" b="0" i="0">
+                <a:solidFill>
+                  <a:srgbClr val="1C1B19"/>
+                </a:solidFill>
+                <a:latin typeface="Source Serif 4"/>
+              </a:rPr>
+              <a:t>Friends who get it</a:t>
+            </a:r>
+          </a:p>
+          <a:p>
+            <a:pPr algn="l">
+              <a:spcAft>
+                <a:spcPts val="855"/>
+              </a:spcAft>
+            </a:pPr>
+            <a:r>
+              <a:rPr sz="1900" b="0" i="0">
+                <a:solidFill>
+                  <a:srgbClr val="1C1B19"/>
+                </a:solidFill>
+                <a:latin typeface="Source Serif 4"/>
+              </a:rPr>
+              <a:t>Music, food, a language that's yours</a:t>
+            </a:r>
+          </a:p>
+          <a:p>
+            <a:pPr algn="l">
+              <a:spcAft>
+                <a:spcPts val="855"/>
+              </a:spcAft>
+            </a:pPr>
+            <a:r>
+              <a:rPr sz="1900" b="0" i="0">
+                <a:solidFill>
+                  <a:srgbClr val="1C1B19"/>
+                </a:solidFill>
+                <a:latin typeface="Source Serif 4"/>
+              </a:rPr>
+              <a:t>Where you recharge</a:t>
             </a:r>
           </a:p>
         </p:txBody>
@@ -6577,7 +6980,7 @@
                 </a:solidFill>
                 <a:latin typeface="Inter Tight"/>
               </a:rPr>
-              <a:t>THREE ROOMS</a:t>
+              <a:t>WHAT THE RESEARCH SAYS</a:t>
             </a:r>
           </a:p>
         </p:txBody>
@@ -6623,14 +7026,179 @@
       </p:sp>
       <p:sp>
         <p:nvSpPr>
-          <p:cNvPr id="5" name="Rectangle 4"/>
+          <p:cNvPr id="5" name="TextBox 4"/>
+          <p:cNvSpPr txBox="1"/>
+          <p:nvPr/>
+        </p:nvSpPr>
+        <p:spPr>
+          <a:xfrm>
+            <a:off x="822960" y="914400"/>
+            <a:ext cx="10515600" cy="365760"/>
+          </a:xfrm>
+          <a:prstGeom prst="rect">
+            <a:avLst/>
+          </a:prstGeom>
+          <a:noFill/>
+        </p:spPr>
+        <p:txBody>
+          <a:bodyPr wrap="square" anchor="t" lIns="0" rIns="0" tIns="0" bIns="0">
+            <a:spAutoFit/>
+          </a:bodyPr>
+          <a:lstStyle/>
+          <a:p>
+            <a:pPr algn="l">
+              <a:spcAft>
+                <a:spcPts val="630"/>
+              </a:spcAft>
+            </a:pPr>
+            <a:r>
+              <a:rPr sz="1400" b="1" i="0">
+                <a:solidFill>
+                  <a:srgbClr val="0B2D5B"/>
+                </a:solidFill>
+                <a:latin typeface="Inter Tight"/>
+              </a:rPr>
+              <a:t>Nguyen &amp; Benet-Martínez, 2013  ·  McCluney et al., 2021  ·  Durkee &amp; Williams, 2015</a:t>
+            </a:r>
+          </a:p>
+        </p:txBody>
+      </p:sp>
+      <p:sp>
+        <p:nvSpPr>
+          <p:cNvPr id="6" name="TextBox 5"/>
+          <p:cNvSpPr txBox="1"/>
+          <p:nvPr/>
+        </p:nvSpPr>
+        <p:spPr>
+          <a:xfrm>
+            <a:off x="822960" y="1325880"/>
+            <a:ext cx="10515600" cy="1097280"/>
+          </a:xfrm>
+          <a:prstGeom prst="rect">
+            <a:avLst/>
+          </a:prstGeom>
+          <a:noFill/>
+        </p:spPr>
+        <p:txBody>
+          <a:bodyPr wrap="square" anchor="t" lIns="0" rIns="0" tIns="0" bIns="0">
+            <a:spAutoFit/>
+          </a:bodyPr>
+          <a:lstStyle/>
+          <a:p>
+            <a:pPr algn="l">
+              <a:spcAft>
+                <a:spcPts val="1440"/>
+              </a:spcAft>
+            </a:pPr>
+            <a:r>
+              <a:rPr sz="3200" b="1" i="0">
+                <a:solidFill>
+                  <a:srgbClr val="1C1B19"/>
+                </a:solidFill>
+                <a:latin typeface="Source Serif 4"/>
+              </a:rPr>
+              <a:t>Switching helps. It can also cost.</a:t>
+            </a:r>
+          </a:p>
+        </p:txBody>
+      </p:sp>
+      <p:sp>
+        <p:nvSpPr>
+          <p:cNvPr id="7" name="TextBox 6"/>
+          <p:cNvSpPr txBox="1"/>
+          <p:nvPr/>
+        </p:nvSpPr>
+        <p:spPr>
+          <a:xfrm>
+            <a:off x="822960" y="2514600"/>
+            <a:ext cx="10515600" cy="2194560"/>
+          </a:xfrm>
+          <a:prstGeom prst="rect">
+            <a:avLst/>
+          </a:prstGeom>
+          <a:noFill/>
+        </p:spPr>
+        <p:txBody>
+          <a:bodyPr wrap="square" anchor="t" lIns="0" rIns="0" tIns="0" bIns="0">
+            <a:spAutoFit/>
+          </a:bodyPr>
+          <a:lstStyle/>
+          <a:p>
+            <a:pPr algn="l">
+              <a:spcAft>
+                <a:spcPts val="855"/>
+              </a:spcAft>
+            </a:pPr>
+            <a:r>
+              <a:rPr sz="1900" b="0" i="0">
+                <a:solidFill>
+                  <a:srgbClr val="1C1B19"/>
+                </a:solidFill>
+                <a:latin typeface="Source Serif 4"/>
+              </a:rPr>
+              <a:t>•  Switching can help how others see you.</a:t>
+            </a:r>
+          </a:p>
+          <a:p>
+            <a:pPr algn="l">
+              <a:spcAft>
+                <a:spcPts val="855"/>
+              </a:spcAft>
+            </a:pPr>
+            <a:r>
+              <a:rPr sz="1900" b="0" i="0">
+                <a:solidFill>
+                  <a:srgbClr val="1C1B19"/>
+                </a:solidFill>
+                <a:latin typeface="Source Serif 4"/>
+              </a:rPr>
+              <a:t>•  Watching yourself all day takes energy.</a:t>
+            </a:r>
+          </a:p>
+          <a:p>
+            <a:pPr algn="l">
+              <a:spcAft>
+                <a:spcPts val="855"/>
+              </a:spcAft>
+            </a:pPr>
+            <a:r>
+              <a:rPr sz="1900" b="0" i="0">
+                <a:solidFill>
+                  <a:srgbClr val="1C1B19"/>
+                </a:solidFill>
+                <a:latin typeface="Source Serif 4"/>
+              </a:rPr>
+              <a:t>•  Being called "fake" or told "you've changed" adds stress.</a:t>
+            </a:r>
+          </a:p>
+          <a:p>
+            <a:pPr algn="l">
+              <a:spcAft>
+                <a:spcPts val="855"/>
+              </a:spcAft>
+            </a:pPr>
+            <a:r>
+              <a:rPr sz="1900" b="0" i="0">
+                <a:solidFill>
+                  <a:srgbClr val="1C1B19"/>
+                </a:solidFill>
+                <a:latin typeface="Source Serif 4"/>
+              </a:rPr>
+              <a:t>•  People who hold two cultures together tend to do better.</a:t>
+            </a:r>
+          </a:p>
+        </p:txBody>
+      </p:sp>
+      <p:sp>
+        <p:nvSpPr>
+          <p:cNvPr id="8" name="Rectangle 7"/>
           <p:cNvSpPr/>
           <p:nvPr/>
         </p:nvSpPr>
         <p:spPr>
           <a:xfrm>
-            <a:off x="822960" y="1371600"/>
-            <a:ext cx="73152" cy="3566160"/>
+            <a:off x="822960" y="4892040"/>
+            <a:ext cx="73152" cy="1097280"/>
           </a:xfrm>
           <a:prstGeom prst="rect">
             <a:avLst/>
@@ -6667,14 +7235,14 @@
       </p:sp>
       <p:sp>
         <p:nvSpPr>
-          <p:cNvPr id="6" name="TextBox 5"/>
+          <p:cNvPr id="9" name="TextBox 8"/>
           <p:cNvSpPr txBox="1"/>
           <p:nvPr/>
         </p:nvSpPr>
         <p:spPr>
           <a:xfrm>
-            <a:off x="1188720" y="1371600"/>
-            <a:ext cx="10058400" cy="3566160"/>
+            <a:off x="1097280" y="4892040"/>
+            <a:ext cx="10241280" cy="1188720"/>
           </a:xfrm>
           <a:prstGeom prst="rect">
             <a:avLst/>
@@ -6682,45 +7250,6 @@
           <a:noFill/>
         </p:spPr>
         <p:txBody>
-          <a:bodyPr wrap="square" anchor="ctr" lIns="0" rIns="0" tIns="0" bIns="0">
-            <a:spAutoFit/>
-          </a:bodyPr>
-          <a:lstStyle/>
-          <a:p>
-            <a:pPr algn="l">
-              <a:spcAft>
-                <a:spcPts val="1800"/>
-              </a:spcAft>
-            </a:pPr>
-            <a:r>
-              <a:rPr sz="4000" b="0" i="1">
-                <a:solidFill>
-                  <a:srgbClr val="1C1B19"/>
-                </a:solidFill>
-                <a:latin typeface="Source Serif 4"/>
-              </a:rPr>
-              <a:t>How do you talk with your friends, with a teacher, and at home?</a:t>
-            </a:r>
-          </a:p>
-        </p:txBody>
-      </p:sp>
-      <p:sp>
-        <p:nvSpPr>
-          <p:cNvPr id="7" name="TextBox 6"/>
-          <p:cNvSpPr txBox="1"/>
-          <p:nvPr/>
-        </p:nvSpPr>
-        <p:spPr>
-          <a:xfrm>
-            <a:off x="1188720" y="5120640"/>
-            <a:ext cx="10058400" cy="914400"/>
-          </a:xfrm>
-          <a:prstGeom prst="rect">
-            <a:avLst/>
-          </a:prstGeom>
-          <a:noFill/>
-        </p:spPr>
-        <p:txBody>
           <a:bodyPr wrap="square" anchor="t" lIns="0" rIns="0" tIns="0" bIns="0">
             <a:spAutoFit/>
           </a:bodyPr>
@@ -6728,17 +7257,33 @@
           <a:p>
             <a:pPr algn="l">
               <a:spcAft>
-                <a:spcPts val="810"/>
-              </a:spcAft>
-            </a:pPr>
-            <a:r>
-              <a:rPr sz="1800" b="0" i="0">
-                <a:solidFill>
-                  <a:srgbClr val="5D5A54"/>
+                <a:spcPts val="855"/>
+              </a:spcAft>
+            </a:pPr>
+            <a:r>
+              <a:rPr sz="1200" b="1" i="0">
+                <a:solidFill>
+                  <a:srgbClr val="F47B20"/>
                 </a:solidFill>
                 <a:latin typeface="Inter Tight"/>
               </a:rPr>
-              <a:t>Think of one word or phrase you'd only use in one of them. Keep it or share it.</a:t>
+              <a:t>IN CLASS</a:t>
+            </a:r>
+          </a:p>
+          <a:p>
+            <a:pPr algn="l">
+              <a:spcAft>
+                <a:spcPts val="855"/>
+              </a:spcAft>
+            </a:pPr>
+            <a:r>
+              <a:rPr sz="1900" b="0" i="0">
+                <a:solidFill>
+                  <a:srgbClr val="1C1B19"/>
+                </a:solidFill>
+                <a:latin typeface="Source Serif 4"/>
+              </a:rPr>
+              <a:t>Both versions of you can be real. You can choose where each one shows up.</a:t>
             </a:r>
           </a:p>
         </p:txBody>
@@ -6847,7 +7392,7 @@
                 </a:solidFill>
                 <a:latin typeface="Inter Tight"/>
               </a:rPr>
-              <a:t>WHAT PEOPLE SWITCH</a:t>
+              <a:t>BEFORE YOU GO</a:t>
             </a:r>
           </a:p>
         </p:txBody>
@@ -6899,8 +7444,8 @@
         </p:nvSpPr>
         <p:spPr>
           <a:xfrm>
-            <a:off x="822960" y="1005840"/>
-            <a:ext cx="10515600" cy="1097280"/>
+            <a:off x="822960" y="1188720"/>
+            <a:ext cx="10515600" cy="914400"/>
           </a:xfrm>
           <a:prstGeom prst="rect">
             <a:avLst/>
@@ -6925,7 +7470,7 @@
                 </a:solidFill>
                 <a:latin typeface="Source Serif 4"/>
               </a:rPr>
-              <a:t>Which of these do you change, depending on the room?</a:t>
+              <a:t>Name one home game.</a:t>
             </a:r>
           </a:p>
         </p:txBody>
@@ -6938,8 +7483,8 @@
         </p:nvSpPr>
         <p:spPr>
           <a:xfrm>
-            <a:off x="822960" y="2057400"/>
-            <a:ext cx="548640" cy="670560"/>
+            <a:off x="822960" y="2286000"/>
+            <a:ext cx="10515600" cy="1463040"/>
           </a:xfrm>
           <a:prstGeom prst="rect">
             <a:avLst/>
@@ -6954,495 +7499,42 @@
           <a:p>
             <a:pPr algn="l">
               <a:spcAft>
-                <a:spcPts val="1170"/>
-              </a:spcAft>
-            </a:pPr>
-            <a:r>
-              <a:rPr sz="2600" b="1" i="0">
-                <a:solidFill>
-                  <a:srgbClr val="F47B20"/>
-                </a:solidFill>
-                <a:latin typeface="Source Serif 4"/>
-              </a:rPr>
-              <a:t>•</a:t>
-            </a:r>
-          </a:p>
-        </p:txBody>
-      </p:sp>
-      <p:sp>
-        <p:nvSpPr>
-          <p:cNvPr id="7" name="TextBox 6"/>
-          <p:cNvSpPr txBox="1"/>
-          <p:nvPr/>
-        </p:nvSpPr>
-        <p:spPr>
-          <a:xfrm>
-            <a:off x="1463040" y="2093976"/>
-            <a:ext cx="9875520" cy="670560"/>
-          </a:xfrm>
-          <a:prstGeom prst="rect">
-            <a:avLst/>
-          </a:prstGeom>
-          <a:noFill/>
-        </p:spPr>
-        <p:txBody>
-          <a:bodyPr wrap="square" anchor="t" lIns="0" rIns="0" tIns="0" bIns="0">
-            <a:spAutoFit/>
-          </a:bodyPr>
-          <a:lstStyle/>
-          <a:p>
-            <a:pPr algn="l">
-              <a:spcAft>
-                <a:spcPts val="945"/>
-              </a:spcAft>
-            </a:pPr>
-            <a:r>
-              <a:rPr sz="2100" b="1" i="0">
+                <a:spcPts val="1080"/>
+              </a:spcAft>
+            </a:pPr>
+            <a:r>
+              <a:rPr sz="2400" b="0" i="0">
                 <a:solidFill>
                   <a:srgbClr val="1C1B19"/>
                 </a:solidFill>
                 <a:latin typeface="Source Serif 4"/>
               </a:rPr>
-              <a:t>How you talk, your accent, or which language</a:t>
-            </a:r>
-          </a:p>
-        </p:txBody>
-      </p:sp>
-      <p:sp>
-        <p:nvSpPr>
-          <p:cNvPr id="8" name="TextBox 7"/>
-          <p:cNvSpPr txBox="1"/>
-          <p:nvPr/>
-        </p:nvSpPr>
-        <p:spPr>
-          <a:xfrm>
-            <a:off x="822960" y="2727960"/>
-            <a:ext cx="548640" cy="670560"/>
-          </a:xfrm>
-          <a:prstGeom prst="rect">
-            <a:avLst/>
-          </a:prstGeom>
-          <a:noFill/>
-        </p:spPr>
-        <p:txBody>
-          <a:bodyPr wrap="square" anchor="t" lIns="0" rIns="0" tIns="0" bIns="0">
-            <a:spAutoFit/>
-          </a:bodyPr>
-          <a:lstStyle/>
-          <a:p>
-            <a:pPr algn="l">
-              <a:spcAft>
-                <a:spcPts val="1170"/>
-              </a:spcAft>
-            </a:pPr>
-            <a:r>
-              <a:rPr sz="2600" b="1" i="0">
-                <a:solidFill>
-                  <a:srgbClr val="F47B20"/>
-                </a:solidFill>
-                <a:latin typeface="Source Serif 4"/>
-              </a:rPr>
-              <a:t>•</a:t>
-            </a:r>
-          </a:p>
-        </p:txBody>
-      </p:sp>
-      <p:sp>
-        <p:nvSpPr>
-          <p:cNvPr id="9" name="TextBox 8"/>
-          <p:cNvSpPr txBox="1"/>
-          <p:nvPr/>
-        </p:nvSpPr>
-        <p:spPr>
-          <a:xfrm>
-            <a:off x="1463040" y="2764536"/>
-            <a:ext cx="9875520" cy="670560"/>
-          </a:xfrm>
-          <a:prstGeom prst="rect">
-            <a:avLst/>
-          </a:prstGeom>
-          <a:noFill/>
-        </p:spPr>
-        <p:txBody>
-          <a:bodyPr wrap="square" anchor="t" lIns="0" rIns="0" tIns="0" bIns="0">
-            <a:spAutoFit/>
-          </a:bodyPr>
-          <a:lstStyle/>
-          <a:p>
-            <a:pPr algn="l">
-              <a:spcAft>
-                <a:spcPts val="945"/>
-              </a:spcAft>
-            </a:pPr>
-            <a:r>
-              <a:rPr sz="2100" b="1" i="0">
-                <a:solidFill>
-                  <a:srgbClr val="1C1B19"/>
-                </a:solidFill>
-                <a:latin typeface="Source Serif 4"/>
-              </a:rPr>
-              <a:t>Your clothes, your hair, your name</a:t>
-            </a:r>
-          </a:p>
-        </p:txBody>
-      </p:sp>
-      <p:sp>
-        <p:nvSpPr>
-          <p:cNvPr id="10" name="TextBox 9"/>
-          <p:cNvSpPr txBox="1"/>
-          <p:nvPr/>
-        </p:nvSpPr>
-        <p:spPr>
-          <a:xfrm>
-            <a:off x="822960" y="3398520"/>
-            <a:ext cx="548640" cy="670560"/>
-          </a:xfrm>
-          <a:prstGeom prst="rect">
-            <a:avLst/>
-          </a:prstGeom>
-          <a:noFill/>
-        </p:spPr>
-        <p:txBody>
-          <a:bodyPr wrap="square" anchor="t" lIns="0" rIns="0" tIns="0" bIns="0">
-            <a:spAutoFit/>
-          </a:bodyPr>
-          <a:lstStyle/>
-          <a:p>
-            <a:pPr algn="l">
-              <a:spcAft>
-                <a:spcPts val="1170"/>
-              </a:spcAft>
-            </a:pPr>
-            <a:r>
-              <a:rPr sz="2600" b="1" i="0">
-                <a:solidFill>
-                  <a:srgbClr val="F47B20"/>
-                </a:solidFill>
-                <a:latin typeface="Source Serif 4"/>
-              </a:rPr>
-              <a:t>•</a:t>
-            </a:r>
-          </a:p>
-        </p:txBody>
-      </p:sp>
-      <p:sp>
-        <p:nvSpPr>
-          <p:cNvPr id="11" name="TextBox 10"/>
-          <p:cNvSpPr txBox="1"/>
-          <p:nvPr/>
-        </p:nvSpPr>
-        <p:spPr>
-          <a:xfrm>
-            <a:off x="1463040" y="3435096"/>
-            <a:ext cx="9875520" cy="670560"/>
-          </a:xfrm>
-          <a:prstGeom prst="rect">
-            <a:avLst/>
-          </a:prstGeom>
-          <a:noFill/>
-        </p:spPr>
-        <p:txBody>
-          <a:bodyPr wrap="square" anchor="t" lIns="0" rIns="0" tIns="0" bIns="0">
-            <a:spAutoFit/>
-          </a:bodyPr>
-          <a:lstStyle/>
-          <a:p>
-            <a:pPr algn="l">
-              <a:spcAft>
-                <a:spcPts val="945"/>
-              </a:spcAft>
-            </a:pPr>
-            <a:r>
-              <a:rPr sz="2100" b="1" i="0">
-                <a:solidFill>
-                  <a:srgbClr val="1C1B19"/>
-                </a:solidFill>
-                <a:latin typeface="Source Serif 4"/>
-              </a:rPr>
-              <a:t>How loud you are, what music you say you like</a:t>
-            </a:r>
-          </a:p>
-        </p:txBody>
-      </p:sp>
-      <p:sp>
-        <p:nvSpPr>
-          <p:cNvPr id="12" name="TextBox 11"/>
-          <p:cNvSpPr txBox="1"/>
-          <p:nvPr/>
-        </p:nvSpPr>
-        <p:spPr>
-          <a:xfrm>
-            <a:off x="822960" y="4069080"/>
-            <a:ext cx="548640" cy="670560"/>
-          </a:xfrm>
-          <a:prstGeom prst="rect">
-            <a:avLst/>
-          </a:prstGeom>
-          <a:noFill/>
-        </p:spPr>
-        <p:txBody>
-          <a:bodyPr wrap="square" anchor="t" lIns="0" rIns="0" tIns="0" bIns="0">
-            <a:spAutoFit/>
-          </a:bodyPr>
-          <a:lstStyle/>
-          <a:p>
-            <a:pPr algn="l">
-              <a:spcAft>
-                <a:spcPts val="1170"/>
-              </a:spcAft>
-            </a:pPr>
-            <a:r>
-              <a:rPr sz="2600" b="1" i="0">
-                <a:solidFill>
-                  <a:srgbClr val="F47B20"/>
-                </a:solidFill>
-                <a:latin typeface="Source Serif 4"/>
-              </a:rPr>
-              <a:t>•</a:t>
-            </a:r>
-          </a:p>
-        </p:txBody>
-      </p:sp>
-      <p:sp>
-        <p:nvSpPr>
-          <p:cNvPr id="13" name="TextBox 12"/>
-          <p:cNvSpPr txBox="1"/>
-          <p:nvPr/>
-        </p:nvSpPr>
-        <p:spPr>
-          <a:xfrm>
-            <a:off x="1463040" y="4105656"/>
-            <a:ext cx="9875520" cy="670560"/>
-          </a:xfrm>
-          <a:prstGeom prst="rect">
-            <a:avLst/>
-          </a:prstGeom>
-          <a:noFill/>
-        </p:spPr>
-        <p:txBody>
-          <a:bodyPr wrap="square" anchor="t" lIns="0" rIns="0" tIns="0" bIns="0">
-            <a:spAutoFit/>
-          </a:bodyPr>
-          <a:lstStyle/>
-          <a:p>
-            <a:pPr algn="l">
-              <a:spcAft>
-                <a:spcPts val="945"/>
-              </a:spcAft>
-            </a:pPr>
-            <a:r>
-              <a:rPr sz="2100" b="1" i="0">
-                <a:solidFill>
-                  <a:srgbClr val="1C1B19"/>
-                </a:solidFill>
-                <a:latin typeface="Source Serif 4"/>
-              </a:rPr>
-              <a:t>Your faith, how you show your gender, who you like</a:t>
-            </a:r>
-          </a:p>
-        </p:txBody>
-      </p:sp>
-      <p:sp>
-        <p:nvSpPr>
-          <p:cNvPr id="14" name="TextBox 13"/>
-          <p:cNvSpPr txBox="1"/>
-          <p:nvPr/>
-        </p:nvSpPr>
-        <p:spPr>
-          <a:xfrm>
-            <a:off x="822960" y="4739640"/>
-            <a:ext cx="548640" cy="670560"/>
-          </a:xfrm>
-          <a:prstGeom prst="rect">
-            <a:avLst/>
-          </a:prstGeom>
-          <a:noFill/>
-        </p:spPr>
-        <p:txBody>
-          <a:bodyPr wrap="square" anchor="t" lIns="0" rIns="0" tIns="0" bIns="0">
-            <a:spAutoFit/>
-          </a:bodyPr>
-          <a:lstStyle/>
-          <a:p>
-            <a:pPr algn="l">
-              <a:spcAft>
-                <a:spcPts val="1170"/>
-              </a:spcAft>
-            </a:pPr>
-            <a:r>
-              <a:rPr sz="2600" b="1" i="0">
-                <a:solidFill>
-                  <a:srgbClr val="F47B20"/>
-                </a:solidFill>
-                <a:latin typeface="Source Serif 4"/>
-              </a:rPr>
-              <a:t>•</a:t>
-            </a:r>
-          </a:p>
-        </p:txBody>
-      </p:sp>
-      <p:sp>
-        <p:nvSpPr>
-          <p:cNvPr id="15" name="TextBox 14"/>
-          <p:cNvSpPr txBox="1"/>
-          <p:nvPr/>
-        </p:nvSpPr>
-        <p:spPr>
-          <a:xfrm>
-            <a:off x="1463040" y="4776216"/>
-            <a:ext cx="9875520" cy="670560"/>
-          </a:xfrm>
-          <a:prstGeom prst="rect">
-            <a:avLst/>
-          </a:prstGeom>
-          <a:noFill/>
-        </p:spPr>
-        <p:txBody>
-          <a:bodyPr wrap="square" anchor="t" lIns="0" rIns="0" tIns="0" bIns="0">
-            <a:spAutoFit/>
-          </a:bodyPr>
-          <a:lstStyle/>
-          <a:p>
-            <a:pPr algn="l">
-              <a:spcAft>
-                <a:spcPts val="945"/>
-              </a:spcAft>
-            </a:pPr>
-            <a:r>
-              <a:rPr sz="2100" b="1" i="0">
-                <a:solidFill>
-                  <a:srgbClr val="1C1B19"/>
-                </a:solidFill>
-                <a:latin typeface="Source Serif 4"/>
-              </a:rPr>
-              <a:t>Hiding ADHD, autism or a disability</a:t>
-            </a:r>
-          </a:p>
-        </p:txBody>
-      </p:sp>
-      <p:sp>
-        <p:nvSpPr>
-          <p:cNvPr id="16" name="TextBox 15"/>
-          <p:cNvSpPr txBox="1"/>
-          <p:nvPr/>
-        </p:nvSpPr>
-        <p:spPr>
-          <a:xfrm>
-            <a:off x="822960" y="5410200"/>
-            <a:ext cx="548640" cy="670560"/>
-          </a:xfrm>
-          <a:prstGeom prst="rect">
-            <a:avLst/>
-          </a:prstGeom>
-          <a:noFill/>
-        </p:spPr>
-        <p:txBody>
-          <a:bodyPr wrap="square" anchor="t" lIns="0" rIns="0" tIns="0" bIns="0">
-            <a:spAutoFit/>
-          </a:bodyPr>
-          <a:lstStyle/>
-          <a:p>
-            <a:pPr algn="l">
-              <a:spcAft>
-                <a:spcPts val="1170"/>
-              </a:spcAft>
-            </a:pPr>
-            <a:r>
-              <a:rPr sz="2600" b="1" i="0">
-                <a:solidFill>
-                  <a:srgbClr val="F47B20"/>
-                </a:solidFill>
-                <a:latin typeface="Source Serif 4"/>
-              </a:rPr>
-              <a:t>•</a:t>
-            </a:r>
-          </a:p>
-        </p:txBody>
-      </p:sp>
-      <p:sp>
-        <p:nvSpPr>
-          <p:cNvPr id="17" name="TextBox 16"/>
-          <p:cNvSpPr txBox="1"/>
-          <p:nvPr/>
-        </p:nvSpPr>
-        <p:spPr>
-          <a:xfrm>
-            <a:off x="1463040" y="5446776"/>
-            <a:ext cx="9875520" cy="670560"/>
-          </a:xfrm>
-          <a:prstGeom prst="rect">
-            <a:avLst/>
-          </a:prstGeom>
-          <a:noFill/>
-        </p:spPr>
-        <p:txBody>
-          <a:bodyPr wrap="square" anchor="t" lIns="0" rIns="0" tIns="0" bIns="0">
-            <a:spAutoFit/>
-          </a:bodyPr>
-          <a:lstStyle/>
-          <a:p>
-            <a:pPr algn="l">
-              <a:spcAft>
-                <a:spcPts val="945"/>
-              </a:spcAft>
-            </a:pPr>
-            <a:r>
-              <a:rPr sz="2100" b="1" i="0">
-                <a:solidFill>
-                  <a:srgbClr val="1C1B19"/>
-                </a:solidFill>
-                <a:latin typeface="Source Serif 4"/>
-              </a:rPr>
-              <a:t>Money: break plans, phones, clothes, where you live, rides, jobs</a:t>
-            </a:r>
-          </a:p>
-        </p:txBody>
-      </p:sp>
-    </p:spTree>
-  </p:cSld>
-  <p:clrMapOvr>
-    <a:masterClrMapping/>
-  </p:clrMapOvr>
-</p:sld>
-</file>
-
-<file path=ppt/slides/slide8.xml><?xml version="1.0" encoding="utf-8"?>
-<p:sld xmlns:a="http://schemas.openxmlformats.org/drawingml/2006/main" xmlns:p="http://schemas.openxmlformats.org/presentationml/2006/main" xmlns:r="http://schemas.openxmlformats.org/officeDocument/2006/relationships">
-  <p:cSld>
-    <p:bg>
-      <p:bgPr>
-        <a:solidFill>
-          <a:srgbClr val="F7F4EE"/>
-        </a:solidFill>
-        <a:effectLst/>
-      </p:bgPr>
-    </p:bg>
-    <p:spTree>
-      <p:nvGrpSpPr>
-        <p:cNvPr id="1" name=""/>
-        <p:cNvGrpSpPr/>
-        <p:nvPr/>
-      </p:nvGrpSpPr>
-      <p:grpSpPr/>
-      <p:sp>
-        <p:nvSpPr>
-          <p:cNvPr id="2" name="Rectangle 1"/>
+              <a:t>A person, a place, a group, a song. Write it on your card and keep it.</a:t>
+            </a:r>
+          </a:p>
+        </p:txBody>
+      </p:sp>
+      <p:sp>
+        <p:nvSpPr>
+          <p:cNvPr id="7" name="Rectangle 6"/>
           <p:cNvSpPr/>
           <p:nvPr/>
         </p:nvSpPr>
         <p:spPr>
           <a:xfrm>
-            <a:off x="548640" y="502920"/>
-            <a:ext cx="457200" cy="54864"/>
+            <a:off x="822960" y="4023360"/>
+            <a:ext cx="10515600" cy="1371600"/>
           </a:xfrm>
           <a:prstGeom prst="rect">
             <a:avLst/>
           </a:prstGeom>
           <a:solidFill>
-            <a:srgbClr val="F47B20"/>
+            <a:srgbClr val="FFFFFF"/>
           </a:solidFill>
-          <a:ln>
-            <a:noFill/>
+          <a:ln w="15875">
+            <a:solidFill>
+              <a:srgbClr val="1C1B19"/>
+            </a:solidFill>
           </a:ln>
           <a:effectLst/>
         </p:spPr>
@@ -7470,14 +7562,14 @@
       </p:sp>
       <p:sp>
         <p:nvSpPr>
-          <p:cNvPr id="3" name="TextBox 2"/>
+          <p:cNvPr id="8" name="TextBox 7"/>
           <p:cNvSpPr txBox="1"/>
           <p:nvPr/>
         </p:nvSpPr>
         <p:spPr>
           <a:xfrm>
-            <a:off x="1143000" y="393192"/>
-            <a:ext cx="8229600" cy="274320"/>
+            <a:off x="1097280" y="4206240"/>
+            <a:ext cx="10058400" cy="365760"/>
           </a:xfrm>
           <a:prstGeom prst="rect">
             <a:avLst/>
@@ -7498,25 +7590,25 @@
             <a:r>
               <a:rPr sz="1200" b="1" i="0">
                 <a:solidFill>
-                  <a:srgbClr val="5D5A54"/>
+                  <a:srgbClr val="0B2D5B"/>
                 </a:solidFill>
                 <a:latin typeface="Inter Tight"/>
               </a:rPr>
-              <a:t>HOME GAMES AND AWAY GAMES</a:t>
-            </a:r>
-          </a:p>
-        </p:txBody>
-      </p:sp>
-      <p:sp>
-        <p:nvSpPr>
-          <p:cNvPr id="4" name="TextBox 3"/>
+              <a:t>STUDENT PAGE</a:t>
+            </a:r>
+          </a:p>
+        </p:txBody>
+      </p:sp>
+      <p:sp>
+        <p:nvSpPr>
+          <p:cNvPr id="9" name="TextBox 8"/>
           <p:cNvSpPr txBox="1"/>
           <p:nvPr/>
         </p:nvSpPr>
         <p:spPr>
           <a:xfrm>
-            <a:off x="8229600" y="6400800"/>
-            <a:ext cx="3410712" cy="274320"/>
+            <a:off x="1097280" y="4617720"/>
+            <a:ext cx="10058400" cy="640080"/>
           </a:xfrm>
           <a:prstGeom prst="rect">
             <a:avLst/>
@@ -7529,83 +7621,68 @@
           </a:bodyPr>
           <a:lstStyle/>
           <a:p>
-            <a:pPr algn="r">
-              <a:spcAft>
-                <a:spcPts val="450"/>
-              </a:spcAft>
-            </a:pPr>
-            <a:r>
-              <a:rPr sz="1000" b="0" i="0">
-                <a:solidFill>
-                  <a:srgbClr val="5D5A54"/>
+            <a:pPr algn="l">
+              <a:spcAft>
+                <a:spcPts val="900"/>
+              </a:spcAft>
+            </a:pPr>
+            <a:r>
+              <a:rPr sz="2000" b="0" i="0">
+                <a:solidFill>
+                  <a:srgbClr val="1C1B19"/>
                 </a:solidFill>
                 <a:latin typeface="Inter Tight"/>
               </a:rPr>
-              <a:t>Beaver Counseling</a:t>
-            </a:r>
-          </a:p>
-        </p:txBody>
-      </p:sp>
-      <p:sp>
-        <p:nvSpPr>
-          <p:cNvPr id="5" name="TextBox 4"/>
-          <p:cNvSpPr txBox="1"/>
-          <p:nvPr/>
-        </p:nvSpPr>
-        <p:spPr>
-          <a:xfrm>
-            <a:off x="822960" y="1005840"/>
-            <a:ext cx="10515600" cy="914400"/>
-          </a:xfrm>
-          <a:prstGeom prst="rect">
-            <a:avLst/>
-          </a:prstGeom>
-          <a:noFill/>
-        </p:spPr>
-        <p:txBody>
-          <a:bodyPr wrap="square" anchor="t" lIns="0" rIns="0" tIns="0" bIns="0">
-            <a:spAutoFit/>
-          </a:bodyPr>
-          <a:lstStyle/>
-          <a:p>
-            <a:pPr algn="l">
-              <a:spcAft>
-                <a:spcPts val="1530"/>
-              </a:spcAft>
-            </a:pPr>
-            <a:r>
-              <a:rPr sz="3400" b="1" i="0">
-                <a:solidFill>
-                  <a:srgbClr val="1C1B19"/>
-                </a:solidFill>
-                <a:latin typeface="Source Serif 4"/>
-              </a:rPr>
-              <a:t>Teams play differently on the road.</a:t>
-            </a:r>
-          </a:p>
-        </p:txBody>
-      </p:sp>
-      <p:sp>
-        <p:nvSpPr>
-          <p:cNvPr id="6" name="Rectangle 5"/>
+              <a:t>https://rmwtoolkit.github.io/bcds-toolkit/code-switching-high-school.html</a:t>
+            </a:r>
+          </a:p>
+        </p:txBody>
+      </p:sp>
+    </p:spTree>
+  </p:cSld>
+  <p:clrMapOvr>
+    <a:masterClrMapping/>
+  </p:clrMapOvr>
+</p:sld>
+</file>
+
+<file path=ppt/slides/slide8.xml><?xml version="1.0" encoding="utf-8"?>
+<p:sld xmlns:a="http://schemas.openxmlformats.org/drawingml/2006/main" xmlns:p="http://schemas.openxmlformats.org/presentationml/2006/main" xmlns:r="http://schemas.openxmlformats.org/officeDocument/2006/relationships" show="0">
+  <p:cSld>
+    <p:bg>
+      <p:bgPr>
+        <a:solidFill>
+          <a:srgbClr val="EEEBE4"/>
+        </a:solidFill>
+        <a:effectLst/>
+      </p:bgPr>
+    </p:bg>
+    <p:spTree>
+      <p:nvGrpSpPr>
+        <p:cNvPr id="1" name=""/>
+        <p:cNvGrpSpPr/>
+        <p:nvPr/>
+      </p:nvGrpSpPr>
+      <p:grpSpPr/>
+      <p:sp>
+        <p:nvSpPr>
+          <p:cNvPr id="2" name="Rectangle 1"/>
           <p:cNvSpPr/>
           <p:nvPr/>
         </p:nvSpPr>
         <p:spPr>
           <a:xfrm>
-            <a:off x="822960" y="2103120"/>
-            <a:ext cx="5120640" cy="3931920"/>
+            <a:off x="0" y="0"/>
+            <a:ext cx="12191695" cy="384048"/>
           </a:xfrm>
           <a:prstGeom prst="rect">
             <a:avLst/>
           </a:prstGeom>
           <a:solidFill>
-            <a:srgbClr val="FFFFFF"/>
+            <a:srgbClr val="0B2D5B"/>
           </a:solidFill>
-          <a:ln w="15875">
-            <a:solidFill>
-              <a:srgbClr val="D8D2C6"/>
-            </a:solidFill>
+          <a:ln>
+            <a:noFill/>
           </a:ln>
           <a:effectLst/>
         </p:spPr>
@@ -7633,14 +7710,14 @@
       </p:sp>
       <p:sp>
         <p:nvSpPr>
-          <p:cNvPr id="7" name="TextBox 6"/>
+          <p:cNvPr id="3" name="TextBox 2"/>
           <p:cNvSpPr txBox="1"/>
           <p:nvPr/>
         </p:nvSpPr>
         <p:spPr>
           <a:xfrm>
-            <a:off x="1097280" y="2286000"/>
-            <a:ext cx="4572000" cy="457200"/>
+            <a:off x="548640" y="100584"/>
+            <a:ext cx="10972800" cy="274320"/>
           </a:xfrm>
           <a:prstGeom prst="rect">
             <a:avLst/>
@@ -7655,31 +7732,31 @@
           <a:p>
             <a:pPr algn="l">
               <a:spcAft>
-                <a:spcPts val="585"/>
-              </a:spcAft>
-            </a:pPr>
-            <a:r>
-              <a:rPr sz="1300" b="1" i="0">
-                <a:solidFill>
-                  <a:srgbClr val="0B2D5B"/>
+                <a:spcPts val="495"/>
+              </a:spcAft>
+            </a:pPr>
+            <a:r>
+              <a:rPr sz="1100" b="1" i="0">
+                <a:solidFill>
+                  <a:srgbClr val="FFFFFF"/>
                 </a:solidFill>
                 <a:latin typeface="Inter Tight"/>
               </a:rPr>
-              <a:t>AWAY GAMES</a:t>
-            </a:r>
-          </a:p>
-        </p:txBody>
-      </p:sp>
-      <p:sp>
-        <p:nvSpPr>
-          <p:cNvPr id="8" name="TextBox 7"/>
+              <a:t>TEACHER PAGE  ·  skipped when you present  ·  Lesson plan</a:t>
+            </a:r>
+          </a:p>
+        </p:txBody>
+      </p:sp>
+      <p:sp>
+        <p:nvSpPr>
+          <p:cNvPr id="4" name="TextBox 3"/>
           <p:cNvSpPr txBox="1"/>
           <p:nvPr/>
         </p:nvSpPr>
         <p:spPr>
           <a:xfrm>
-            <a:off x="1097280" y="2788920"/>
-            <a:ext cx="4572000" cy="3108960"/>
+            <a:off x="548640" y="685800"/>
+            <a:ext cx="10972800" cy="731520"/>
           </a:xfrm>
           <a:prstGeom prst="rect">
             <a:avLst/>
@@ -7694,90 +7771,452 @@
           <a:p>
             <a:pPr algn="l">
               <a:spcAft>
-                <a:spcPts val="855"/>
-              </a:spcAft>
-            </a:pPr>
-            <a:r>
-              <a:rPr sz="1900" b="0" i="0">
+                <a:spcPts val="1530"/>
+              </a:spcAft>
+            </a:pPr>
+            <a:r>
+              <a:rPr sz="3400" b="1" i="0">
                 <a:solidFill>
                   <a:srgbClr val="1C1B19"/>
                 </a:solidFill>
                 <a:latin typeface="Source Serif 4"/>
               </a:rPr>
-              <a:t>Their crowd, their rules</a:t>
-            </a:r>
-          </a:p>
-          <a:p>
-            <a:pPr algn="l">
-              <a:spcAft>
-                <a:spcPts val="855"/>
-              </a:spcAft>
-            </a:pPr>
-            <a:r>
-              <a:rPr sz="1900" b="0" i="0">
+              <a:t>Code Switching</a:t>
+            </a:r>
+          </a:p>
+        </p:txBody>
+      </p:sp>
+      <p:sp>
+        <p:nvSpPr>
+          <p:cNvPr id="5" name="TextBox 4"/>
+          <p:cNvSpPr txBox="1"/>
+          <p:nvPr/>
+        </p:nvSpPr>
+        <p:spPr>
+          <a:xfrm>
+            <a:off x="548640" y="1325880"/>
+            <a:ext cx="10972800" cy="365760"/>
+          </a:xfrm>
+          <a:prstGeom prst="rect">
+            <a:avLst/>
+          </a:prstGeom>
+          <a:noFill/>
+        </p:spPr>
+        <p:txBody>
+          <a:bodyPr wrap="square" anchor="t" lIns="0" rIns="0" tIns="0" bIns="0">
+            <a:spAutoFit/>
+          </a:bodyPr>
+          <a:lstStyle/>
+          <a:p>
+            <a:pPr algn="l">
+              <a:spcAft>
+                <a:spcPts val="630"/>
+              </a:spcAft>
+            </a:pPr>
+            <a:r>
+              <a:rPr sz="1400" b="0" i="0">
+                <a:solidFill>
+                  <a:srgbClr val="5D5A54"/>
+                </a:solidFill>
+                <a:latin typeface="Inter Tight"/>
+              </a:rPr>
+              <a:t>Upper School  ·  20 minutes (fits a 30-minute advisory, with time for your opening check-in; 10-minute version below)  ·  Any grade</a:t>
+            </a:r>
+          </a:p>
+        </p:txBody>
+      </p:sp>
+      <p:sp>
+        <p:nvSpPr>
+          <p:cNvPr id="6" name="TextBox 5"/>
+          <p:cNvSpPr txBox="1"/>
+          <p:nvPr/>
+        </p:nvSpPr>
+        <p:spPr>
+          <a:xfrm>
+            <a:off x="548640" y="1828800"/>
+            <a:ext cx="5120640" cy="4389120"/>
+          </a:xfrm>
+          <a:prstGeom prst="rect">
+            <a:avLst/>
+          </a:prstGeom>
+          <a:noFill/>
+        </p:spPr>
+        <p:txBody>
+          <a:bodyPr wrap="square" anchor="t" lIns="0" rIns="0" tIns="0" bIns="0">
+            <a:spAutoFit/>
+          </a:bodyPr>
+          <a:lstStyle/>
+          <a:p>
+            <a:pPr algn="l">
+              <a:spcAft>
+                <a:spcPts val="675"/>
+              </a:spcAft>
+            </a:pPr>
+            <a:r>
+              <a:rPr sz="1100" b="1" i="0">
+                <a:solidFill>
+                  <a:srgbClr val="0B2D5B"/>
+                </a:solidFill>
+                <a:latin typeface="Inter Tight"/>
+              </a:rPr>
+              <a:t>GOAL</a:t>
+            </a:r>
+          </a:p>
+          <a:p>
+            <a:pPr algn="l">
+              <a:spcAft>
+                <a:spcPts val="675"/>
+              </a:spcAft>
+            </a:pPr>
+            <a:r>
+              <a:rPr sz="1500" b="0" i="0">
                 <a:solidFill>
                   <a:srgbClr val="1C1B19"/>
                 </a:solidFill>
                 <a:latin typeface="Source Serif 4"/>
               </a:rPr>
-              <a:t>You adjust, and that's a skill</a:t>
-            </a:r>
-          </a:p>
-          <a:p>
-            <a:pPr algn="l">
-              <a:spcAft>
-                <a:spcPts val="855"/>
-              </a:spcAft>
-            </a:pPr>
-            <a:r>
-              <a:rPr sz="1900" b="0" i="0">
+              <a:t>Students can describe code switching as a normal skill, name what it can protect and what it can cost, and identify one place where they get to be all the way themselves. Nobody is asked to name their race, culture, religion, gender, sexuality or disability, or to share what they switch.</a:t>
+            </a:r>
+          </a:p>
+          <a:p>
+            <a:pPr algn="l">
+              <a:spcAft>
+                <a:spcPts val="675"/>
+              </a:spcAft>
+            </a:pPr>
+            <a:r>
+              <a:rPr sz="1500" b="0" i="0">
                 <a:solidFill>
                   <a:srgbClr val="1C1B19"/>
                 </a:solidFill>
                 <a:latin typeface="Source Serif 4"/>
               </a:rPr>
-              <a:t>Class, a new team, a job</a:t>
-            </a:r>
-          </a:p>
-          <a:p>
-            <a:pPr algn="l">
-              <a:spcAft>
-                <a:spcPts val="855"/>
-              </a:spcAft>
-            </a:pPr>
-            <a:r>
-              <a:rPr sz="1900" b="0" i="0">
+              <a:t/>
+            </a:r>
+          </a:p>
+          <a:p>
+            <a:pPr algn="l">
+              <a:spcAft>
+                <a:spcPts val="675"/>
+              </a:spcAft>
+            </a:pPr>
+            <a:r>
+              <a:rPr sz="1100" b="1" i="0">
+                <a:solidFill>
+                  <a:srgbClr val="0B2D5B"/>
+                </a:solidFill>
+                <a:latin typeface="Inter Tight"/>
+              </a:rPr>
+              <a:t>MATERIALS</a:t>
+            </a:r>
+          </a:p>
+          <a:p>
+            <a:pPr algn="l">
+              <a:spcAft>
+                <a:spcPts val="675"/>
+              </a:spcAft>
+            </a:pPr>
+            <a:r>
+              <a:rPr sz="1500" b="0" i="0">
                 <a:solidFill>
                   <a:srgbClr val="1C1B19"/>
                 </a:solidFill>
                 <a:latin typeface="Source Serif 4"/>
               </a:rPr>
-              <a:t>Can wear you out</a:t>
-            </a:r>
-          </a:p>
-        </p:txBody>
-      </p:sp>
-      <p:sp>
-        <p:nvSpPr>
-          <p:cNvPr id="9" name="Rectangle 8"/>
+              <a:t>Index cards, one per student</a:t>
+            </a:r>
+          </a:p>
+          <a:p>
+            <a:pPr algn="l">
+              <a:spcAft>
+                <a:spcPts val="675"/>
+              </a:spcAft>
+            </a:pPr>
+            <a:r>
+              <a:rPr sz="1500" b="0" i="0">
+                <a:solidFill>
+                  <a:srgbClr val="1C1B19"/>
+                </a:solidFill>
+                <a:latin typeface="Source Serif 4"/>
+              </a:rPr>
+              <a:t>A board or chart paper</a:t>
+            </a:r>
+          </a:p>
+          <a:p>
+            <a:pPr algn="l">
+              <a:spcAft>
+                <a:spcPts val="675"/>
+              </a:spcAft>
+            </a:pPr>
+            <a:r>
+              <a:rPr sz="1500" b="0" i="0">
+                <a:solidFill>
+                  <a:srgbClr val="1C1B19"/>
+                </a:solidFill>
+                <a:latin typeface="Source Serif 4"/>
+              </a:rPr>
+              <a:t>The student page link (last slide) to share after advisory</a:t>
+            </a:r>
+          </a:p>
+        </p:txBody>
+      </p:sp>
+      <p:sp>
+        <p:nvSpPr>
+          <p:cNvPr id="7" name="TextBox 6"/>
+          <p:cNvSpPr txBox="1"/>
+          <p:nvPr/>
+        </p:nvSpPr>
+        <p:spPr>
+          <a:xfrm>
+            <a:off x="6126480" y="1828800"/>
+            <a:ext cx="5486400" cy="4389120"/>
+          </a:xfrm>
+          <a:prstGeom prst="rect">
+            <a:avLst/>
+          </a:prstGeom>
+          <a:noFill/>
+        </p:spPr>
+        <p:txBody>
+          <a:bodyPr wrap="square" anchor="t" lIns="0" rIns="0" tIns="0" bIns="0">
+            <a:spAutoFit/>
+          </a:bodyPr>
+          <a:lstStyle/>
+          <a:p>
+            <a:pPr algn="l">
+              <a:spcAft>
+                <a:spcPts val="630"/>
+              </a:spcAft>
+            </a:pPr>
+            <a:r>
+              <a:rPr sz="1100" b="1" i="0">
+                <a:solidFill>
+                  <a:srgbClr val="0B2D5B"/>
+                </a:solidFill>
+                <a:latin typeface="Inter Tight"/>
+              </a:rPr>
+              <a:t>FLOW</a:t>
+            </a:r>
+          </a:p>
+          <a:p>
+            <a:pPr algn="l">
+              <a:spcAft>
+                <a:spcPts val="630"/>
+              </a:spcAft>
+            </a:pPr>
+            <a:r>
+              <a:rPr sz="1300" b="1" i="0">
+                <a:solidFill>
+                  <a:srgbClr val="F47B20"/>
+                </a:solidFill>
+                <a:latin typeface="Inter Tight"/>
+              </a:rPr>
+              <a:t>3 min   </a:t>
+            </a:r>
+            <a:r>
+              <a:rPr sz="1400" b="0" i="0">
+                <a:solidFill>
+                  <a:srgbClr val="1C1B19"/>
+                </a:solidFill>
+                <a:latin typeface="Source Serif 4"/>
+              </a:rPr>
+              <a:t>Three rooms: how do you talk in each?</a:t>
+            </a:r>
+          </a:p>
+          <a:p>
+            <a:pPr algn="l">
+              <a:spcAft>
+                <a:spcPts val="630"/>
+              </a:spcAft>
+            </a:pPr>
+            <a:r>
+              <a:rPr sz="1300" b="1" i="0">
+                <a:solidFill>
+                  <a:srgbClr val="F47B20"/>
+                </a:solidFill>
+                <a:latin typeface="Inter Tight"/>
+              </a:rPr>
+              <a:t>4 min   </a:t>
+            </a:r>
+            <a:r>
+              <a:rPr sz="1400" b="0" i="0">
+                <a:solidFill>
+                  <a:srgbClr val="1C1B19"/>
+                </a:solidFill>
+                <a:latin typeface="Source Serif 4"/>
+              </a:rPr>
+              <a:t>What people switch (private tally)</a:t>
+            </a:r>
+          </a:p>
+          <a:p>
+            <a:pPr algn="l">
+              <a:spcAft>
+                <a:spcPts val="630"/>
+              </a:spcAft>
+            </a:pPr>
+            <a:r>
+              <a:rPr sz="1300" b="1" i="0">
+                <a:solidFill>
+                  <a:srgbClr val="F47B20"/>
+                </a:solidFill>
+                <a:latin typeface="Inter Tight"/>
+              </a:rPr>
+              <a:t>5 min   </a:t>
+            </a:r>
+            <a:r>
+              <a:rPr sz="1400" b="0" i="0">
+                <a:solidFill>
+                  <a:srgbClr val="1C1B19"/>
+                </a:solidFill>
+                <a:latin typeface="Source Serif 4"/>
+              </a:rPr>
+              <a:t>Home games and away games</a:t>
+            </a:r>
+          </a:p>
+          <a:p>
+            <a:pPr algn="l">
+              <a:spcAft>
+                <a:spcPts val="630"/>
+              </a:spcAft>
+            </a:pPr>
+            <a:r>
+              <a:rPr sz="1300" b="1" i="0">
+                <a:solidFill>
+                  <a:srgbClr val="F47B20"/>
+                </a:solidFill>
+                <a:latin typeface="Inter Tight"/>
+              </a:rPr>
+              <a:t>5 min   </a:t>
+            </a:r>
+            <a:r>
+              <a:rPr sz="1400" b="0" i="0">
+                <a:solidFill>
+                  <a:srgbClr val="1C1B19"/>
+                </a:solidFill>
+                <a:latin typeface="Source Serif 4"/>
+              </a:rPr>
+              <a:t>What it gives, what it costs</a:t>
+            </a:r>
+          </a:p>
+          <a:p>
+            <a:pPr algn="l">
+              <a:spcAft>
+                <a:spcPts val="630"/>
+              </a:spcAft>
+            </a:pPr>
+            <a:r>
+              <a:rPr sz="1300" b="1" i="0">
+                <a:solidFill>
+                  <a:srgbClr val="F47B20"/>
+                </a:solidFill>
+                <a:latin typeface="Inter Tight"/>
+              </a:rPr>
+              <a:t>3 min   </a:t>
+            </a:r>
+            <a:r>
+              <a:rPr sz="1400" b="0" i="0">
+                <a:solidFill>
+                  <a:srgbClr val="1C1B19"/>
+                </a:solidFill>
+                <a:latin typeface="Source Serif 4"/>
+              </a:rPr>
+              <a:t>Your home game, privately, and the student page link</a:t>
+            </a:r>
+          </a:p>
+          <a:p>
+            <a:pPr algn="l">
+              <a:spcAft>
+                <a:spcPts val="630"/>
+              </a:spcAft>
+            </a:pPr>
+            <a:r>
+              <a:rPr sz="1400" b="0" i="0">
+                <a:solidFill>
+                  <a:srgbClr val="1C1B19"/>
+                </a:solidFill>
+                <a:latin typeface="Source Serif 4"/>
+              </a:rPr>
+              <a:t/>
+            </a:r>
+          </a:p>
+          <a:p>
+            <a:pPr algn="l">
+              <a:spcAft>
+                <a:spcPts val="630"/>
+              </a:spcAft>
+            </a:pPr>
+            <a:r>
+              <a:rPr sz="1100" b="1" i="0">
+                <a:solidFill>
+                  <a:srgbClr val="0B2D5B"/>
+                </a:solidFill>
+                <a:latin typeface="Inter Tight"/>
+              </a:rPr>
+              <a:t>SHORT ON TIME (10-MINUTE CHECK-IN)</a:t>
+            </a:r>
+          </a:p>
+          <a:p>
+            <a:pPr algn="l">
+              <a:spcAft>
+                <a:spcPts val="630"/>
+              </a:spcAft>
+            </a:pPr>
+            <a:r>
+              <a:rPr sz="1400" b="0" i="0">
+                <a:solidFill>
+                  <a:srgbClr val="1C1B19"/>
+                </a:solidFill>
+                <a:latin typeface="Source Serif 4"/>
+              </a:rPr>
+              <a:t>Three rooms prompt (2), home games and away games (4), find one home game, privately (3), share the link (1).</a:t>
+            </a:r>
+          </a:p>
+        </p:txBody>
+      </p:sp>
+    </p:spTree>
+  </p:cSld>
+  <p:clrMapOvr>
+    <a:masterClrMapping/>
+  </p:clrMapOvr>
+</p:sld>
+</file>
+
+<file path=ppt/slides/slide9.xml><?xml version="1.0" encoding="utf-8"?>
+<p:sld xmlns:a="http://schemas.openxmlformats.org/drawingml/2006/main" xmlns:p="http://schemas.openxmlformats.org/presentationml/2006/main" xmlns:r="http://schemas.openxmlformats.org/officeDocument/2006/relationships" show="0">
+  <p:cSld>
+    <p:bg>
+      <p:bgPr>
+        <a:solidFill>
+          <a:srgbClr val="EEEBE4"/>
+        </a:solidFill>
+        <a:effectLst/>
+      </p:bgPr>
+    </p:bg>
+    <p:spTree>
+      <p:nvGrpSpPr>
+        <p:cNvPr id="1" name=""/>
+        <p:cNvGrpSpPr/>
+        <p:nvPr/>
+      </p:nvGrpSpPr>
+      <p:grpSpPr/>
+      <p:sp>
+        <p:nvSpPr>
+          <p:cNvPr id="2" name="Rectangle 1"/>
           <p:cNvSpPr/>
           <p:nvPr/>
         </p:nvSpPr>
         <p:spPr>
           <a:xfrm>
-            <a:off x="6309360" y="2103120"/>
-            <a:ext cx="5120640" cy="3931920"/>
+            <a:off x="0" y="0"/>
+            <a:ext cx="12191695" cy="384048"/>
           </a:xfrm>
           <a:prstGeom prst="rect">
             <a:avLst/>
           </a:prstGeom>
           <a:solidFill>
-            <a:srgbClr val="FFFFFF"/>
+            <a:srgbClr val="0B2D5B"/>
           </a:solidFill>
-          <a:ln w="15875">
-            <a:solidFill>
-              <a:srgbClr val="D8D2C6"/>
-            </a:solidFill>
+          <a:ln>
+            <a:noFill/>
           </a:ln>
           <a:effectLst/>
         </p:spPr>
@@ -7805,14 +8244,14 @@
       </p:sp>
       <p:sp>
         <p:nvSpPr>
-          <p:cNvPr id="10" name="TextBox 9"/>
+          <p:cNvPr id="3" name="TextBox 2"/>
           <p:cNvSpPr txBox="1"/>
           <p:nvPr/>
         </p:nvSpPr>
         <p:spPr>
           <a:xfrm>
-            <a:off x="6583680" y="2286000"/>
-            <a:ext cx="4572000" cy="457200"/>
+            <a:off x="548640" y="100584"/>
+            <a:ext cx="10972800" cy="274320"/>
           </a:xfrm>
           <a:prstGeom prst="rect">
             <a:avLst/>
@@ -7827,31 +8266,31 @@
           <a:p>
             <a:pPr algn="l">
               <a:spcAft>
-                <a:spcPts val="585"/>
-              </a:spcAft>
-            </a:pPr>
-            <a:r>
-              <a:rPr sz="1300" b="1" i="0">
-                <a:solidFill>
-                  <a:srgbClr val="0B2D5B"/>
+                <a:spcPts val="495"/>
+              </a:spcAft>
+            </a:pPr>
+            <a:r>
+              <a:rPr sz="1100" b="1" i="0">
+                <a:solidFill>
+                  <a:srgbClr val="FFFFFF"/>
                 </a:solidFill>
                 <a:latin typeface="Inter Tight"/>
               </a:rPr>
-              <a:t>HOME GAMES</a:t>
-            </a:r>
-          </a:p>
-        </p:txBody>
-      </p:sp>
-      <p:sp>
-        <p:nvSpPr>
-          <p:cNvPr id="11" name="TextBox 10"/>
+              <a:t>TEACHER PAGE  ·  skipped when you present  ·  Before you teach</a:t>
+            </a:r>
+          </a:p>
+        </p:txBody>
+      </p:sp>
+      <p:sp>
+        <p:nvSpPr>
+          <p:cNvPr id="4" name="TextBox 3"/>
           <p:cNvSpPr txBox="1"/>
           <p:nvPr/>
         </p:nvSpPr>
         <p:spPr>
           <a:xfrm>
-            <a:off x="6583680" y="2788920"/>
-            <a:ext cx="4572000" cy="3108960"/>
+            <a:off x="548640" y="685800"/>
+            <a:ext cx="10972800" cy="640080"/>
           </a:xfrm>
           <a:prstGeom prst="rect">
             <a:avLst/>
@@ -7866,149 +8305,31 @@
           <a:p>
             <a:pPr algn="l">
               <a:spcAft>
-                <a:spcPts val="855"/>
-              </a:spcAft>
-            </a:pPr>
-            <a:r>
-              <a:rPr sz="1900" b="0" i="0">
+                <a:spcPts val="1350"/>
+              </a:spcAft>
+            </a:pPr>
+            <a:r>
+              <a:rPr sz="3000" b="1" i="0">
                 <a:solidFill>
                   <a:srgbClr val="1C1B19"/>
                 </a:solidFill>
                 <a:latin typeface="Source Serif 4"/>
               </a:rPr>
-              <a:t>Places you get to be all the way you</a:t>
-            </a:r>
-          </a:p>
-          <a:p>
-            <a:pPr algn="l">
-              <a:spcAft>
-                <a:spcPts val="855"/>
-              </a:spcAft>
-            </a:pPr>
-            <a:r>
-              <a:rPr sz="1900" b="0" i="0">
-                <a:solidFill>
-                  <a:srgbClr val="1C1B19"/>
-                </a:solidFill>
-                <a:latin typeface="Source Serif 4"/>
-              </a:rPr>
-              <a:t>Friends who get it</a:t>
-            </a:r>
-          </a:p>
-          <a:p>
-            <a:pPr algn="l">
-              <a:spcAft>
-                <a:spcPts val="855"/>
-              </a:spcAft>
-            </a:pPr>
-            <a:r>
-              <a:rPr sz="1900" b="0" i="0">
-                <a:solidFill>
-                  <a:srgbClr val="1C1B19"/>
-                </a:solidFill>
-                <a:latin typeface="Source Serif 4"/>
-              </a:rPr>
-              <a:t>Music, food, a language that's yours</a:t>
-            </a:r>
-          </a:p>
-          <a:p>
-            <a:pPr algn="l">
-              <a:spcAft>
-                <a:spcPts val="855"/>
-              </a:spcAft>
-            </a:pPr>
-            <a:r>
-              <a:rPr sz="1900" b="0" i="0">
-                <a:solidFill>
-                  <a:srgbClr val="1C1B19"/>
-                </a:solidFill>
-                <a:latin typeface="Source Serif 4"/>
-              </a:rPr>
-              <a:t>Where you recharge</a:t>
-            </a:r>
-          </a:p>
-        </p:txBody>
-      </p:sp>
-    </p:spTree>
-  </p:cSld>
-  <p:clrMapOvr>
-    <a:masterClrMapping/>
-  </p:clrMapOvr>
-</p:sld>
-</file>
-
-<file path=ppt/slides/slide9.xml><?xml version="1.0" encoding="utf-8"?>
-<p:sld xmlns:a="http://schemas.openxmlformats.org/drawingml/2006/main" xmlns:p="http://schemas.openxmlformats.org/presentationml/2006/main" xmlns:r="http://schemas.openxmlformats.org/officeDocument/2006/relationships">
-  <p:cSld>
-    <p:bg>
-      <p:bgPr>
-        <a:solidFill>
-          <a:srgbClr val="F7F4EE"/>
-        </a:solidFill>
-        <a:effectLst/>
-      </p:bgPr>
-    </p:bg>
-    <p:spTree>
-      <p:nvGrpSpPr>
-        <p:cNvPr id="1" name=""/>
-        <p:cNvGrpSpPr/>
-        <p:nvPr/>
-      </p:nvGrpSpPr>
-      <p:grpSpPr/>
-      <p:sp>
-        <p:nvSpPr>
-          <p:cNvPr id="2" name="Rectangle 1"/>
-          <p:cNvSpPr/>
-          <p:nvPr/>
-        </p:nvSpPr>
-        <p:spPr>
-          <a:xfrm>
-            <a:off x="548640" y="502920"/>
-            <a:ext cx="457200" cy="54864"/>
-          </a:xfrm>
-          <a:prstGeom prst="rect">
-            <a:avLst/>
-          </a:prstGeom>
-          <a:solidFill>
-            <a:srgbClr val="F47B20"/>
-          </a:solidFill>
-          <a:ln>
-            <a:noFill/>
-          </a:ln>
-          <a:effectLst/>
-        </p:spPr>
-        <p:style>
-          <a:lnRef idx="1">
-            <a:schemeClr val="accent1"/>
-          </a:lnRef>
-          <a:fillRef idx="3">
-            <a:schemeClr val="accent1"/>
-          </a:fillRef>
-          <a:effectRef idx="2">
-            <a:schemeClr val="accent1"/>
-          </a:effectRef>
-          <a:fontRef idx="minor">
-            <a:schemeClr val="lt1"/>
-          </a:fontRef>
-        </p:style>
-        <p:txBody>
-          <a:bodyPr rtlCol="0" anchor="ctr"/>
-          <a:lstStyle/>
-          <a:p>
-            <a:pPr algn="ctr"/>
-          </a:p>
-        </p:txBody>
-      </p:sp>
-      <p:sp>
-        <p:nvSpPr>
-          <p:cNvPr id="3" name="TextBox 2"/>
+              <a:t>Before you teach</a:t>
+            </a:r>
+          </a:p>
+        </p:txBody>
+      </p:sp>
+      <p:sp>
+        <p:nvSpPr>
+          <p:cNvPr id="5" name="TextBox 4"/>
           <p:cNvSpPr txBox="1"/>
           <p:nvPr/>
         </p:nvSpPr>
         <p:spPr>
           <a:xfrm>
-            <a:off x="1143000" y="393192"/>
-            <a:ext cx="8229600" cy="274320"/>
+            <a:off x="548640" y="1463040"/>
+            <a:ext cx="5394960" cy="4937760"/>
           </a:xfrm>
           <a:prstGeom prst="rect">
             <a:avLst/>
@@ -8023,31 +8344,159 @@
           <a:p>
             <a:pPr algn="l">
               <a:spcAft>
-                <a:spcPts val="540"/>
-              </a:spcAft>
-            </a:pPr>
-            <a:r>
-              <a:rPr sz="1200" b="1" i="0">
-                <a:solidFill>
-                  <a:srgbClr val="5D5A54"/>
-                </a:solidFill>
-                <a:latin typeface="Inter Tight"/>
-              </a:rPr>
-              <a:t>WHAT THE RESEARCH SAYS</a:t>
-            </a:r>
-          </a:p>
-        </p:txBody>
-      </p:sp>
-      <p:sp>
-        <p:nvSpPr>
-          <p:cNvPr id="4" name="TextBox 3"/>
+                <a:spcPts val="585"/>
+              </a:spcAft>
+            </a:pPr>
+            <a:r>
+              <a:rPr sz="1500" b="1" i="0">
+                <a:solidFill>
+                  <a:srgbClr val="1C1B19"/>
+                </a:solidFill>
+                <a:latin typeface="Source Serif 4"/>
+              </a:rPr>
+              <a:t>Go first, lightly.</a:t>
+            </a:r>
+          </a:p>
+          <a:p>
+            <a:pPr algn="l">
+              <a:spcAft>
+                <a:spcPts val="585"/>
+              </a:spcAft>
+            </a:pPr>
+            <a:r>
+              <a:rPr sz="1300" b="0" i="0">
+                <a:solidFill>
+                  <a:srgbClr val="1C1B19"/>
+                </a:solidFill>
+                <a:latin typeface="Source Serif 4"/>
+              </a:rPr>
+              <a:t>Share a low-stakes example of your own: how you talk on the phone with your grandmother versus a parent-teacher conference, or the voice you use with a coach. It shows everyone switches, including adults, and keeps the room from turning toward any one student.</a:t>
+            </a:r>
+          </a:p>
+          <a:p>
+            <a:pPr algn="l">
+              <a:spcAft>
+                <a:spcPts val="585"/>
+              </a:spcAft>
+            </a:pPr>
+            <a:r>
+              <a:rPr sz="1300" b="0" i="0">
+                <a:solidFill>
+                  <a:srgbClr val="1C1B19"/>
+                </a:solidFill>
+                <a:latin typeface="Source Serif 4"/>
+              </a:rPr>
+              <a:t/>
+            </a:r>
+          </a:p>
+          <a:p>
+            <a:pPr algn="l">
+              <a:spcAft>
+                <a:spcPts val="585"/>
+              </a:spcAft>
+            </a:pPr>
+            <a:r>
+              <a:rPr sz="1500" b="1" i="0">
+                <a:solidFill>
+                  <a:srgbClr val="1C1B19"/>
+                </a:solidFill>
+                <a:latin typeface="Source Serif 4"/>
+              </a:rPr>
+              <a:t>Never ask a student to speak for a group.</a:t>
+            </a:r>
+          </a:p>
+          <a:p>
+            <a:pPr algn="l">
+              <a:spcAft>
+                <a:spcPts val="585"/>
+              </a:spcAft>
+            </a:pPr>
+            <a:r>
+              <a:rPr sz="1300" b="0" i="0">
+                <a:solidFill>
+                  <a:srgbClr val="1C1B19"/>
+                </a:solidFill>
+                <a:latin typeface="Source Serif 4"/>
+              </a:rPr>
+              <a:t>Don't call on the one student of a background to explain what switching is like for "their" community. Students choose what they share, and passing is always fine.</a:t>
+            </a:r>
+          </a:p>
+          <a:p>
+            <a:pPr algn="l">
+              <a:spcAft>
+                <a:spcPts val="585"/>
+              </a:spcAft>
+            </a:pPr>
+            <a:r>
+              <a:rPr sz="1300" b="0" i="0">
+                <a:solidFill>
+                  <a:srgbClr val="1C1B19"/>
+                </a:solidFill>
+                <a:latin typeface="Source Serif 4"/>
+              </a:rPr>
+              <a:t/>
+            </a:r>
+          </a:p>
+          <a:p>
+            <a:pPr algn="l">
+              <a:spcAft>
+                <a:spcPts val="585"/>
+              </a:spcAft>
+            </a:pPr>
+            <a:r>
+              <a:rPr sz="1500" b="1" i="0">
+                <a:solidFill>
+                  <a:srgbClr val="1C1B19"/>
+                </a:solidFill>
+                <a:latin typeface="Source Serif 4"/>
+              </a:rPr>
+              <a:t>Switching isn't fake, and it isn't wrong.</a:t>
+            </a:r>
+          </a:p>
+          <a:p>
+            <a:pPr algn="l">
+              <a:spcAft>
+                <a:spcPts val="585"/>
+              </a:spcAft>
+            </a:pPr>
+            <a:r>
+              <a:rPr sz="1300" b="0" i="0">
+                <a:solidFill>
+                  <a:srgbClr val="1C1B19"/>
+                </a:solidFill>
+                <a:latin typeface="Source Serif 4"/>
+              </a:rPr>
+              <a:t>Avoid framing one way of talking as "proper" and another as "slang." Every dialect and home language has its own rules. Linguists call Black English, for example, a full language variety with consistent grammar.</a:t>
+            </a:r>
+          </a:p>
+          <a:p>
+            <a:pPr algn="l">
+              <a:spcAft>
+                <a:spcPts val="585"/>
+              </a:spcAft>
+            </a:pPr>
+            <a:r>
+              <a:rPr sz="1300" b="0" i="0">
+                <a:solidFill>
+                  <a:srgbClr val="1C1B19"/>
+                </a:solidFill>
+                <a:latin typeface="Source Serif 4"/>
+              </a:rPr>
+              <a:t/>
+            </a:r>
+          </a:p>
+        </p:txBody>
+      </p:sp>
+      <p:sp>
+        <p:nvSpPr>
+          <p:cNvPr id="6" name="TextBox 5"/>
           <p:cNvSpPr txBox="1"/>
           <p:nvPr/>
         </p:nvSpPr>
         <p:spPr>
           <a:xfrm>
-            <a:off x="8229600" y="6400800"/>
-            <a:ext cx="3410712" cy="274320"/>
+            <a:off x="6217920" y="1463040"/>
+            <a:ext cx="5394960" cy="4937760"/>
           </a:xfrm>
           <a:prstGeom prst="rect">
             <a:avLst/>
@@ -8060,283 +8509,195 @@
           </a:bodyPr>
           <a:lstStyle/>
           <a:p>
-            <a:pPr algn="r">
-              <a:spcAft>
-                <a:spcPts val="450"/>
-              </a:spcAft>
-            </a:pPr>
-            <a:r>
-              <a:rPr sz="1000" b="0" i="0">
-                <a:solidFill>
-                  <a:srgbClr val="5D5A54"/>
-                </a:solidFill>
-                <a:latin typeface="Inter Tight"/>
-              </a:rPr>
-              <a:t>Beaver Counseling</a:t>
-            </a:r>
-          </a:p>
-        </p:txBody>
-      </p:sp>
-      <p:sp>
-        <p:nvSpPr>
-          <p:cNvPr id="5" name="TextBox 4"/>
-          <p:cNvSpPr txBox="1"/>
-          <p:nvPr/>
-        </p:nvSpPr>
-        <p:spPr>
-          <a:xfrm>
-            <a:off x="822960" y="914400"/>
-            <a:ext cx="10515600" cy="365760"/>
-          </a:xfrm>
-          <a:prstGeom prst="rect">
-            <a:avLst/>
-          </a:prstGeom>
-          <a:noFill/>
-        </p:spPr>
-        <p:txBody>
-          <a:bodyPr wrap="square" anchor="t" lIns="0" rIns="0" tIns="0" bIns="0">
-            <a:spAutoFit/>
-          </a:bodyPr>
-          <a:lstStyle/>
-          <a:p>
-            <a:pPr algn="l">
-              <a:spcAft>
-                <a:spcPts val="630"/>
-              </a:spcAft>
-            </a:pPr>
-            <a:r>
-              <a:rPr sz="1400" b="1" i="0">
-                <a:solidFill>
-                  <a:srgbClr val="0B2D5B"/>
-                </a:solidFill>
-                <a:latin typeface="Inter Tight"/>
-              </a:rPr>
-              <a:t>Nguyen &amp; Benet-Martínez, 2013  ·  McCluney et al., 2021  ·  Durkee &amp; Williams, 2015</a:t>
-            </a:r>
-          </a:p>
-        </p:txBody>
-      </p:sp>
-      <p:sp>
-        <p:nvSpPr>
-          <p:cNvPr id="6" name="TextBox 5"/>
-          <p:cNvSpPr txBox="1"/>
-          <p:nvPr/>
-        </p:nvSpPr>
-        <p:spPr>
-          <a:xfrm>
-            <a:off x="822960" y="1325880"/>
-            <a:ext cx="10515600" cy="1097280"/>
-          </a:xfrm>
-          <a:prstGeom prst="rect">
-            <a:avLst/>
-          </a:prstGeom>
-          <a:noFill/>
-        </p:spPr>
-        <p:txBody>
-          <a:bodyPr wrap="square" anchor="t" lIns="0" rIns="0" tIns="0" bIns="0">
-            <a:spAutoFit/>
-          </a:bodyPr>
-          <a:lstStyle/>
-          <a:p>
-            <a:pPr algn="l">
-              <a:spcAft>
-                <a:spcPts val="1440"/>
-              </a:spcAft>
-            </a:pPr>
-            <a:r>
-              <a:rPr sz="3200" b="1" i="0">
+            <a:pPr algn="l">
+              <a:spcAft>
+                <a:spcPts val="585"/>
+              </a:spcAft>
+            </a:pPr>
+            <a:r>
+              <a:rPr sz="1500" b="1" i="0">
                 <a:solidFill>
                   <a:srgbClr val="1C1B19"/>
                 </a:solidFill>
                 <a:latin typeface="Source Serif 4"/>
               </a:rPr>
-              <a:t>Switching helps. It can also cost.</a:t>
-            </a:r>
-          </a:p>
-        </p:txBody>
-      </p:sp>
-      <p:sp>
-        <p:nvSpPr>
-          <p:cNvPr id="7" name="TextBox 6"/>
-          <p:cNvSpPr txBox="1"/>
-          <p:nvPr/>
-        </p:nvSpPr>
-        <p:spPr>
-          <a:xfrm>
-            <a:off x="822960" y="2514600"/>
-            <a:ext cx="10515600" cy="2194560"/>
-          </a:xfrm>
-          <a:prstGeom prst="rect">
-            <a:avLst/>
-          </a:prstGeom>
-          <a:noFill/>
-        </p:spPr>
-        <p:txBody>
-          <a:bodyPr wrap="square" anchor="t" lIns="0" rIns="0" tIns="0" bIns="0">
-            <a:spAutoFit/>
-          </a:bodyPr>
-          <a:lstStyle/>
-          <a:p>
-            <a:pPr algn="l">
-              <a:spcAft>
-                <a:spcPts val="855"/>
-              </a:spcAft>
-            </a:pPr>
-            <a:r>
-              <a:rPr sz="1900" b="0" i="0">
+              <a:t>Unfairness is real. Name it without a lecture.</a:t>
+            </a:r>
+          </a:p>
+          <a:p>
+            <a:pPr algn="l">
+              <a:spcAft>
+                <a:spcPts val="585"/>
+              </a:spcAft>
+            </a:pPr>
+            <a:r>
+              <a:rPr sz="1300" b="0" i="0">
                 <a:solidFill>
                   <a:srgbClr val="1C1B19"/>
                 </a:solidFill>
                 <a:latin typeface="Source Serif 4"/>
               </a:rPr>
-              <a:t>•  Switching can help how others see you.</a:t>
-            </a:r>
-          </a:p>
-          <a:p>
-            <a:pPr algn="l">
-              <a:spcAft>
-                <a:spcPts val="855"/>
-              </a:spcAft>
-            </a:pPr>
-            <a:r>
-              <a:rPr sz="1900" b="0" i="0">
+              <a:t>Some students switch to stay safe from bias. Say plainly that's on the people treating them differently, not on them. You don't need to resolve it in 20 minutes.</a:t>
+            </a:r>
+          </a:p>
+          <a:p>
+            <a:pPr algn="l">
+              <a:spcAft>
+                <a:spcPts val="585"/>
+              </a:spcAft>
+            </a:pPr>
+            <a:r>
+              <a:rPr sz="1300" b="0" i="0">
                 <a:solidFill>
                   <a:srgbClr val="1C1B19"/>
                 </a:solidFill>
                 <a:latin typeface="Source Serif 4"/>
               </a:rPr>
-              <a:t>•  Watching yourself all day takes energy.</a:t>
-            </a:r>
-          </a:p>
-          <a:p>
-            <a:pPr algn="l">
-              <a:spcAft>
-                <a:spcPts val="855"/>
-              </a:spcAft>
-            </a:pPr>
-            <a:r>
-              <a:rPr sz="1900" b="0" i="0">
+              <a:t/>
+            </a:r>
+          </a:p>
+          <a:p>
+            <a:pPr algn="l">
+              <a:spcAft>
+                <a:spcPts val="585"/>
+              </a:spcAft>
+            </a:pPr>
+            <a:r>
+              <a:rPr sz="1500" b="1" i="0">
                 <a:solidFill>
                   <a:srgbClr val="1C1B19"/>
                 </a:solidFill>
                 <a:latin typeface="Source Serif 4"/>
               </a:rPr>
-              <a:t>•  Being called "fake" or told "you've changed" adds stress.</a:t>
-            </a:r>
-          </a:p>
-          <a:p>
-            <a:pPr algn="l">
-              <a:spcAft>
-                <a:spcPts val="855"/>
-              </a:spcAft>
-            </a:pPr>
-            <a:r>
-              <a:rPr sz="1900" b="0" i="0">
+              <a:t>Coming out is the student's call.</a:t>
+            </a:r>
+          </a:p>
+          <a:p>
+            <a:pPr algn="l">
+              <a:spcAft>
+                <a:spcPts val="585"/>
+              </a:spcAft>
+            </a:pPr>
+            <a:r>
+              <a:rPr sz="1300" b="0" i="0">
                 <a:solidFill>
                   <a:srgbClr val="1C1B19"/>
                 </a:solidFill>
                 <a:latin typeface="Source Serif 4"/>
               </a:rPr>
-              <a:t>•  People who hold two cultures together tend to do better.</a:t>
-            </a:r>
-          </a:p>
-        </p:txBody>
-      </p:sp>
-      <p:sp>
-        <p:nvSpPr>
-          <p:cNvPr id="8" name="Rectangle 7"/>
-          <p:cNvSpPr/>
-          <p:nvPr/>
-        </p:nvSpPr>
-        <p:spPr>
-          <a:xfrm>
-            <a:off x="822960" y="4892040"/>
-            <a:ext cx="73152" cy="1097280"/>
-          </a:xfrm>
-          <a:prstGeom prst="rect">
-            <a:avLst/>
-          </a:prstGeom>
-          <a:solidFill>
-            <a:srgbClr val="F47B20"/>
-          </a:solidFill>
-          <a:ln>
-            <a:noFill/>
-          </a:ln>
-          <a:effectLst/>
-        </p:spPr>
-        <p:style>
-          <a:lnRef idx="1">
-            <a:schemeClr val="accent1"/>
-          </a:lnRef>
-          <a:fillRef idx="3">
-            <a:schemeClr val="accent1"/>
-          </a:fillRef>
-          <a:effectRef idx="2">
-            <a:schemeClr val="accent1"/>
-          </a:effectRef>
-          <a:fontRef idx="minor">
-            <a:schemeClr val="lt1"/>
-          </a:fontRef>
-        </p:style>
-        <p:txBody>
-          <a:bodyPr rtlCol="0" anchor="ctr"/>
-          <a:lstStyle/>
-          <a:p>
-            <a:pPr algn="ctr"/>
-          </a:p>
-        </p:txBody>
-      </p:sp>
-      <p:sp>
-        <p:nvSpPr>
-          <p:cNvPr id="9" name="TextBox 8"/>
-          <p:cNvSpPr txBox="1"/>
-          <p:nvPr/>
-        </p:nvSpPr>
-        <p:spPr>
-          <a:xfrm>
-            <a:off x="1097280" y="4892040"/>
-            <a:ext cx="10241280" cy="1188720"/>
-          </a:xfrm>
-          <a:prstGeom prst="rect">
-            <a:avLst/>
-          </a:prstGeom>
-          <a:noFill/>
-        </p:spPr>
-        <p:txBody>
-          <a:bodyPr wrap="square" anchor="t" lIns="0" rIns="0" tIns="0" bIns="0">
-            <a:spAutoFit/>
-          </a:bodyPr>
-          <a:lstStyle/>
-          <a:p>
-            <a:pPr algn="l">
-              <a:spcAft>
-                <a:spcPts val="855"/>
-              </a:spcAft>
-            </a:pPr>
-            <a:r>
-              <a:rPr sz="1200" b="1" i="0">
-                <a:solidFill>
-                  <a:srgbClr val="F47B20"/>
-                </a:solidFill>
-                <a:latin typeface="Inter Tight"/>
-              </a:rPr>
-              <a:t>IN CLASS</a:t>
-            </a:r>
-          </a:p>
-          <a:p>
-            <a:pPr algn="l">
-              <a:spcAft>
-                <a:spcPts val="855"/>
-              </a:spcAft>
-            </a:pPr>
-            <a:r>
-              <a:rPr sz="1900" b="0" i="0">
+              <a:t>Gender and sexuality come up on the student page as things people sometimes hide. Never guess, never out anyone, and don't ask students to say whether this applies to them.</a:t>
+            </a:r>
+          </a:p>
+          <a:p>
+            <a:pPr algn="l">
+              <a:spcAft>
+                <a:spcPts val="585"/>
+              </a:spcAft>
+            </a:pPr>
+            <a:r>
+              <a:rPr sz="1300" b="0" i="0">
                 <a:solidFill>
                   <a:srgbClr val="1C1B19"/>
                 </a:solidFill>
                 <a:latin typeface="Source Serif 4"/>
               </a:rPr>
-              <a:t>Both versions of you can be real. You can choose where each one shows up.</a:t>
+              <a:t/>
+            </a:r>
+          </a:p>
+          <a:p>
+            <a:pPr algn="l">
+              <a:spcAft>
+                <a:spcPts val="585"/>
+              </a:spcAft>
+            </a:pPr>
+            <a:r>
+              <a:rPr sz="1500" b="1" i="0">
+                <a:solidFill>
+                  <a:srgbClr val="1C1B19"/>
+                </a:solidFill>
+                <a:latin typeface="Source Serif 4"/>
+              </a:rPr>
+              <a:t>Money switches too, in a lot of ways.</a:t>
+            </a:r>
+          </a:p>
+          <a:p>
+            <a:pPr algn="l">
+              <a:spcAft>
+                <a:spcPts val="585"/>
+              </a:spcAft>
+            </a:pPr>
+            <a:r>
+              <a:rPr sz="1300" b="0" i="0">
+                <a:solidFill>
+                  <a:srgbClr val="1C1B19"/>
+                </a:solidFill>
+                <a:latin typeface="Source Serif 4"/>
+              </a:rPr>
+              <a:t>At an independent school, money comes up constantly: trips over break, phones and clothes, eating out, camps, birthday plans, who drives and who takes the bus, who works after school or cares for siblings, who's on financial aid. In your own check-ins, ask "What was one good part of your break?" rather than "Where did you go?", keep plans that cost money optional, and never ask students to compare.</a:t>
+            </a:r>
+          </a:p>
+          <a:p>
+            <a:pPr algn="l">
+              <a:spcAft>
+                <a:spcPts val="585"/>
+              </a:spcAft>
+            </a:pPr>
+            <a:r>
+              <a:rPr sz="1300" b="0" i="0">
+                <a:solidFill>
+                  <a:srgbClr val="1C1B19"/>
+                </a:solidFill>
+                <a:latin typeface="Source Serif 4"/>
+              </a:rPr>
+              <a:t/>
+            </a:r>
+          </a:p>
+          <a:p>
+            <a:pPr algn="l">
+              <a:spcAft>
+                <a:spcPts val="585"/>
+              </a:spcAft>
+            </a:pPr>
+            <a:r>
+              <a:rPr sz="1500" b="1" i="0">
+                <a:solidFill>
+                  <a:srgbClr val="1C1B19"/>
+                </a:solidFill>
+                <a:latin typeface="Source Serif 4"/>
+              </a:rPr>
+              <a:t>Watch for students carrying a lot.</a:t>
+            </a:r>
+          </a:p>
+          <a:p>
+            <a:pPr algn="l">
+              <a:spcAft>
+                <a:spcPts val="585"/>
+              </a:spcAft>
+            </a:pPr>
+            <a:r>
+              <a:rPr sz="1300" b="0" i="0">
+                <a:solidFill>
+                  <a:srgbClr val="1C1B19"/>
+                </a:solidFill>
+                <a:latin typeface="Source Serif 4"/>
+              </a:rPr>
+              <a:t>A student who says they can't be themselves anywhere, or who describes being targeted for who they are, is worth a quiet check-in after advisory and a same-day note to a counselor.</a:t>
+            </a:r>
+          </a:p>
+          <a:p>
+            <a:pPr algn="l">
+              <a:spcAft>
+                <a:spcPts val="585"/>
+              </a:spcAft>
+            </a:pPr>
+            <a:r>
+              <a:rPr sz="1300" b="0" i="0">
+                <a:solidFill>
+                  <a:srgbClr val="1C1B19"/>
+                </a:solidFill>
+                <a:latin typeface="Source Serif 4"/>
+              </a:rPr>
+              <a:t/>
             </a:r>
           </a:p>
         </p:txBody>

--- a/decks/code-switching-lesson-v2.pptx
+++ b/decks/code-switching-lesson-v2.pptx
@@ -5416,6 +5416,45 @@
                 <a:latin typeface="Inter Tight"/>
               </a:rPr>
               <a:t>Beaver Upper School · Counseling</a:t>
+            </a:r>
+          </a:p>
+        </p:txBody>
+      </p:sp>
+      <p:sp>
+        <p:nvSpPr>
+          <p:cNvPr id="8" name="TextBox 7"/>
+          <p:cNvSpPr txBox="1"/>
+          <p:nvPr/>
+        </p:nvSpPr>
+        <p:spPr>
+          <a:xfrm>
+            <a:off x="6766560" y="5897880"/>
+            <a:ext cx="4846320" cy="640080"/>
+          </a:xfrm>
+          <a:prstGeom prst="rect">
+            <a:avLst/>
+          </a:prstGeom>
+          <a:noFill/>
+        </p:spPr>
+        <p:txBody>
+          <a:bodyPr wrap="square" anchor="t" lIns="0" rIns="0" tIns="0" bIns="0">
+            <a:spAutoFit/>
+          </a:bodyPr>
+          <a:lstStyle/>
+          <a:p>
+            <a:pPr algn="r">
+              <a:spcAft>
+                <a:spcPts val="495"/>
+              </a:spcAft>
+            </a:pPr>
+            <a:r>
+              <a:rPr sz="1100" b="0" i="0">
+                <a:solidFill>
+                  <a:srgbClr val="E8E4DA"/>
+                </a:solidFill>
+                <a:latin typeface="Inter Tight"/>
+              </a:rPr>
+              <a:t>Written by Dr. Rick Wilson, with AI-assisted drafting. Every lesson is reviewed and edited by Dr. Wilson.</a:t>
             </a:r>
           </a:p>
         </p:txBody>
